--- a/artifacts/speaking-portfolio-expanded/talks/judgment/judgment-15min-handout.pptx
+++ b/artifacts/speaking-portfolio-expanded/talks/judgment/judgment-15min-handout.pptx
@@ -17,6 +17,7 @@
     <p:sldId id="262" r:id="rIdSlide7"/>
     <p:sldId id="263" r:id="rIdSlide8"/>
     <p:sldId id="264" r:id="rIdSlide9"/>
+    <p:sldId id="265" r:id="rIdSlide10"/>
   </p:sldIdLst>
   <p:sldSz cx="10058400" cy="7772400" type="custom"/>
   <p:notesSz cx="6858000" cy="9144000"/>
@@ -101,7 +102,212 @@
                 <a:ea typeface="Arial"/>
                 <a:cs typeface="Arial"/>
               </a:rPr>
-              <a:t xml:space="preserve">40 minutes. Timings include the exercises and delivery pauses, without Q&amp;A. Sources checked 6 September 2026. Story prompts belong in speaker notes and require Dan’s own records before delivery.</a:t>
+              <a:t xml:space="preserve">40 minutes. Timings include the exercise, the arithmetic and delivery pauses, without Q&amp;A. Sources checked 7 September 2026. Story prompts belong in speaker notes and require Dan's own records before delivery.</a:t>
+            </a:r>
+            <a:endParaRPr lang="en-US" sz="1200"/>
+          </a:p>
+        </p:txBody>
+      </p:sp>
+    </p:spTree>
+  </p:cSld>
+  <p:clrMapOvr>
+    <a:masterClrMapping/>
+  </p:clrMapOvr>
+</p:notes>
+</file>
+
+<file path=ppt/notesSlides/notesSlide10.xml><?xml version="1.0" encoding="utf-8"?>
+<p:notes xmlns:a="http://schemas.openxmlformats.org/drawingml/2006/main" xmlns:r="http://schemas.openxmlformats.org/officeDocument/2006/relationships" xmlns:p="http://schemas.openxmlformats.org/presentationml/2006/main">
+  <p:cSld>
+    <p:spTree>
+      <p:nvGrpSpPr>
+        <p:cNvPr id="1" name=""/>
+        <p:cNvGrpSpPr/>
+        <p:nvPr/>
+      </p:nvGrpSpPr>
+      <p:grpSpPr>
+        <a:xfrm>
+          <a:off x="0" y="0"/>
+          <a:ext cx="0" cy="0"/>
+          <a:chOff x="0" y="0"/>
+          <a:chExt cx="0" cy="0"/>
+        </a:xfrm>
+      </p:grpSpPr>
+      <p:sp>
+        <p:nvSpPr>
+          <p:cNvPr id="2" name="Presenter notes"/>
+          <p:cNvSpPr txBox="1"/>
+          <p:nvPr>
+            <p:ph type="body" idx="1"/>
+          </p:nvPr>
+        </p:nvSpPr>
+        <p:spPr>
+          <a:xfrm>
+            <a:off x="457200" y="1428750"/>
+            <a:ext cx="5715000" cy="6667500"/>
+          </a:xfrm>
+        </p:spPr>
+        <p:txBody>
+          <a:bodyPr/>
+          <a:lstStyle/>
+          <a:p>
+            <a:pPr marL="0" indent="0">
+              <a:lnSpc>
+                <a:spcPts val="1560"/>
+              </a:lnSpc>
+              <a:spcAft>
+                <a:spcPts val="0"/>
+              </a:spcAft>
+              <a:buNone/>
+            </a:pPr>
+            <a:r>
+              <a:rPr lang="en-US" sz="1200" b="0">
+                <a:solidFill>
+                  <a:srgbClr val="202b33"/>
+                </a:solidFill>
+                <a:latin typeface="Arial"/>
+                <a:ea typeface="Arial"/>
+                <a:cs typeface="Arial"/>
+              </a:rPr>
+              <a:t xml:space="preserve">Debora Viana Thompson, Rebecca W. Hamilton and Roland T. Rust (2005), [Feature Fatigue: When Product Capabilities Become Too Much of a Good Thing](https://doi.org/10.1509/jmkr.2005.42.4.431), Journal of Marketing Research 42(4), 431–442. Noriaki Kano, Nobuhiko Seraku, Fumio Takahashi and Shinichi Tsuji (1984), Attractive Quality and Must-Be Quality, Journal of the Japanese Society for Quality Control 14(2), 39–48.</a:t>
+            </a:r>
+            <a:endParaRPr lang="en-US" sz="1200"/>
+          </a:p>
+          <a:p>
+            <a:pPr marL="0" indent="0">
+              <a:lnSpc>
+                <a:spcPts val="1560"/>
+              </a:lnSpc>
+              <a:spcAft>
+                <a:spcPts val="0"/>
+              </a:spcAft>
+              <a:buNone/>
+            </a:pPr>
+            <a:r>
+              <a:rPr lang="en-US" sz="1200" b="0">
+                <a:solidFill>
+                  <a:srgbClr val="202b33"/>
+                </a:solidFill>
+                <a:latin typeface="Arial"/>
+                <a:ea typeface="Arial"/>
+                <a:cs typeface="Arial"/>
+              </a:rPr>
+              <a:t xml:space="preserve"/>
+            </a:r>
+            <a:endParaRPr lang="en-US" sz="1200"/>
+          </a:p>
+          <a:p>
+            <a:pPr marL="0" indent="0">
+              <a:lnSpc>
+                <a:spcPts val="1560"/>
+              </a:lnSpc>
+              <a:spcAft>
+                <a:spcPts val="0"/>
+              </a:spcAft>
+              <a:buNone/>
+            </a:pPr>
+            <a:r>
+              <a:rPr lang="en-US" sz="1200" b="0">
+                <a:solidFill>
+                  <a:srgbClr val="202b33"/>
+                </a:solidFill>
+                <a:latin typeface="Arial"/>
+                <a:ea typeface="Arial"/>
+                <a:cs typeface="Arial"/>
+              </a:rPr>
+              <a:t xml:space="preserve">William Samuelson and Richard Zeckhauser (1988), [Status Quo Bias in Decision Making](https://doi.org/10.1007/BF00055564), Journal of Risk and Uncertainty 1(1), 7–59. Daniel Kahneman, Jack L. Knetsch and Richard H. Thaler (1990), [Experimental Tests of the Endowment Effect and the Coase Theorem](https://doi.org/10.1086/261737), Journal of Political Economy 98(6), 1325–1348. Jakob Nielsen (1994), [Ten Usability Heuristics for User Interface Design](https://www.nngroup.com/articles/ten-usability-heuristics/).</a:t>
+            </a:r>
+            <a:endParaRPr lang="en-US" sz="1200"/>
+          </a:p>
+          <a:p>
+            <a:pPr marL="0" indent="0">
+              <a:lnSpc>
+                <a:spcPts val="1560"/>
+              </a:lnSpc>
+              <a:spcAft>
+                <a:spcPts val="0"/>
+              </a:spcAft>
+              <a:buNone/>
+            </a:pPr>
+            <a:r>
+              <a:rPr lang="en-US" sz="1200" b="0">
+                <a:solidFill>
+                  <a:srgbClr val="202b33"/>
+                </a:solidFill>
+                <a:latin typeface="Arial"/>
+                <a:ea typeface="Arial"/>
+                <a:cs typeface="Arial"/>
+              </a:rPr>
+              <a:t xml:space="preserve"/>
+            </a:r>
+            <a:endParaRPr lang="en-US" sz="1200"/>
+          </a:p>
+          <a:p>
+            <a:pPr marL="0" indent="0">
+              <a:lnSpc>
+                <a:spcPts val="1560"/>
+              </a:lnSpc>
+              <a:spcAft>
+                <a:spcPts val="0"/>
+              </a:spcAft>
+              <a:buNone/>
+            </a:pPr>
+            <a:r>
+              <a:rPr lang="en-US" sz="1200" b="0">
+                <a:solidFill>
+                  <a:srgbClr val="202b33"/>
+                </a:solidFill>
+                <a:latin typeface="Arial"/>
+                <a:ea typeface="Arial"/>
+                <a:cs typeface="Arial"/>
+              </a:rPr>
+              <a:t xml:space="preserve">François Chollet (2019), [On the Measure of Intelligence](https://arxiv.org/abs/1911.01547), arXiv:1911.01547. Parshin Shojaee and colleagues (2025), [The Illusion of Thinking](https://machinelearning.apple.com/research/illusion-of-thinking), Apple Machine Learning Research; and the rebuttal, [The Illusion of the Illusion of Thinking](https://arxiv.org/abs/2506.09250), arXiv:2506.09250. Present as a contested exchange, not a settled result.</a:t>
+            </a:r>
+            <a:endParaRPr lang="en-US" sz="1200"/>
+          </a:p>
+          <a:p>
+            <a:pPr marL="0" indent="0">
+              <a:lnSpc>
+                <a:spcPts val="1560"/>
+              </a:lnSpc>
+              <a:spcAft>
+                <a:spcPts val="0"/>
+              </a:spcAft>
+              <a:buNone/>
+            </a:pPr>
+            <a:r>
+              <a:rPr lang="en-US" sz="1200" b="0">
+                <a:solidFill>
+                  <a:srgbClr val="202b33"/>
+                </a:solidFill>
+                <a:latin typeface="Arial"/>
+                <a:ea typeface="Arial"/>
+                <a:cs typeface="Arial"/>
+              </a:rPr>
+              <a:t xml:space="preserve"/>
+            </a:r>
+            <a:endParaRPr lang="en-US" sz="1200"/>
+          </a:p>
+          <a:p>
+            <a:pPr marL="0" indent="0">
+              <a:lnSpc>
+                <a:spcPts val="1560"/>
+              </a:lnSpc>
+              <a:spcAft>
+                <a:spcPts val="0"/>
+              </a:spcAft>
+              <a:buNone/>
+            </a:pPr>
+            <a:r>
+              <a:rPr lang="en-US" sz="1200" b="0">
+                <a:solidFill>
+                  <a:srgbClr val="202b33"/>
+                </a:solidFill>
+                <a:latin typeface="Arial"/>
+                <a:ea typeface="Arial"/>
+                <a:cs typeface="Arial"/>
+              </a:rPr>
+              <a:t xml:space="preserve">Eric von Hippel (1986), [Lead Users: A Source of Novel Product Concepts](https://doi.org/10.1287/mnsc.32.7.791), Management Science 32(7), 791–805. Eric von Hippel and Ralph Katz (2002), [Shifting Innovation to Users via Toolkits](https://doi.org/10.1287/mnsc.48.7.821.2817), Management Science 48(7), 821–833. Everett M. Rogers (2003), Diffusion of Innovations, 5th edition, Free Press.</a:t>
             </a:r>
             <a:endParaRPr lang="en-US" sz="1200"/>
           </a:p>
@@ -168,7 +374,7 @@
                 <a:ea typeface="Arial"/>
                 <a:cs typeface="Arial"/>
               </a:rPr>
-              <a:t xml:space="preserve">Code Is Cheap. Judgment Is Expensive.</a:t>
+              <a:t xml:space="preserve">Turn Your Thinkin' Tokens Up to 11</a:t>
             </a:r>
             <a:endParaRPr lang="en-US" sz="1200"/>
           </a:p>
@@ -214,7 +420,7 @@
                 <a:ea typeface="Arial"/>
                 <a:cs typeface="Arial"/>
               </a:rPr>
-              <a:t xml:space="preserve">Source slide 1. 00:00 to 01:30</a:t>
+              <a:t xml:space="preserve">Source slide 1. 00:00 to 02:00</a:t>
             </a:r>
             <a:endParaRPr lang="en-US" sz="1200"/>
           </a:p>
@@ -260,7 +466,7 @@
                 <a:ea typeface="Arial"/>
                 <a:cs typeface="Arial"/>
               </a:rPr>
-              <a:t xml:space="preserve">95% utilized → 19× waiting</a:t>
+              <a:t xml:space="preserve">Code is free. Features are free.</a:t>
             </a:r>
             <a:endParaRPr lang="en-US" sz="1200"/>
           </a:p>
@@ -306,7 +512,7 @@
                 <a:ea typeface="Arial"/>
                 <a:cs typeface="Arial"/>
               </a:rPr>
-              <a:t xml:space="preserve">Four plausible implementations. One reviewer.</a:t>
+              <a:t xml:space="preserve">Attention is the budget.</a:t>
             </a:r>
             <a:endParaRPr lang="en-US" sz="1200"/>
           </a:p>
@@ -352,7 +558,7 @@
                 <a:ea typeface="Arial"/>
                 <a:cs typeface="Arial"/>
               </a:rPr>
-              <a:t xml:space="preserve">Four good implementations arrive before lunch. The reviewer is still on yesterday's change. Generation got cheaper. Delivery acquired a queue.</a:t>
+              <a:t xml:space="preserve">Four features shipped before lunch. All four work. All four have tests. Your best customer opens the app for the first time in six weeks and cannot find the button she used every Friday. Nobody filed a bug.</a:t>
             </a:r>
             <a:endParaRPr lang="en-US" sz="1200"/>
           </a:p>
@@ -398,7 +604,7 @@
                 <a:ea typeface="Arial"/>
                 <a:cs typeface="Arial"/>
               </a:rPr>
-              <a:t xml:space="preserve">If your organization uses AI to build an infinite feature machine, you have tragically missed the potential of the magic AI genie. We can spend the gain on fewer defects and smaller changes. We do not have to spend it all on more code.</a:t>
+              <a:t xml:space="preserve">Here is the line this talk has to earn. Don't count what the feature cost you to build, count what it costs them to relearn.</a:t>
             </a:r>
             <a:endParaRPr lang="en-US" sz="1200"/>
           </a:p>
@@ -444,7 +650,7 @@
                 <a:ea typeface="Arial"/>
                 <a:cs typeface="Arial"/>
               </a:rPr>
-              <a:t xml:space="preserve">Here is the scope once: the queue and permission examples are teaching models, not measurements of your team. The nineteen-times wait assumes one server and a variability factor of one. We will do the arithmetic. The argument is that protecting review capacity belongs upstream, where we decide what enters the queue.</a:t>
+              <a:t xml:space="preserve">The title is a Spinal Tap joke and it is load-bearing. Turn the reasoning budget up to eleven. More tokens buy more consideration of situations the model has already seen. They do not buy taste, and they do not tell you which Tuesday.</a:t>
             </a:r>
             <a:endParaRPr lang="en-US" sz="1200"/>
           </a:p>
@@ -490,7 +696,7 @@
                 <a:ea typeface="Arial"/>
                 <a:cs typeface="Arial"/>
               </a:rPr>
-              <a:t xml:space="preserve">The change that waited longer for review than it took to write. Bring arrival, first-review, and acceptance timestamps.</a:t>
+              <a:t xml:space="preserve">The feature you were proudest of that a long-absent customer experienced as a broken workflow. Bring the ticket, the gap between their sessions, and what they actually said.</a:t>
             </a:r>
             <a:endParaRPr lang="en-US" sz="1200"/>
           </a:p>
@@ -582,7 +788,7 @@
                 <a:ea typeface="Arial"/>
                 <a:cs typeface="Arial"/>
               </a:rPr>
-              <a:t xml:space="preserve">Bridge: distinguish hands-on review from waiting to start it.</a:t>
+              <a:t xml:space="preserve">Bridge: scope, once — the arithmetic ahead is counting, not a measurement of your team. Ninety days is forty-six of your deploys and four of her sessions, and between two visits she meets twenty-one changes at once.</a:t>
             </a:r>
             <a:endParaRPr lang="en-US" sz="1200"/>
           </a:p>
@@ -649,7 +855,7 @@
                 <a:ea typeface="Arial"/>
                 <a:cs typeface="Arial"/>
               </a:rPr>
-              <a:t xml:space="preserve">Code Is Cheap. Judgment Is Expensive.</a:t>
+              <a:t xml:space="preserve">Turn Your Thinkin' Tokens Up to 11</a:t>
             </a:r>
             <a:endParaRPr lang="en-US" sz="1200"/>
           </a:p>
@@ -695,7 +901,7 @@
                 <a:ea typeface="Arial"/>
                 <a:cs typeface="Arial"/>
               </a:rPr>
-              <a:t xml:space="preserve">Source slide 3. 01:30 to 04:00</a:t>
+              <a:t xml:space="preserve">Source slide 4. 02:00 to 03:45</a:t>
             </a:r>
             <a:endParaRPr lang="en-US" sz="1200"/>
           </a:p>
@@ -741,7 +947,7 @@
                 <a:ea typeface="Arial"/>
                 <a:cs typeface="Arial"/>
               </a:rPr>
-              <a:t xml:space="preserve">Wq ≈ ((ca² + cs²) / 2) × ρ / (1 − ρ) × E[S]</a:t>
+              <a:t xml:space="preserve">Before use: capability wins</a:t>
             </a:r>
             <a:endParaRPr lang="en-US" sz="1200"/>
           </a:p>
@@ -787,7 +993,7 @@
                 <a:ea typeface="Arial"/>
                 <a:cs typeface="Arial"/>
               </a:rPr>
-              <a:t xml:space="preserve">V = 1: 80% → 4×; 90% → 9×; 95% → 19×</a:t>
+              <a:t xml:space="preserve">After use: usability wins</a:t>
             </a:r>
             <a:endParaRPr lang="en-US" sz="1200"/>
           </a:p>
@@ -833,7 +1039,7 @@
                 <a:ea typeface="Arial"/>
                 <a:cs typeface="Arial"/>
               </a:rPr>
-              <a:t xml:space="preserve">Kingman's single-server approximation separates three things: variability, utilization, and mean service time. Call the variability term V. Set V to one for this curve. At eighty percent utilization, point eight divided by point two is four. At ninety-five, point nine five divided by point zero five is nineteen.</a:t>
+              <a:t xml:space="preserve">Delighters decay into expectations</a:t>
             </a:r>
             <a:endParaRPr lang="en-US" sz="1200"/>
           </a:p>
@@ -879,7 +1085,7 @@
                 <a:ea typeface="Arial"/>
                 <a:cs typeface="Arial"/>
               </a:rPr>
-              <a:t xml:space="preserve">Fifteen percentage points of utilization bought nearly five times the wait. That is the price of the last bit of headroom. The multiplier is waiting time divided by hands-on review time. It does not include the review itself.</a:t>
+              <a:t xml:space="preserve">Thompson, Hamilton and Rust ran this in 2005 and named it feature fatigue. Before purchase, people prefer the product with more capabilities. After using it, satisfaction tracks usability instead. The same person picks the loaded one and then resents it.</a:t>
             </a:r>
             <a:endParaRPr lang="en-US" sz="1200"/>
           </a:p>
@@ -925,7 +1131,7 @@
                 <a:ea typeface="Arial"/>
                 <a:cs typeface="Arial"/>
               </a:rPr>
-              <a:t xml:space="preserve">Little's law gives a separate accounting identity for a stable system: average work in progress equals throughput times average time in the system. They tell us what to measure before claiming the reviewer just needs to try harder.</a:t>
+              <a:t xml:space="preserve">That is not a quirk, it is a structural problem. Your acquisition signal and your retention signal point in opposite directions, and the feature list is exactly where they diverge. Adding capability makes the sale and costs the renewal. Both effects are real and they arrive at different times, which is why no single dashboard shows you the trade.</a:t>
             </a:r>
             <a:endParaRPr lang="en-US" sz="1200"/>
           </a:p>
@@ -971,7 +1177,7 @@
                 <a:ea typeface="Arial"/>
                 <a:cs typeface="Arial"/>
               </a:rPr>
-              <a:t xml:space="preserve">J. F. C. Kingman (1961), [The single server queue in heavy traffic](https://www.cambridge.org/core/journals/mathematical-proceedings-of-the-cambridge-philosophical-society/article/abs/single-server-queue-in-heavy-traffic/81C55BC00A68FE6D5385638AA0B0AF37), 57(4), 902–904. John D. C. Little (1961), [A Proof for the Queuing Formula: L = λW](https://pubsonline.informs.org/doi/abs/10.1287/opre.9.3.383), Operations Research 9(3), 383–387.</a:t>
+              <a:t xml:space="preserve">Debora Viana Thompson, Rebecca W. Hamilton and Roland T. Rust (2005), [Feature Fatigue: When Product Capabilities Become Too Much of a Good Thing](https://doi.org/10.1509/jmkr.2005.42.4.431), Journal of Marketing Research 42(4), 431–442. Noriaki Kano, Nobuhiko Seraku, Fumio Takahashi and Shinichi Tsuji (1984), Attractive Quality and Must-Be Quality, Journal of the Japanese Society for Quality Control 14(2), 39–48.</a:t>
             </a:r>
             <a:endParaRPr lang="en-US" sz="1200"/>
           </a:p>
@@ -1063,29 +1269,6 @@
                 <a:ea typeface="Arial"/>
                 <a:cs typeface="Arial"/>
               </a:rPr>
-              <a:t xml:space="preserve">Trace the curve and do both divisions. Ask what happens if variability doubles; show that it multiplies the wait too.</a:t>
-            </a:r>
-            <a:endParaRPr lang="en-US" sz="1200"/>
-          </a:p>
-          <a:p>
-            <a:pPr marL="0" indent="0">
-              <a:lnSpc>
-                <a:spcPts val="1560"/>
-              </a:lnSpc>
-              <a:spcAft>
-                <a:spcPts val="0"/>
-              </a:spcAft>
-              <a:buNone/>
-            </a:pPr>
-            <a:r>
-              <a:rPr lang="en-US" sz="1200" b="0">
-                <a:solidFill>
-                  <a:srgbClr val="202b33"/>
-                </a:solidFill>
-                <a:latin typeface="Arial"/>
-                <a:ea typeface="Arial"/>
-                <a:cs typeface="Arial"/>
-              </a:rPr>
               <a:t xml:space="preserve"/>
             </a:r>
             <a:endParaRPr lang="en-US" sz="1200"/>
@@ -1109,7 +1292,30 @@
                 <a:ea typeface="Arial"/>
                 <a:cs typeface="Arial"/>
               </a:rPr>
-              <a:t xml:space="preserve">Bridge: improve the process producing the queue. Start with the request before the code exists. Thirty seconds in pairs: what does the ticket leave unanswered?</a:t>
+              <a:t xml:space="preserve"/>
+            </a:r>
+            <a:endParaRPr lang="en-US" sz="1200"/>
+          </a:p>
+          <a:p>
+            <a:pPr marL="0" indent="0">
+              <a:lnSpc>
+                <a:spcPts val="1560"/>
+              </a:lnSpc>
+              <a:spcAft>
+                <a:spcPts val="0"/>
+              </a:spcAft>
+              <a:buNone/>
+            </a:pPr>
+            <a:r>
+              <a:rPr lang="en-US" sz="1200" b="0">
+                <a:solidFill>
+                  <a:srgbClr val="202b33"/>
+                </a:solidFill>
+                <a:latin typeface="Arial"/>
+                <a:ea typeface="Arial"/>
+                <a:cs typeface="Arial"/>
+              </a:rPr>
+              <a:t xml:space="preserve"/>
             </a:r>
             <a:endParaRPr lang="en-US" sz="1200"/>
           </a:p>
@@ -1176,7 +1382,7 @@
                 <a:ea typeface="Arial"/>
                 <a:cs typeface="Arial"/>
               </a:rPr>
-              <a:t xml:space="preserve">Code Is Cheap. Judgment Is Expensive.</a:t>
+              <a:t xml:space="preserve">Turn Your Thinkin' Tokens Up to 11</a:t>
             </a:r>
             <a:endParaRPr lang="en-US" sz="1200"/>
           </a:p>
@@ -1222,7 +1428,7 @@
                 <a:ea typeface="Arial"/>
                 <a:cs typeface="Arial"/>
               </a:rPr>
-              <a:t xml:space="preserve">Source slide 6. 04:00 to 05:30</a:t>
+              <a:t xml:space="preserve">Source slide 5. 03:45 to 05:30</a:t>
             </a:r>
             <a:endParaRPr lang="en-US" sz="1200"/>
           </a:p>
@@ -1268,7 +1474,7 @@
                 <a:ea typeface="Arial"/>
                 <a:cs typeface="Arial"/>
               </a:rPr>
-              <a:t xml:space="preserve">Who can do what, in which tenant?</a:t>
+              <a:t xml:space="preserve">Status quo bias · endowment effect</a:t>
             </a:r>
             <a:endParaRPr lang="en-US" sz="1200"/>
           </a:p>
@@ -1314,7 +1520,7 @@
                 <a:ea typeface="Arial"/>
                 <a:cs typeface="Arial"/>
               </a:rPr>
-              <a:t xml:space="preserve">What happens when access changes?</a:t>
+              <a:t xml:space="preserve">Recognition, not recall</a:t>
             </a:r>
             <a:endParaRPr lang="en-US" sz="1200"/>
           </a:p>
@@ -1360,7 +1566,7 @@
                 <a:ea typeface="Arial"/>
                 <a:cs typeface="Arial"/>
               </a:rPr>
-              <a:t xml:space="preserve">What must never happen?</a:t>
+              <a:t xml:space="preserve">The gain is yours. The loss is theirs, today.</a:t>
             </a:r>
             <a:endParaRPr lang="en-US" sz="1200"/>
           </a:p>
@@ -1406,7 +1612,7 @@
                 <a:ea typeface="Arial"/>
                 <a:cs typeface="Arial"/>
               </a:rPr>
-              <a:t xml:space="preserve">Add enterprise permissions. That is the entire request.</a:t>
+              <a:t xml:space="preserve">Samuelson and Zeckhauser named status quo bias in 1988: across lab and field decisions, people over-select the option they already hold. Kahneman, Knetsch and Thaler measured the endowment effect the same way — you want more for the mug once it is yours. Your user owns a workflow, and you are proposing to take it.</a:t>
             </a:r>
             <a:endParaRPr lang="en-US" sz="1200"/>
           </a:p>
@@ -1452,7 +1658,7 @@
                 <a:ea typeface="Arial"/>
                 <a:cs typeface="Arial"/>
               </a:rPr>
-              <a:t xml:space="preserve">Who can grant a role? Does it apply to one tenant or every tenant? What happens to an existing session after revocation? What does the audit record need to show? There are several plausible implementations, and most disagree about behavior the ticket never specified.</a:t>
+              <a:t xml:space="preserve">The gain from a redesign is real, and it arrives later, spread thin. The loss is small, specific and arrives on first login. Individually every change was an improvement. In aggregate, at your cadence, it reads as instability.</a:t>
             </a:r>
             <a:endParaRPr lang="en-US" sz="1200"/>
           </a:p>
@@ -1498,7 +1704,7 @@
                 <a:ea typeface="Arial"/>
                 <a:cs typeface="Arial"/>
               </a:rPr>
-              <a:t xml:space="preserve">We made code cheap and left the question expensive. Writing down the answer is part of implementation. It just happens before the diff.</a:t>
+              <a:t xml:space="preserve">William Samuelson and Richard Zeckhauser (1988), [Status Quo Bias in Decision Making](https://doi.org/10.1007/BF00055564), Journal of Risk and Uncertainty 1(1), 7–59. Daniel Kahneman, Jack L. Knetsch and Richard H. Thaler (1990), [Experimental Tests of the Endowment Effect and the Coase Theorem](https://doi.org/10.1086/261737), Journal of Political Economy 98(6), 1325–1348. Jakob Nielsen (1994), [Ten Usability Heuristics for User Interface Design](https://www.nngroup.com/articles/ten-usability-heuristics/).</a:t>
             </a:r>
             <a:endParaRPr lang="en-US" sz="1200"/>
           </a:p>
@@ -1590,29 +1796,6 @@
                 <a:ea typeface="Arial"/>
                 <a:cs typeface="Arial"/>
               </a:rPr>
-              <a:t xml:space="preserve">Read the request once. Give pairs sixty seconds here, thirty in the 15-minute cut. Collect two answers, then introduce the tenant and revocation questions.</a:t>
-            </a:r>
-            <a:endParaRPr lang="en-US" sz="1200"/>
-          </a:p>
-          <a:p>
-            <a:pPr marL="0" indent="0">
-              <a:lnSpc>
-                <a:spcPts val="1560"/>
-              </a:lnSpc>
-              <a:spcAft>
-                <a:spcPts val="0"/>
-              </a:spcAft>
-              <a:buNone/>
-            </a:pPr>
-            <a:r>
-              <a:rPr lang="en-US" sz="1200" b="0">
-                <a:solidFill>
-                  <a:srgbClr val="202b33"/>
-                </a:solidFill>
-                <a:latin typeface="Arial"/>
-                <a:ea typeface="Arial"/>
-                <a:cs typeface="Arial"/>
-              </a:rPr>
               <a:t xml:space="preserve"/>
             </a:r>
             <a:endParaRPr lang="en-US" sz="1200"/>
@@ -1637,6 +1820,29 @@
                 <a:cs typeface="Arial"/>
               </a:rPr>
               <a:t xml:space="preserve"/>
+            </a:r>
+            <a:endParaRPr lang="en-US" sz="1200"/>
+          </a:p>
+          <a:p>
+            <a:pPr marL="0" indent="0">
+              <a:lnSpc>
+                <a:spcPts val="1560"/>
+              </a:lnSpc>
+              <a:spcAft>
+                <a:spcPts val="0"/>
+              </a:spcAft>
+              <a:buNone/>
+            </a:pPr>
+            <a:r>
+              <a:rPr lang="en-US" sz="1200" b="0">
+                <a:solidFill>
+                  <a:srgbClr val="202b33"/>
+                </a:solidFill>
+                <a:latin typeface="Arial"/>
+                <a:ea typeface="Arial"/>
+                <a:cs typeface="Arial"/>
+              </a:rPr>
+              <a:t xml:space="preserve">Bridge: the release decision has five axes, not one — what, who, when, batched or rolling, and reversible. Every one of them commits somebody outside this room.</a:t>
             </a:r>
             <a:endParaRPr lang="en-US" sz="1200"/>
           </a:p>
@@ -1703,7 +1909,7 @@
                 <a:ea typeface="Arial"/>
                 <a:cs typeface="Arial"/>
               </a:rPr>
-              <a:t xml:space="preserve">Code Is Cheap. Judgment Is Expensive.</a:t>
+              <a:t xml:space="preserve">Turn Your Thinkin' Tokens Up to 11</a:t>
             </a:r>
             <a:endParaRPr lang="en-US" sz="1200"/>
           </a:p>
@@ -1749,7 +1955,7 @@
                 <a:ea typeface="Arial"/>
                 <a:cs typeface="Arial"/>
               </a:rPr>
-              <a:t xml:space="preserve">Source slide 7. 05:30 to 07:00</a:t>
+              <a:t xml:space="preserve">Source slide 8. 05:30 to 08:45</a:t>
             </a:r>
             <a:endParaRPr lang="en-US" sz="1200"/>
           </a:p>
@@ -1795,7 +2001,7 @@
                 <a:ea typeface="Arial"/>
                 <a:cs typeface="Arial"/>
               </a:rPr>
-              <a:t xml:space="preserve">Actor + tenant + action + resource</a:t>
+              <a:t xml:space="preserve">6 features · 3 cohorts → 524,880 plans</a:t>
             </a:r>
             <a:endParaRPr lang="en-US" sz="1200"/>
           </a:p>
@@ -1841,7 +2047,7 @@
                 <a:ea typeface="Arial"/>
                 <a:cs typeface="Arial"/>
               </a:rPr>
-              <a:t xml:space="preserve">Revocation changes the next decision</a:t>
+              <a:t xml:space="preserve">12,000 weekly actives · 4 weeks → 16 arms</a:t>
             </a:r>
             <a:endParaRPr lang="en-US" sz="1200"/>
           </a:p>
@@ -1887,7 +2093,7 @@
                 <a:ea typeface="Arial"/>
                 <a:cs typeface="Arial"/>
               </a:rPr>
-              <a:t xml:space="preserve">Denied actions leave state unchanged</a:t>
+              <a:t xml:space="preserve">32,805 plans per arm of evidence</a:t>
             </a:r>
             <a:endParaRPr lang="en-US" sz="1200"/>
           </a:p>
@@ -1933,7 +2139,7 @@
                 <a:ea typeface="Arial"/>
                 <a:cs typeface="Arial"/>
               </a:rPr>
-              <a:t xml:space="preserve">For this example, an administrator can grant a role only inside the tenant they administer. A revoked role cannot authorize the next operation. A denied change leaves protected state untouched and records the failed attempt.</a:t>
+              <a:t xml:space="preserve">Six features. Order them: seven hundred and twenty sequences. Assign each to one of three cohorts: three to the sixth, seven hundred and twenty-nine. Multiply. Five hundred and twenty-four thousand, eight hundred and eighty distinct plans, and that is before batching and before dates.</a:t>
             </a:r>
             <a:endParaRPr lang="en-US" sz="1200"/>
           </a:p>
@@ -1979,7 +2185,7 @@
                 <a:ea typeface="Arial"/>
                 <a:cs typeface="Arial"/>
               </a:rPr>
-              <a:t xml:space="preserve">Those statements produce cases. An admin in tenant A requests a change in A: allow. The same admin requests a change in B: deny. Revoke the role, repeat the A request: deny. Check the resulting state, not just the status message.</a:t>
+              <a:t xml:space="preserve">Now the evidence you can buy. Twelve thousand weekly actives, a four-week window, forty-eight thousand exposures. At an eight percent baseline, detecting a two-point lift needs roughly three thousand per arm, so sixteen arms. Divide: thirty-two thousand, eight hundred and five plans for every arm of evidence you can afford. Benchmarks owns the power arithmetic; here I only need the count.</a:t>
             </a:r>
             <a:endParaRPr lang="en-US" sz="1200"/>
           </a:p>
@@ -2025,7 +2231,7 @@
                 <a:ea typeface="Arial"/>
                 <a:cs typeface="Arial"/>
               </a:rPr>
-              <a:t xml:space="preserve">Tie this back to the curve. Clear boundaries reduce the number of interpretations arriving at review. Bounded diffs reduce the amount of code a reviewer has to reconstruct at once. That is the variance term. On purpose.</a:t>
+              <a:t xml:space="preserve">So turn the thinkin' tokens up. Chollet's 2019 definition treats intelligence as skill acquisition over novel tasks, and a system that has already seen the situation is not demonstrating that. Your product's next six months is a task nobody has seen, including you.</a:t>
             </a:r>
             <a:endParaRPr lang="en-US" sz="1200"/>
           </a:p>
@@ -2071,6 +2277,29 @@
                 <a:ea typeface="Arial"/>
                 <a:cs typeface="Arial"/>
               </a:rPr>
+              <a:t xml:space="preserve">My claim is weaker and safer. The model has not met your users. More tokens do not fix that, and neither does more of you, because your judgment is biased too. The difference is that you can write your prediction down before the release and check it afterward.</a:t>
+            </a:r>
+            <a:endParaRPr lang="en-US" sz="1200"/>
+          </a:p>
+          <a:p>
+            <a:pPr marL="0" indent="0">
+              <a:lnSpc>
+                <a:spcPts val="1560"/>
+              </a:lnSpc>
+              <a:spcAft>
+                <a:spcPts val="0"/>
+              </a:spcAft>
+              <a:buNone/>
+            </a:pPr>
+            <a:r>
+              <a:rPr lang="en-US" sz="1200" b="0">
+                <a:solidFill>
+                  <a:srgbClr val="202b33"/>
+                </a:solidFill>
+                <a:latin typeface="Arial"/>
+                <a:ea typeface="Arial"/>
+                <a:cs typeface="Arial"/>
+              </a:rPr>
               <a:t xml:space="preserve"/>
             </a:r>
             <a:endParaRPr lang="en-US" sz="1200"/>
@@ -2094,6 +2323,29 @@
                 <a:ea typeface="Arial"/>
                 <a:cs typeface="Arial"/>
               </a:rPr>
+              <a:t xml:space="preserve">François Chollet (2019), [On the Measure of Intelligence](https://arxiv.org/abs/1911.01547), arXiv:1911.01547. Parshin Shojaee and colleagues (2025), [The Illusion of Thinking](https://machinelearning.apple.com/research/illusion-of-thinking), Apple Machine Learning Research; and the rebuttal, [The Illusion of the Illusion of Thinking](https://arxiv.org/abs/2506.09250), arXiv:2506.09250. Present as a contested exchange, not a settled result.</a:t>
+            </a:r>
+            <a:endParaRPr lang="en-US" sz="1200"/>
+          </a:p>
+          <a:p>
+            <a:pPr marL="0" indent="0">
+              <a:lnSpc>
+                <a:spcPts val="1560"/>
+              </a:lnSpc>
+              <a:spcAft>
+                <a:spcPts val="0"/>
+              </a:spcAft>
+              <a:buNone/>
+            </a:pPr>
+            <a:r>
+              <a:rPr lang="en-US" sz="1200" b="0">
+                <a:solidFill>
+                  <a:srgbClr val="202b33"/>
+                </a:solidFill>
+                <a:latin typeface="Arial"/>
+                <a:ea typeface="Arial"/>
+                <a:cs typeface="Arial"/>
+              </a:rPr>
               <a:t xml:space="preserve"/>
             </a:r>
             <a:endParaRPr lang="en-US" sz="1200"/>
@@ -2117,29 +2369,6 @@
                 <a:ea typeface="Arial"/>
                 <a:cs typeface="Arial"/>
               </a:rPr>
-              <a:t xml:space="preserve">Write the three cases beside the request. Keep the cross-tenant case visible in the handout, not beside the later demo’s initial code.</a:t>
-            </a:r>
-            <a:endParaRPr lang="en-US" sz="1200"/>
-          </a:p>
-          <a:p>
-            <a:pPr marL="0" indent="0">
-              <a:lnSpc>
-                <a:spcPts val="1560"/>
-              </a:lnSpc>
-              <a:spcAft>
-                <a:spcPts val="0"/>
-              </a:spcAft>
-              <a:buNone/>
-            </a:pPr>
-            <a:r>
-              <a:rPr lang="en-US" sz="1200" b="0">
-                <a:solidFill>
-                  <a:srgbClr val="202b33"/>
-                </a:solidFill>
-                <a:latin typeface="Arial"/>
-                <a:ea typeface="Arial"/>
-                <a:cs typeface="Arial"/>
-              </a:rPr>
               <a:t xml:space="preserve"/>
             </a:r>
             <a:endParaRPr lang="en-US" sz="1200"/>
@@ -2163,7 +2392,76 @@
                 <a:ea typeface="Arial"/>
                 <a:cs typeface="Arial"/>
               </a:rPr>
-              <a:t xml:space="preserve">Bridge: review also teaches the system; a green test cannot replace understanding.</a:t>
+              <a:t xml:space="preserve"/>
+            </a:r>
+            <a:endParaRPr lang="en-US" sz="1200"/>
+          </a:p>
+          <a:p>
+            <a:pPr marL="0" indent="0">
+              <a:lnSpc>
+                <a:spcPts val="1560"/>
+              </a:lnSpc>
+              <a:spcAft>
+                <a:spcPts val="0"/>
+              </a:spcAft>
+              <a:buNone/>
+            </a:pPr>
+            <a:r>
+              <a:rPr lang="en-US" sz="1200" b="0">
+                <a:solidFill>
+                  <a:srgbClr val="202b33"/>
+                </a:solidFill>
+                <a:latin typeface="Arial"/>
+                <a:ea typeface="Arial"/>
+                <a:cs typeface="Arial"/>
+              </a:rPr>
+              <a:t xml:space="preserve">Run `bun artifacts/speaking-portfolio-expanded/talks/judgment/demo.ts` for the plan count, then add `--evidence` for the arm count. Do the final division on the board rather than reading it. Say once that the numbers are six features and three cohorts, not their company.</a:t>
+            </a:r>
+            <a:endParaRPr lang="en-US" sz="1200"/>
+          </a:p>
+          <a:p>
+            <a:pPr marL="0" indent="0">
+              <a:lnSpc>
+                <a:spcPts val="1560"/>
+              </a:lnSpc>
+              <a:spcAft>
+                <a:spcPts val="0"/>
+              </a:spcAft>
+              <a:buNone/>
+            </a:pPr>
+            <a:r>
+              <a:rPr lang="en-US" sz="1200" b="0">
+                <a:solidFill>
+                  <a:srgbClr val="202b33"/>
+                </a:solidFill>
+                <a:latin typeface="Arial"/>
+                <a:ea typeface="Arial"/>
+                <a:cs typeface="Arial"/>
+              </a:rPr>
+              <a:t xml:space="preserve"/>
+            </a:r>
+            <a:endParaRPr lang="en-US" sz="1200"/>
+          </a:p>
+          <a:p>
+            <a:pPr marL="0" indent="0">
+              <a:lnSpc>
+                <a:spcPts val="1560"/>
+              </a:lnSpc>
+              <a:spcAft>
+                <a:spcPts val="0"/>
+              </a:spcAft>
+              <a:buNone/>
+            </a:pPr>
+            <a:r>
+              <a:rPr lang="en-US" sz="1200" b="0">
+                <a:solidFill>
+                  <a:srgbClr val="202b33"/>
+                </a:solidFill>
+                <a:latin typeface="Arial"/>
+                <a:ea typeface="Arial"/>
+                <a:cs typeface="Arial"/>
+              </a:rPr>
+              <a:t xml:space="preserve">Bridge: the machine is good at the search half. Cluster four thousand support threads, find the accounts in the cohort you are about to change, notice that your release week is the week support is at a conference. It proposes; you sequence.</a:t>
             </a:r>
             <a:endParaRPr lang="en-US" sz="1200"/>
           </a:p>
@@ -2230,7 +2528,7 @@
                 <a:ea typeface="Arial"/>
                 <a:cs typeface="Arial"/>
               </a:rPr>
-              <a:t xml:space="preserve">Code Is Cheap. Judgment Is Expensive.</a:t>
+              <a:t xml:space="preserve">Turn Your Thinkin' Tokens Up to 11</a:t>
             </a:r>
             <a:endParaRPr lang="en-US" sz="1200"/>
           </a:p>
@@ -2276,7 +2574,7 @@
                 <a:ea typeface="Arial"/>
                 <a:cs typeface="Arial"/>
               </a:rPr>
-              <a:t xml:space="preserve">Source slide 9. 07:00 to 10:30</a:t>
+              <a:t xml:space="preserve">Source slide 10. 08:45 to 11:15</a:t>
             </a:r>
             <a:endParaRPr lang="en-US" sz="1200"/>
           </a:p>
@@ -2322,7 +2620,7 @@
                 <a:ea typeface="Arial"/>
                 <a:cs typeface="Arial"/>
               </a:rPr>
-              <a:t xml:space="preserve">canEdit(user, resourceTenant) = user.roles.includes("admin")</a:t>
+              <a:t xml:space="preserve">Theme · Language · Version</a:t>
             </a:r>
             <a:endParaRPr lang="en-US" sz="1200"/>
           </a:p>
@@ -2368,7 +2666,7 @@
                 <a:ea typeface="Arial"/>
                 <a:cs typeface="Arial"/>
               </a:rPr>
-              <a:t xml:space="preserve">Test: admin user → allowed</a:t>
+              <a:t xml:space="preserve">"You're on 4.2. It's 43 days old. Update, or turn on auto-update."</a:t>
             </a:r>
             <a:endParaRPr lang="en-US" sz="1200"/>
           </a:p>
@@ -2414,7 +2712,7 @@
                 <a:ea typeface="Arial"/>
                 <a:cs typeface="Arial"/>
               </a:rPr>
-              <a:t xml:space="preserve">PASS</a:t>
+              <a:t xml:space="preserve">First prediction, labeled once as a prediction. Version becomes a first-class user-facing control, sitting in settings beside theme and language, because those two are already there for exactly this reason. They are preferences about how the software meets you.</a:t>
             </a:r>
             <a:endParaRPr lang="en-US" sz="1200"/>
           </a:p>
@@ -2460,7 +2758,7 @@
                 <a:ea typeface="Arial"/>
                 <a:cs typeface="Arial"/>
               </a:rPr>
-              <a:t xml:space="preserve">Here is the implementation. Here is its test. The user has the admin role. The function allows the edit. The test passes.</a:t>
+              <a:t xml:space="preserve">A returning user lands on the version she left. The banner reads: you are on 4.2, it is forty-three days old, here is what changed, update now or turn on auto-update. Change stops being something that happened to her while she was away and becomes something she asks for. That is the whole move.</a:t>
             </a:r>
             <a:endParaRPr lang="en-US" sz="1200"/>
           </a:p>
@@ -2506,29 +2804,6 @@
                 <a:ea typeface="Arial"/>
                 <a:cs typeface="Arial"/>
               </a:rPr>
-              <a:t xml:space="preserve">The resource tenant is right there in the signature. Nothing reads it. And you already heard the cross-tenant case, back on the spec slide. Watch the vote anyway.</a:t>
-            </a:r>
-            <a:endParaRPr lang="en-US" sz="1200"/>
-          </a:p>
-          <a:p>
-            <a:pPr marL="0" indent="0">
-              <a:lnSpc>
-                <a:spcPts val="1560"/>
-              </a:lnSpc>
-              <a:spcAft>
-                <a:spcPts val="0"/>
-              </a:spcAft>
-              <a:buNone/>
-            </a:pPr>
-            <a:r>
-              <a:rPr lang="en-US" sz="1200" b="0">
-                <a:solidFill>
-                  <a:srgbClr val="202b33"/>
-                </a:solidFill>
-                <a:latin typeface="Arial"/>
-                <a:ea typeface="Arial"/>
-                <a:cs typeface="Arial"/>
-              </a:rPr>
               <a:t xml:space="preserve"/>
             </a:r>
             <a:endParaRPr lang="en-US" sz="1200"/>
@@ -2552,29 +2827,6 @@
                 <a:ea typeface="Arial"/>
                 <a:cs typeface="Arial"/>
               </a:rPr>
-              <a:t xml:space="preserve">Would you approve it? Now run the case where that administrator belongs to tenant A and the resource belongs to tenant B. The test was accurate about the behavior it checked. The behavior was incomplete in exactly the same way as the implementation.</a:t>
-            </a:r>
-            <a:endParaRPr lang="en-US" sz="1200"/>
-          </a:p>
-          <a:p>
-            <a:pPr marL="0" indent="0">
-              <a:lnSpc>
-                <a:spcPts val="1560"/>
-              </a:lnSpc>
-              <a:spcAft>
-                <a:spcPts val="0"/>
-              </a:spcAft>
-              <a:buNone/>
-            </a:pPr>
-            <a:r>
-              <a:rPr lang="en-US" sz="1200" b="0">
-                <a:solidFill>
-                  <a:srgbClr val="202b33"/>
-                </a:solidFill>
-                <a:latin typeface="Arial"/>
-                <a:ea typeface="Arial"/>
-                <a:cs typeface="Arial"/>
-              </a:rPr>
               <a:t xml:space="preserve"/>
             </a:r>
             <a:endParaRPr lang="en-US" sz="1200"/>
@@ -2598,29 +2850,6 @@
                 <a:ea typeface="Arial"/>
                 <a:cs typeface="Arial"/>
               </a:rPr>
-              <a:t xml:space="preserve">The model wrote the test that agrees with the bug. Both of them are very confident.</a:t>
-            </a:r>
-            <a:endParaRPr lang="en-US" sz="1200"/>
-          </a:p>
-          <a:p>
-            <a:pPr marL="0" indent="0">
-              <a:lnSpc>
-                <a:spcPts val="1560"/>
-              </a:lnSpc>
-              <a:spcAft>
-                <a:spcPts val="0"/>
-              </a:spcAft>
-              <a:buNone/>
-            </a:pPr>
-            <a:r>
-              <a:rPr lang="en-US" sz="1200" b="0">
-                <a:solidFill>
-                  <a:srgbClr val="202b33"/>
-                </a:solidFill>
-                <a:latin typeface="Arial"/>
-                <a:ea typeface="Arial"/>
-                <a:cs typeface="Arial"/>
-              </a:rPr>
               <a:t xml:space="preserve"/>
             </a:r>
             <a:endParaRPr lang="en-US" sz="1200"/>
@@ -2644,29 +2873,6 @@
                 <a:ea typeface="Arial"/>
                 <a:cs typeface="Arial"/>
               </a:rPr>
-              <a:t xml:space="preserve">Bainbridge asks what automation leaves the operator doing. Skitka and colleagues put people in a flight simulator with an automated monitoring aid and counted the trials where the aid was wrong. On those trials people missed events the aid did not flag, and acted on prompts the other instruments contradicted. That is the whole finding, and it is about the trials where the aid was wrong. This fixture is how the same concern shows up in our queue: the green signal gets attention that the missing case did not.</a:t>
-            </a:r>
-            <a:endParaRPr lang="en-US" sz="1200"/>
-          </a:p>
-          <a:p>
-            <a:pPr marL="0" indent="0">
-              <a:lnSpc>
-                <a:spcPts val="1560"/>
-              </a:lnSpc>
-              <a:spcAft>
-                <a:spcPts val="0"/>
-              </a:spcAft>
-              <a:buNone/>
-            </a:pPr>
-            <a:r>
-              <a:rPr lang="en-US" sz="1200" b="0">
-                <a:solidFill>
-                  <a:srgbClr val="202b33"/>
-                </a:solidFill>
-                <a:latin typeface="Arial"/>
-                <a:ea typeface="Arial"/>
-                <a:cs typeface="Arial"/>
-              </a:rPr>
               <a:t xml:space="preserve"/>
             </a:r>
             <a:endParaRPr lang="en-US" sz="1200"/>
@@ -2690,145 +2896,7 @@
                 <a:ea typeface="Arial"/>
                 <a:cs typeface="Arial"/>
               </a:rPr>
-              <a:t xml:space="preserve">Lisanne Bainbridge (1983), [Ironies of automation](https://www.sciencedirect.com/science/article/pii/0005109883900468), Automatica 19(6), 775–779. Linda J. Skitka, Kathleen L. Mosier and Mark Burdick (1999), [Does automation bias decision-making?](https://doi.org/10.1006/ijhc.1999.0252), International Journal of Human-Computer Studies 51(5), 991–1006. A flight-simulation task with a monitoring aid, not a code-review trial.</a:t>
-            </a:r>
-            <a:endParaRPr lang="en-US" sz="1200"/>
-          </a:p>
-          <a:p>
-            <a:pPr marL="0" indent="0">
-              <a:lnSpc>
-                <a:spcPts val="1560"/>
-              </a:lnSpc>
-              <a:spcAft>
-                <a:spcPts val="0"/>
-              </a:spcAft>
-              <a:buNone/>
-            </a:pPr>
-            <a:r>
-              <a:rPr lang="en-US" sz="1200" b="0">
-                <a:solidFill>
-                  <a:srgbClr val="202b33"/>
-                </a:solidFill>
-                <a:latin typeface="Arial"/>
-                <a:ea typeface="Arial"/>
-                <a:cs typeface="Arial"/>
-              </a:rPr>
-              <a:t xml:space="preserve"/>
-            </a:r>
-            <a:endParaRPr lang="en-US" sz="1200"/>
-          </a:p>
-          <a:p>
-            <a:pPr marL="0" indent="0">
-              <a:lnSpc>
-                <a:spcPts val="1560"/>
-              </a:lnSpc>
-              <a:spcAft>
-                <a:spcPts val="0"/>
-              </a:spcAft>
-              <a:buNone/>
-            </a:pPr>
-            <a:r>
-              <a:rPr lang="en-US" sz="1200" b="0">
-                <a:solidFill>
-                  <a:srgbClr val="202b33"/>
-                </a:solidFill>
-                <a:latin typeface="Arial"/>
-                <a:ea typeface="Arial"/>
-                <a:cs typeface="Arial"/>
-              </a:rPr>
-              <a:t xml:space="preserve"/>
-            </a:r>
-            <a:endParaRPr lang="en-US" sz="1200"/>
-          </a:p>
-          <a:p>
-            <a:pPr marL="0" indent="0">
-              <a:lnSpc>
-                <a:spcPts val="1560"/>
-              </a:lnSpc>
-              <a:spcAft>
-                <a:spcPts val="0"/>
-              </a:spcAft>
-              <a:buNone/>
-            </a:pPr>
-            <a:r>
-              <a:rPr lang="en-US" sz="1200" b="0">
-                <a:solidFill>
-                  <a:srgbClr val="202b33"/>
-                </a:solidFill>
-                <a:latin typeface="Arial"/>
-                <a:ea typeface="Arial"/>
-                <a:cs typeface="Arial"/>
-              </a:rPr>
-              <a:t xml:space="preserve"/>
-            </a:r>
-            <a:endParaRPr lang="en-US" sz="1200"/>
-          </a:p>
-          <a:p>
-            <a:pPr marL="0" indent="0">
-              <a:lnSpc>
-                <a:spcPts val="1560"/>
-              </a:lnSpc>
-              <a:spcAft>
-                <a:spcPts val="0"/>
-              </a:spcAft>
-              <a:buNone/>
-            </a:pPr>
-            <a:r>
-              <a:rPr lang="en-US" sz="1200" b="0">
-                <a:solidFill>
-                  <a:srgbClr val="202b33"/>
-                </a:solidFill>
-                <a:latin typeface="Arial"/>
-                <a:ea typeface="Arial"/>
-                <a:cs typeface="Arial"/>
-              </a:rPr>
-              <a:t xml:space="preserve">Open contracts.md only after the vote. Run `bun artifacts/speaking-portfolio-expanded/packets/judgment/demo.ts` for PASS, then add `--holdout` for the actual failing assertion. Do not assume the room approves; if someone catches it, ask which evidence caught their attention.</a:t>
-            </a:r>
-            <a:endParaRPr lang="en-US" sz="1200"/>
-          </a:p>
-          <a:p>
-            <a:pPr marL="0" indent="0">
-              <a:lnSpc>
-                <a:spcPts val="1560"/>
-              </a:lnSpc>
-              <a:spcAft>
-                <a:spcPts val="0"/>
-              </a:spcAft>
-              <a:buNone/>
-            </a:pPr>
-            <a:r>
-              <a:rPr lang="en-US" sz="1200" b="0">
-                <a:solidFill>
-                  <a:srgbClr val="202b33"/>
-                </a:solidFill>
-                <a:latin typeface="Arial"/>
-                <a:ea typeface="Arial"/>
-                <a:cs typeface="Arial"/>
-              </a:rPr>
-              <a:t xml:space="preserve"/>
-            </a:r>
-            <a:endParaRPr lang="en-US" sz="1200"/>
-          </a:p>
-          <a:p>
-            <a:pPr marL="0" indent="0">
-              <a:lnSpc>
-                <a:spcPts val="1560"/>
-              </a:lnSpc>
-              <a:spcAft>
-                <a:spcPts val="0"/>
-              </a:spcAft>
-              <a:buNone/>
-            </a:pPr>
-            <a:r>
-              <a:rPr lang="en-US" sz="1200" b="0">
-                <a:solidFill>
-                  <a:srgbClr val="202b33"/>
-                </a:solidFill>
-                <a:latin typeface="Arial"/>
-                <a:ea typeface="Arial"/>
-                <a:cs typeface="Arial"/>
-              </a:rPr>
-              <a:t xml:space="preserve">Bridge: give the reviewer authority to stop work, enough context, and time to recover it.</a:t>
+              <a:t xml:space="preserve">Bridge: many live versions cost a versioned runtime and a sandbox per user. Privacy improves, patching gets worse, and under Hyrum's law every live version is a live contract, including the behaviors you call bugs.</a:t>
             </a:r>
             <a:endParaRPr lang="en-US" sz="1200"/>
           </a:p>
@@ -2895,7 +2963,7 @@
                 <a:ea typeface="Arial"/>
                 <a:cs typeface="Arial"/>
               </a:rPr>
-              <a:t xml:space="preserve">Code Is Cheap. Judgment Is Expensive.</a:t>
+              <a:t xml:space="preserve">Turn Your Thinkin' Tokens Up to 11</a:t>
             </a:r>
             <a:endParaRPr lang="en-US" sz="1200"/>
           </a:p>
@@ -2941,7 +3009,7 @@
                 <a:ea typeface="Arial"/>
                 <a:cs typeface="Arial"/>
               </a:rPr>
-              <a:t xml:space="preserve">Source slide 12. 10:30 to 13:00</a:t>
+              <a:t xml:space="preserve">Source slide 12. 11:15 to 13:30</a:t>
             </a:r>
             <a:endParaRPr lang="en-US" sz="1200"/>
           </a:p>
@@ -2987,7 +3055,7 @@
                 <a:ea typeface="Arial"/>
                 <a:cs typeface="Arial"/>
               </a:rPr>
-              <a:t xml:space="preserve">Arrivals: decline work before generating it</a:t>
+              <a:t xml:space="preserve">"Turn on what people like me have on"</a:t>
             </a:r>
             <a:endParaRPr lang="en-US" sz="1200"/>
           </a:p>
@@ -3033,7 +3101,7 @@
                 <a:ea typeface="Arial"/>
                 <a:cs typeface="Arial"/>
               </a:rPr>
-              <a:t xml:space="preserve">Variance: bounded diffs and explicit behavior</a:t>
+              <a:t xml:space="preserve">Shareable configuration profiles</a:t>
             </a:r>
             <a:endParaRPr lang="en-US" sz="1200"/>
           </a:p>
@@ -3079,7 +3147,7 @@
                 <a:ea typeface="Arial"/>
                 <a:cs typeface="Arial"/>
               </a:rPr>
-              <a:t xml:space="preserve">Utilization: reserve actual review capacity</a:t>
+              <a:t xml:space="preserve">Developers have done this for thirty years</a:t>
             </a:r>
             <a:endParaRPr lang="en-US" sz="1200"/>
           </a:p>
@@ -3125,7 +3193,7 @@
                 <a:ea typeface="Arial"/>
                 <a:cs typeface="Arial"/>
               </a:rPr>
-              <a:t xml:space="preserve">Fewer arrivals means deciding which changes should exist, including declining a second implementation after the first already met the need. That is a rule about review load, not about generation: generate ten parallel attempts if you like, as long as a gate collapses them to one candidate before a human reads any of them. Judging the ten is Dynamic Scaling's talk, and its Council of Guards eats nine. This one protects the person who accepts the one that got through.</a:t>
+              <a:t xml:space="preserve">Second prediction. Feature flags stop being your deployment tool and become the user's preference surface. Not a wall of switches: a profile. Turn on what people who use this the way I do have turned on. Follow this person's setup. Adopt my team's.</a:t>
             </a:r>
             <a:endParaRPr lang="en-US" sz="1200"/>
           </a:p>
@@ -3171,7 +3239,7 @@
                 <a:ea typeface="Arial"/>
                 <a:cs typeface="Arial"/>
               </a:rPr>
-              <a:t xml:space="preserve">Smaller variance means reducing surprises at review. Keep one purpose per diff, include the behavioral cases, and separate mechanical changes from policy changes. Small in line count is useful only when it is also small in meaning.</a:t>
+              <a:t xml:space="preserve">This is not new, it is unevenly distributed. Dotfiles. VS Code extension packs. Home Assistant blueprints. Excel templates. Figma community files. Mod lists. Developers have been shipping configuration to each other as a social object for thirty years and we never offered it to anybody else.</a:t>
             </a:r>
             <a:endParaRPr lang="en-US" sz="1200"/>
           </a:p>
@@ -3217,7 +3285,7 @@
                 <a:ea typeface="Arial"/>
                 <a:cs typeface="Arial"/>
               </a:rPr>
-              <a:t xml:space="preserve">Protect slack by reserving review time and limiting work in progress. If the reviewer is on call, their calendar is not eight hours of service capacity. Measure interruptions before declaring them underutilized. Pilot these changes on one recurring workflow and keep the baseline.</a:t>
+              <a:t xml:space="preserve">Eric von Hippel (1986), [Lead Users: A Source of Novel Product Concepts](https://doi.org/10.1287/mnsc.32.7.791), Management Science 32(7), 791–805. Eric von Hippel and Ralph Katz (2002), [Shifting Innovation to Users via Toolkits](https://doi.org/10.1287/mnsc.48.7.821.2817), Management Science 48(7), 821–833. Everett M. Rogers (2003), Diffusion of Innovations, 5th edition, Free Press.</a:t>
             </a:r>
             <a:endParaRPr lang="en-US" sz="1200"/>
           </a:p>
@@ -3355,7 +3423,7 @@
                 <a:ea typeface="Arial"/>
                 <a:cs typeface="Arial"/>
               </a:rPr>
-              <a:t xml:space="preserve"/>
+              <a:t xml:space="preserve">Bridge: a configured fleet breaks support's first question, your screenshots and your A/B baseline, and somebody still owns the default a new user gets. Distribution concentrates, defaults win, and curating shared profiles becomes the job.</a:t>
             </a:r>
             <a:endParaRPr lang="en-US" sz="1200"/>
           </a:p>
@@ -3422,7 +3490,7 @@
                 <a:ea typeface="Arial"/>
                 <a:cs typeface="Arial"/>
               </a:rPr>
-              <a:t xml:space="preserve">Code Is Cheap. Judgment Is Expensive.</a:t>
+              <a:t xml:space="preserve">Turn Your Thinkin' Tokens Up to 11</a:t>
             </a:r>
             <a:endParaRPr lang="en-US" sz="1200"/>
           </a:p>
@@ -3468,7 +3536,7 @@
                 <a:ea typeface="Arial"/>
                 <a:cs typeface="Arial"/>
               </a:rPr>
-              <a:t xml:space="preserve">Source slide 14. 13:00 to 15:00</a:t>
+              <a:t xml:space="preserve">Source slide 14. 13:30 to 15:00</a:t>
             </a:r>
             <a:endParaRPr lang="en-US" sz="1200"/>
           </a:p>
@@ -3514,7 +3582,7 @@
                 <a:ea typeface="Arial"/>
                 <a:cs typeface="Arial"/>
               </a:rPr>
-              <a:t xml:space="preserve">What should exist? Does it work?</a:t>
+              <a:t xml:space="preserve">Don't count what it cost you to build.</a:t>
             </a:r>
             <a:endParaRPr lang="en-US" sz="1200"/>
           </a:p>
@@ -3560,7 +3628,7 @@
                 <a:ea typeface="Arial"/>
                 <a:cs typeface="Arial"/>
               </a:rPr>
-              <a:t xml:space="preserve">Is it worth maintaining?</a:t>
+              <a:t xml:space="preserve">Count what it costs them to relearn.</a:t>
             </a:r>
             <a:endParaRPr lang="en-US" sz="1200"/>
           </a:p>
@@ -3606,7 +3674,7 @@
                 <a:ea typeface="Arial"/>
                 <a:cs typeface="Arial"/>
               </a:rPr>
-              <a:t xml:space="preserve">Back to the curve. The reviewer did not get slower. We filled the space that let them absorb uneven work.</a:t>
+              <a:t xml:space="preserve">Back to the two tracks. Forty-six releases, four sessions. You did not get slower and she did not get dumber. You filled the space between her visits with work she has to do.</a:t>
             </a:r>
             <a:endParaRPr lang="en-US" sz="1200"/>
           </a:p>
@@ -3652,7 +3720,7 @@
                 <a:ea typeface="Arial"/>
                 <a:cs typeface="Arial"/>
               </a:rPr>
-              <a:t xml:space="preserve">Ninety-five percent utilization is not efficiency. It is a nineteen-times wait with good posture. Argue with the model by measuring arrivals, service time, and variability. You cannot argue the queue away by pointing at how quickly the code appeared.</a:t>
+              <a:t xml:space="preserve">Turn the reasoning up as far as it goes. It will hand you a better-argued plan for a market it has never seen. The part it cannot do is the part you were hired for: knowing which of these your people will love, and knowing when they can stand to receive it.</a:t>
             </a:r>
             <a:endParaRPr lang="en-US" sz="1200"/>
           </a:p>
@@ -3698,7 +3766,7 @@
                 <a:ea typeface="Arial"/>
                 <a:cs typeface="Arial"/>
               </a:rPr>
-              <a:t xml:space="preserve">Sometimes the right result is a smaller change. Sometimes it is no change. Cheap code makes both decisions more valuable.</a:t>
+              <a:t xml:space="preserve">Sometimes the right release is a smaller one. Sometimes it is the same app they left.</a:t>
             </a:r>
             <a:endParaRPr lang="en-US" sz="1200"/>
           </a:p>
@@ -3790,7 +3858,7 @@
                 <a:ea typeface="Arial"/>
                 <a:cs typeface="Arial"/>
               </a:rPr>
-              <a:t xml:space="preserve">Leave the utilization curve up for questions.</a:t>
+              <a:t xml:space="preserve">Step back to slide 3 for the two tracks, then return here. Stop talking.</a:t>
             </a:r>
             <a:endParaRPr lang="en-US" sz="1200"/>
           </a:p>
@@ -3903,7 +3971,7 @@
                 <a:ea typeface="Arial"/>
                 <a:cs typeface="Arial"/>
               </a:rPr>
-              <a:t xml:space="preserve">J. F. C. Kingman (1961), [The single server queue in heavy traffic](https://www.cambridge.org/core/journals/mathematical-proceedings-of-the-cambridge-philosophical-society/article/abs/single-server-queue-in-heavy-traffic/81C55BC00A68FE6D5385638AA0B0AF37), 57(4), 902–904. John D. C. Little (1961), [A Proof for the Queuing Formula: L = λW](https://pubsonline.informs.org/doi/abs/10.1287/opre.9.3.383), Operations Research 9(3), 383–387.</a:t>
+              <a:t xml:space="preserve">Debora Viana Thompson, Rebecca W. Hamilton and Roland T. Rust (2005), [Feature Fatigue: When Product Capabilities Become Too Much of a Good Thing](https://doi.org/10.1509/jmkr.2005.42.4.431), Journal of Marketing Research 42(4), 431–442. Noriaki Kano, Nobuhiko Seraku, Fumio Takahashi and Shinichi Tsuji (1984), Attractive Quality and Must-Be Quality, Journal of the Japanese Society for Quality Control 14(2), 39–48.</a:t>
             </a:r>
             <a:endParaRPr lang="en-US" sz="1200"/>
           </a:p>
@@ -3949,7 +4017,99 @@
                 <a:ea typeface="Arial"/>
                 <a:cs typeface="Arial"/>
               </a:rPr>
-              <a:t xml:space="preserve">Lisanne Bainbridge (1983), [Ironies of automation](https://www.sciencedirect.com/science/article/pii/0005109883900468), Automatica 19(6), 775–779. Linda J. Skitka, Kathleen L. Mosier and Mark Burdick (1999), [Does automation bias decision-making?](https://doi.org/10.1006/ijhc.1999.0252), International Journal of Human-Computer Studies 51(5), 991–1006. A flight-simulation task with a monitoring aid, not a code-review trial.</a:t>
+              <a:t xml:space="preserve">William Samuelson and Richard Zeckhauser (1988), [Status Quo Bias in Decision Making](https://doi.org/10.1007/BF00055564), Journal of Risk and Uncertainty 1(1), 7–59. Daniel Kahneman, Jack L. Knetsch and Richard H. Thaler (1990), [Experimental Tests of the Endowment Effect and the Coase Theorem](https://doi.org/10.1086/261737), Journal of Political Economy 98(6), 1325–1348. Jakob Nielsen (1994), [Ten Usability Heuristics for User Interface Design](https://www.nngroup.com/articles/ten-usability-heuristics/).</a:t>
+            </a:r>
+            <a:endParaRPr lang="en-US" sz="1200"/>
+          </a:p>
+          <a:p>
+            <a:pPr marL="0" indent="0">
+              <a:lnSpc>
+                <a:spcPts val="1560"/>
+              </a:lnSpc>
+              <a:spcAft>
+                <a:spcPts val="0"/>
+              </a:spcAft>
+              <a:buNone/>
+            </a:pPr>
+            <a:r>
+              <a:rPr lang="en-US" sz="1200" b="0">
+                <a:solidFill>
+                  <a:srgbClr val="202b33"/>
+                </a:solidFill>
+                <a:latin typeface="Arial"/>
+                <a:ea typeface="Arial"/>
+                <a:cs typeface="Arial"/>
+              </a:rPr>
+              <a:t xml:space="preserve"/>
+            </a:r>
+            <a:endParaRPr lang="en-US" sz="1200"/>
+          </a:p>
+          <a:p>
+            <a:pPr marL="0" indent="0">
+              <a:lnSpc>
+                <a:spcPts val="1560"/>
+              </a:lnSpc>
+              <a:spcAft>
+                <a:spcPts val="0"/>
+              </a:spcAft>
+              <a:buNone/>
+            </a:pPr>
+            <a:r>
+              <a:rPr lang="en-US" sz="1200" b="0">
+                <a:solidFill>
+                  <a:srgbClr val="202b33"/>
+                </a:solidFill>
+                <a:latin typeface="Arial"/>
+                <a:ea typeface="Arial"/>
+                <a:cs typeface="Arial"/>
+              </a:rPr>
+              <a:t xml:space="preserve">François Chollet (2019), [On the Measure of Intelligence](https://arxiv.org/abs/1911.01547), arXiv:1911.01547. Parshin Shojaee and colleagues (2025), [The Illusion of Thinking](https://machinelearning.apple.com/research/illusion-of-thinking), Apple Machine Learning Research; and the rebuttal, [The Illusion of the Illusion of Thinking](https://arxiv.org/abs/2506.09250), arXiv:2506.09250. Present as a contested exchange, not a settled result.</a:t>
+            </a:r>
+            <a:endParaRPr lang="en-US" sz="1200"/>
+          </a:p>
+          <a:p>
+            <a:pPr marL="0" indent="0">
+              <a:lnSpc>
+                <a:spcPts val="1560"/>
+              </a:lnSpc>
+              <a:spcAft>
+                <a:spcPts val="0"/>
+              </a:spcAft>
+              <a:buNone/>
+            </a:pPr>
+            <a:r>
+              <a:rPr lang="en-US" sz="1200" b="0">
+                <a:solidFill>
+                  <a:srgbClr val="202b33"/>
+                </a:solidFill>
+                <a:latin typeface="Arial"/>
+                <a:ea typeface="Arial"/>
+                <a:cs typeface="Arial"/>
+              </a:rPr>
+              <a:t xml:space="preserve"/>
+            </a:r>
+            <a:endParaRPr lang="en-US" sz="1200"/>
+          </a:p>
+          <a:p>
+            <a:pPr marL="0" indent="0">
+              <a:lnSpc>
+                <a:spcPts val="1560"/>
+              </a:lnSpc>
+              <a:spcAft>
+                <a:spcPts val="0"/>
+              </a:spcAft>
+              <a:buNone/>
+            </a:pPr>
+            <a:r>
+              <a:rPr lang="en-US" sz="1200" b="0">
+                <a:solidFill>
+                  <a:srgbClr val="202b33"/>
+                </a:solidFill>
+                <a:latin typeface="Arial"/>
+                <a:ea typeface="Arial"/>
+                <a:cs typeface="Arial"/>
+              </a:rPr>
+              <a:t xml:space="preserve">Eric von Hippel (1986), [Lead Users: A Source of Novel Product Concepts](https://doi.org/10.1287/mnsc.32.7.791), Management Science 32(7), 791–805. Eric von Hippel and Ralph Katz (2002), [Shifting Innovation to Users via Toolkits](https://doi.org/10.1287/mnsc.48.7.821.2817), Management Science 48(7), 821–833. Everett M. Rogers (2003), Diffusion of Innovations, 5th edition, Free Press.</a:t>
             </a:r>
             <a:endParaRPr lang="en-US" sz="1200"/>
           </a:p>
@@ -4136,30 +4296,7 @@
                 <a:ea typeface="Arial"/>
                 <a:cs typeface="Arial"/>
               </a:rPr>
-              <a:t xml:space="preserve">Code Is Cheap. Judgment Is</a:t>
-            </a:r>
-            <a:endParaRPr lang="en-US" sz="3750"/>
-          </a:p>
-          <a:p>
-            <a:pPr marL="0" indent="0">
-              <a:lnSpc>
-                <a:spcPts val="4500"/>
-              </a:lnSpc>
-              <a:spcAft>
-                <a:spcPts val="0"/>
-              </a:spcAft>
-              <a:buNone/>
-            </a:pPr>
-            <a:r>
-              <a:rPr lang="en-US" sz="3750" b="1">
-                <a:solidFill>
-                  <a:srgbClr val="202B33"/>
-                </a:solidFill>
-                <a:latin typeface="Arial"/>
-                <a:ea typeface="Arial"/>
-                <a:cs typeface="Arial"/>
-              </a:rPr>
-              <a:t xml:space="preserve">Expensive.</a:t>
+              <a:t xml:space="preserve">Turn Your Thinkin' Tokens Up to 11</a:t>
             </a:r>
             <a:endParaRPr lang="en-US" sz="3750"/>
           </a:p>
@@ -4329,7 +4466,7 @@
                 <a:ea typeface="Arial"/>
                 <a:cs typeface="Arial"/>
               </a:rPr>
-              <a:t xml:space="preserve">Code Is Cheap. Judgment Is Expensive.</a:t>
+              <a:t xml:space="preserve">Turn Your Thinkin' Tokens Up to 11</a:t>
             </a:r>
             <a:endParaRPr lang="en-US" sz="975"/>
           </a:p>
@@ -4379,6 +4516,517 @@
                 <a:cs typeface="Arial"/>
               </a:rPr>
               <a:t xml:space="preserve">1</a:t>
+            </a:r>
+            <a:endParaRPr lang="en-US" sz="975"/>
+          </a:p>
+        </p:txBody>
+      </p:sp>
+    </p:spTree>
+  </p:cSld>
+  <p:clrMapOvr>
+    <a:masterClrMapping/>
+  </p:clrMapOvr>
+</p:sld>
+</file>
+
+<file path=ppt/slides/slide10.xml><?xml version="1.0" encoding="utf-8"?>
+<p:sld xmlns:a="http://schemas.openxmlformats.org/drawingml/2006/main" xmlns:r="http://schemas.openxmlformats.org/officeDocument/2006/relationships" xmlns:p="http://schemas.openxmlformats.org/presentationml/2006/main">
+  <p:cSld name="Slide 10">
+    <p:bg>
+      <p:bgPr>
+        <a:solidFill>
+          <a:srgbClr val="FAFAF7"/>
+        </a:solidFill>
+        <a:effectLst/>
+      </p:bgPr>
+    </p:bg>
+    <p:spTree>
+      <p:nvGrpSpPr>
+        <p:cNvPr id="1" name=""/>
+        <p:cNvGrpSpPr/>
+        <p:nvPr/>
+      </p:nvGrpSpPr>
+      <p:grpSpPr>
+        <a:xfrm>
+          <a:off x="0" y="0"/>
+          <a:ext cx="0" cy="0"/>
+          <a:chOff x="0" y="0"/>
+          <a:chExt cx="0" cy="0"/>
+        </a:xfrm>
+      </p:grpSpPr>
+      <p:sp>
+        <p:nvSpPr>
+          <p:cNvPr id="2" name="Text 2"/>
+          <p:cNvSpPr txBox="1"/>
+          <p:nvPr/>
+        </p:nvSpPr>
+        <p:spPr>
+          <a:xfrm>
+            <a:off x="457200" y="266700"/>
+            <a:ext cx="9144000" cy="228600"/>
+          </a:xfrm>
+          <a:prstGeom prst="rect">
+            <a:avLst/>
+          </a:prstGeom>
+          <a:noFill/>
+          <a:ln>
+            <a:noFill/>
+          </a:ln>
+        </p:spPr>
+        <p:txBody>
+          <a:bodyPr wrap="none" lIns="0" tIns="0" rIns="0" bIns="0" anchor="t">
+            <a:noAutofit/>
+          </a:bodyPr>
+          <a:lstStyle/>
+          <a:p>
+            <a:pPr marL="0" indent="0">
+              <a:lnSpc>
+                <a:spcPts val="1365"/>
+              </a:lnSpc>
+              <a:spcAft>
+                <a:spcPts val="0"/>
+              </a:spcAft>
+              <a:buNone/>
+            </a:pPr>
+            <a:r>
+              <a:rPr lang="en-US" sz="1050" b="1">
+                <a:solidFill>
+                  <a:srgbClr val="246957"/>
+                </a:solidFill>
+                <a:latin typeface="Arial"/>
+                <a:ea typeface="Arial"/>
+                <a:cs typeface="Arial"/>
+              </a:rPr>
+              <a:t xml:space="preserve">SOURCE REFERENCES</a:t>
+            </a:r>
+            <a:endParaRPr lang="en-US" sz="1050"/>
+          </a:p>
+        </p:txBody>
+      </p:sp>
+      <p:sp>
+        <p:nvSpPr>
+          <p:cNvPr id="3" name="Text 3"/>
+          <p:cNvSpPr txBox="1"/>
+          <p:nvPr/>
+        </p:nvSpPr>
+        <p:spPr>
+          <a:xfrm>
+            <a:off x="457200" y="657225"/>
+            <a:ext cx="9144000" cy="1104900"/>
+          </a:xfrm>
+          <a:prstGeom prst="rect">
+            <a:avLst/>
+          </a:prstGeom>
+          <a:noFill/>
+          <a:ln>
+            <a:noFill/>
+          </a:ln>
+        </p:spPr>
+        <p:txBody>
+          <a:bodyPr wrap="none" lIns="0" tIns="0" rIns="0" bIns="0" anchor="t">
+            <a:noAutofit/>
+          </a:bodyPr>
+          <a:lstStyle/>
+          <a:p>
+            <a:pPr marL="0" indent="0">
+              <a:lnSpc>
+                <a:spcPts val="3060"/>
+              </a:lnSpc>
+              <a:spcAft>
+                <a:spcPts val="0"/>
+              </a:spcAft>
+              <a:buNone/>
+            </a:pPr>
+            <a:r>
+              <a:rPr lang="en-US" sz="2550" b="1">
+                <a:solidFill>
+                  <a:srgbClr val="202B33"/>
+                </a:solidFill>
+                <a:latin typeface="Arial"/>
+                <a:ea typeface="Arial"/>
+                <a:cs typeface="Arial"/>
+              </a:rPr>
+              <a:t xml:space="preserve">References (continued)</a:t>
+            </a:r>
+            <a:endParaRPr lang="en-US" sz="2550"/>
+          </a:p>
+        </p:txBody>
+      </p:sp>
+      <p:sp>
+        <p:nvSpPr>
+          <p:cNvPr id="4" name="Text 4"/>
+          <p:cNvSpPr txBox="1"/>
+          <p:nvPr/>
+        </p:nvSpPr>
+        <p:spPr>
+          <a:xfrm>
+            <a:off x="457200" y="1971675"/>
+            <a:ext cx="4352925" cy="5314950"/>
+          </a:xfrm>
+          <a:prstGeom prst="rect">
+            <a:avLst/>
+          </a:prstGeom>
+          <a:noFill/>
+          <a:ln>
+            <a:noFill/>
+          </a:ln>
+        </p:spPr>
+        <p:txBody>
+          <a:bodyPr wrap="none" lIns="0" tIns="0" rIns="0" bIns="0" anchor="t">
+            <a:noAutofit/>
+          </a:bodyPr>
+          <a:lstStyle/>
+          <a:p>
+            <a:pPr marL="0" indent="0">
+              <a:lnSpc>
+                <a:spcPts val="1950"/>
+              </a:lnSpc>
+              <a:spcAft>
+                <a:spcPts val="0"/>
+              </a:spcAft>
+              <a:buNone/>
+            </a:pPr>
+            <a:r>
+              <a:rPr lang="en-US" sz="1500" b="0">
+                <a:solidFill>
+                  <a:srgbClr val="202B33"/>
+                </a:solidFill>
+                <a:latin typeface="Arial"/>
+                <a:ea typeface="Arial"/>
+                <a:cs typeface="Arial"/>
+              </a:rPr>
+              <a:t xml:space="preserve">Eric von Hippel (1986), Lead Users: A</a:t>
+            </a:r>
+            <a:endParaRPr lang="en-US" sz="1500"/>
+          </a:p>
+          <a:p>
+            <a:pPr marL="0" indent="0">
+              <a:lnSpc>
+                <a:spcPts val="1950"/>
+              </a:lnSpc>
+              <a:spcAft>
+                <a:spcPts val="0"/>
+              </a:spcAft>
+              <a:buNone/>
+            </a:pPr>
+            <a:r>
+              <a:rPr lang="en-US" sz="1500" b="0">
+                <a:solidFill>
+                  <a:srgbClr val="202B33"/>
+                </a:solidFill>
+                <a:latin typeface="Arial"/>
+                <a:ea typeface="Arial"/>
+                <a:cs typeface="Arial"/>
+              </a:rPr>
+              <a:t xml:space="preserve">Source of Novel Product Concepts —</a:t>
+            </a:r>
+            <a:endParaRPr lang="en-US" sz="1500"/>
+          </a:p>
+          <a:p>
+            <a:pPr marL="0" indent="0">
+              <a:lnSpc>
+                <a:spcPts val="1950"/>
+              </a:lnSpc>
+              <a:spcAft>
+                <a:spcPts val="0"/>
+              </a:spcAft>
+              <a:buNone/>
+            </a:pPr>
+            <a:r>
+              <a:rPr lang="en-US" sz="1500" b="0">
+                <a:solidFill>
+                  <a:srgbClr val="202B33"/>
+                </a:solidFill>
+                <a:latin typeface="Arial"/>
+                <a:ea typeface="Arial"/>
+                <a:cs typeface="Arial"/>
+              </a:rPr>
+              <a:t xml:space="preserve">https://doi.org/10.1287/mnsc.32.7.791),</a:t>
+            </a:r>
+            <a:endParaRPr lang="en-US" sz="1500"/>
+          </a:p>
+          <a:p>
+            <a:pPr marL="0" indent="0">
+              <a:lnSpc>
+                <a:spcPts val="1950"/>
+              </a:lnSpc>
+              <a:spcAft>
+                <a:spcPts val="0"/>
+              </a:spcAft>
+              <a:buNone/>
+            </a:pPr>
+            <a:r>
+              <a:rPr lang="en-US" sz="1500" b="0">
+                <a:solidFill>
+                  <a:srgbClr val="202B33"/>
+                </a:solidFill>
+                <a:latin typeface="Arial"/>
+                <a:ea typeface="Arial"/>
+                <a:cs typeface="Arial"/>
+              </a:rPr>
+              <a:t xml:space="preserve">Management Science 32(7), 791–805. Eric von</a:t>
+            </a:r>
+            <a:endParaRPr lang="en-US" sz="1500"/>
+          </a:p>
+          <a:p>
+            <a:pPr marL="0" indent="0">
+              <a:lnSpc>
+                <a:spcPts val="1950"/>
+              </a:lnSpc>
+              <a:spcAft>
+                <a:spcPts val="0"/>
+              </a:spcAft>
+              <a:buNone/>
+            </a:pPr>
+            <a:r>
+              <a:rPr lang="en-US" sz="1500" b="0">
+                <a:solidFill>
+                  <a:srgbClr val="202B33"/>
+                </a:solidFill>
+                <a:latin typeface="Arial"/>
+                <a:ea typeface="Arial"/>
+                <a:cs typeface="Arial"/>
+              </a:rPr>
+              <a:t xml:space="preserve">Hippel and Ralph Katz (2002), [Shifting</a:t>
+            </a:r>
+            <a:endParaRPr lang="en-US" sz="1500"/>
+          </a:p>
+        </p:txBody>
+      </p:sp>
+      <p:sp>
+        <p:nvSpPr>
+          <p:cNvPr id="5" name="Text 5"/>
+          <p:cNvSpPr txBox="1"/>
+          <p:nvPr/>
+        </p:nvSpPr>
+        <p:spPr>
+          <a:xfrm>
+            <a:off x="5238750" y="1971675"/>
+            <a:ext cx="4362450" cy="5314950"/>
+          </a:xfrm>
+          <a:prstGeom prst="rect">
+            <a:avLst/>
+          </a:prstGeom>
+          <a:noFill/>
+          <a:ln>
+            <a:noFill/>
+          </a:ln>
+        </p:spPr>
+        <p:txBody>
+          <a:bodyPr wrap="none" lIns="0" tIns="0" rIns="0" bIns="0" anchor="t">
+            <a:noAutofit/>
+          </a:bodyPr>
+          <a:lstStyle/>
+          <a:p>
+            <a:pPr marL="0" indent="0">
+              <a:lnSpc>
+                <a:spcPts val="1950"/>
+              </a:lnSpc>
+              <a:spcAft>
+                <a:spcPts val="0"/>
+              </a:spcAft>
+              <a:buNone/>
+            </a:pPr>
+            <a:r>
+              <a:rPr lang="en-US" sz="1500" b="0">
+                <a:solidFill>
+                  <a:srgbClr val="202B33"/>
+                </a:solidFill>
+                <a:latin typeface="Arial"/>
+                <a:ea typeface="Arial"/>
+                <a:cs typeface="Arial"/>
+              </a:rPr>
+              <a:t xml:space="preserve">Innovation to Users via</a:t>
+            </a:r>
+            <a:endParaRPr lang="en-US" sz="1500"/>
+          </a:p>
+          <a:p>
+            <a:pPr marL="0" indent="0">
+              <a:lnSpc>
+                <a:spcPts val="1950"/>
+              </a:lnSpc>
+              <a:spcAft>
+                <a:spcPts val="0"/>
+              </a:spcAft>
+              <a:buNone/>
+            </a:pPr>
+            <a:r>
+              <a:rPr lang="en-US" sz="1500" b="0">
+                <a:solidFill>
+                  <a:srgbClr val="202B33"/>
+                </a:solidFill>
+                <a:latin typeface="Arial"/>
+                <a:ea typeface="Arial"/>
+                <a:cs typeface="Arial"/>
+              </a:rPr>
+              <a:t xml:space="preserve">Toolkits](https://doi.org/10.1287/mnsc.48.7.821.2817),</a:t>
+            </a:r>
+            <a:endParaRPr lang="en-US" sz="1500"/>
+          </a:p>
+          <a:p>
+            <a:pPr marL="0" indent="0">
+              <a:lnSpc>
+                <a:spcPts val="1950"/>
+              </a:lnSpc>
+              <a:spcAft>
+                <a:spcPts val="0"/>
+              </a:spcAft>
+              <a:buNone/>
+            </a:pPr>
+            <a:r>
+              <a:rPr lang="en-US" sz="1500" b="0">
+                <a:solidFill>
+                  <a:srgbClr val="202B33"/>
+                </a:solidFill>
+                <a:latin typeface="Arial"/>
+                <a:ea typeface="Arial"/>
+                <a:cs typeface="Arial"/>
+              </a:rPr>
+              <a:t xml:space="preserve">Management Science 48(7), 821–833. Everett</a:t>
+            </a:r>
+            <a:endParaRPr lang="en-US" sz="1500"/>
+          </a:p>
+          <a:p>
+            <a:pPr marL="0" indent="0">
+              <a:lnSpc>
+                <a:spcPts val="1950"/>
+              </a:lnSpc>
+              <a:spcAft>
+                <a:spcPts val="0"/>
+              </a:spcAft>
+              <a:buNone/>
+            </a:pPr>
+            <a:r>
+              <a:rPr lang="en-US" sz="1500" b="0">
+                <a:solidFill>
+                  <a:srgbClr val="202B33"/>
+                </a:solidFill>
+                <a:latin typeface="Arial"/>
+                <a:ea typeface="Arial"/>
+                <a:cs typeface="Arial"/>
+              </a:rPr>
+              <a:t xml:space="preserve">M. Rogers (2003, Diffusion of Innovations,</a:t>
+            </a:r>
+            <a:endParaRPr lang="en-US" sz="1500"/>
+          </a:p>
+          <a:p>
+            <a:pPr marL="0" indent="0">
+              <a:lnSpc>
+                <a:spcPts val="1950"/>
+              </a:lnSpc>
+              <a:spcAft>
+                <a:spcPts val="0"/>
+              </a:spcAft>
+              <a:buNone/>
+            </a:pPr>
+            <a:r>
+              <a:rPr lang="en-US" sz="1500" b="0">
+                <a:solidFill>
+                  <a:srgbClr val="202B33"/>
+                </a:solidFill>
+                <a:latin typeface="Arial"/>
+                <a:ea typeface="Arial"/>
+                <a:cs typeface="Arial"/>
+              </a:rPr>
+              <a:t xml:space="preserve">5th edition, Free Press.</a:t>
+            </a:r>
+            <a:endParaRPr lang="en-US" sz="1500"/>
+          </a:p>
+        </p:txBody>
+      </p:sp>
+      <p:sp>
+        <p:nvSpPr>
+          <p:cNvPr id="6" name="Text 6"/>
+          <p:cNvSpPr txBox="1"/>
+          <p:nvPr/>
+        </p:nvSpPr>
+        <p:spPr>
+          <a:xfrm>
+            <a:off x="457200" y="7486650"/>
+            <a:ext cx="8820150" cy="190500"/>
+          </a:xfrm>
+          <a:prstGeom prst="rect">
+            <a:avLst/>
+          </a:prstGeom>
+          <a:noFill/>
+          <a:ln>
+            <a:noFill/>
+          </a:ln>
+        </p:spPr>
+        <p:txBody>
+          <a:bodyPr wrap="none" lIns="0" tIns="0" rIns="0" bIns="0" anchor="t">
+            <a:noAutofit/>
+          </a:bodyPr>
+          <a:lstStyle/>
+          <a:p>
+            <a:pPr marL="0" indent="0">
+              <a:lnSpc>
+                <a:spcPts val="1268"/>
+              </a:lnSpc>
+              <a:spcAft>
+                <a:spcPts val="0"/>
+              </a:spcAft>
+              <a:buNone/>
+            </a:pPr>
+            <a:r>
+              <a:rPr lang="en-US" sz="975" b="0">
+                <a:solidFill>
+                  <a:srgbClr val="48555B"/>
+                </a:solidFill>
+                <a:latin typeface="Arial"/>
+                <a:ea typeface="Arial"/>
+                <a:cs typeface="Arial"/>
+              </a:rPr>
+              <a:t xml:space="preserve">Turn Your Thinkin' Tokens Up to 11</a:t>
+            </a:r>
+            <a:endParaRPr lang="en-US" sz="975"/>
+          </a:p>
+        </p:txBody>
+      </p:sp>
+      <p:sp>
+        <p:nvSpPr>
+          <p:cNvPr id="7" name="Text 7"/>
+          <p:cNvSpPr txBox="1"/>
+          <p:nvPr/>
+        </p:nvSpPr>
+        <p:spPr>
+          <a:xfrm>
+            <a:off x="9391650" y="7486650"/>
+            <a:ext cx="238125" cy="190500"/>
+          </a:xfrm>
+          <a:prstGeom prst="rect">
+            <a:avLst/>
+          </a:prstGeom>
+          <a:noFill/>
+          <a:ln>
+            <a:noFill/>
+          </a:ln>
+        </p:spPr>
+        <p:txBody>
+          <a:bodyPr wrap="none" lIns="0" tIns="0" rIns="0" bIns="0" anchor="t">
+            <a:noAutofit/>
+          </a:bodyPr>
+          <a:lstStyle/>
+          <a:p>
+            <a:pPr marL="0" indent="0">
+              <a:lnSpc>
+                <a:spcPts val="1268"/>
+              </a:lnSpc>
+              <a:spcAft>
+                <a:spcPts val="0"/>
+              </a:spcAft>
+              <a:buNone/>
+            </a:pPr>
+            <a:r>
+              <a:rPr lang="en-US" sz="975" b="0">
+                <a:solidFill>
+                  <a:srgbClr val="48555B"/>
+                </a:solidFill>
+                <a:latin typeface="Arial"/>
+                <a:ea typeface="Arial"/>
+                <a:cs typeface="Arial"/>
+              </a:rPr>
+              <a:t xml:space="preserve">10</a:t>
             </a:r>
             <a:endParaRPr lang="en-US" sz="975"/>
           </a:p>
@@ -4509,7 +5157,7 @@
                 <a:ea typeface="Arial"/>
                 <a:cs typeface="Arial"/>
               </a:rPr>
-              <a:t xml:space="preserve">The morning four good implementations arrive</a:t>
+              <a:t xml:space="preserve">These go to eleven</a:t>
             </a:r>
             <a:endParaRPr lang="en-US" sz="2550"/>
           </a:p>
@@ -4558,7 +5206,7 @@
                 <a:ea typeface="Arial"/>
                 <a:cs typeface="Arial"/>
               </a:rPr>
-              <a:t xml:space="preserve">95% utilized → 19× waiting</a:t>
+              <a:t xml:space="preserve">Code is free. Features are free.</a:t>
             </a:r>
             <a:endParaRPr lang="en-US" sz="1500"/>
           </a:p>
@@ -4604,30 +5252,7 @@
                 <a:ea typeface="Arial"/>
                 <a:cs typeface="Arial"/>
               </a:rPr>
-              <a:t xml:space="preserve">Four plausible implementations. One</a:t>
-            </a:r>
-            <a:endParaRPr lang="en-US" sz="1500"/>
-          </a:p>
-          <a:p>
-            <a:pPr marL="0" indent="0">
-              <a:lnSpc>
-                <a:spcPts val="1950"/>
-              </a:lnSpc>
-              <a:spcAft>
-                <a:spcPts val="0"/>
-              </a:spcAft>
-              <a:buNone/>
-            </a:pPr>
-            <a:r>
-              <a:rPr lang="en-US" sz="1500" b="0">
-                <a:solidFill>
-                  <a:srgbClr val="202B33"/>
-                </a:solidFill>
-                <a:latin typeface="Arial"/>
-                <a:ea typeface="Arial"/>
-                <a:cs typeface="Arial"/>
-              </a:rPr>
-              <a:t xml:space="preserve">reviewer.</a:t>
+              <a:t xml:space="preserve">Attention is the budget.</a:t>
             </a:r>
             <a:endParaRPr lang="en-US" sz="1500"/>
           </a:p>
@@ -4673,76 +5298,99 @@
                 <a:ea typeface="Arial"/>
                 <a:cs typeface="Arial"/>
               </a:rPr>
-              <a:t xml:space="preserve">Four good implementations arrive before</a:t>
-            </a:r>
-            <a:endParaRPr lang="en-US" sz="1500"/>
-          </a:p>
-          <a:p>
-            <a:pPr marL="0" indent="0">
-              <a:lnSpc>
-                <a:spcPts val="1950"/>
-              </a:lnSpc>
-              <a:spcAft>
-                <a:spcPts val="0"/>
-              </a:spcAft>
-              <a:buNone/>
-            </a:pPr>
-            <a:r>
-              <a:rPr lang="en-US" sz="1500" b="0">
-                <a:solidFill>
-                  <a:srgbClr val="202B33"/>
-                </a:solidFill>
-                <a:latin typeface="Arial"/>
-                <a:ea typeface="Arial"/>
-                <a:cs typeface="Arial"/>
-              </a:rPr>
-              <a:t xml:space="preserve">lunch. The reviewer is still on yesterday's</a:t>
-            </a:r>
-            <a:endParaRPr lang="en-US" sz="1500"/>
-          </a:p>
-          <a:p>
-            <a:pPr marL="0" indent="0">
-              <a:lnSpc>
-                <a:spcPts val="1950"/>
-              </a:lnSpc>
-              <a:spcAft>
-                <a:spcPts val="0"/>
-              </a:spcAft>
-              <a:buNone/>
-            </a:pPr>
-            <a:r>
-              <a:rPr lang="en-US" sz="1500" b="0">
-                <a:solidFill>
-                  <a:srgbClr val="202B33"/>
-                </a:solidFill>
-                <a:latin typeface="Arial"/>
-                <a:ea typeface="Arial"/>
-                <a:cs typeface="Arial"/>
-              </a:rPr>
-              <a:t xml:space="preserve">change. Generation got cheaper. Delivery</a:t>
-            </a:r>
-            <a:endParaRPr lang="en-US" sz="1500"/>
-          </a:p>
-          <a:p>
-            <a:pPr marL="0" indent="0">
-              <a:lnSpc>
-                <a:spcPts val="1950"/>
-              </a:lnSpc>
-              <a:spcAft>
-                <a:spcPts val="0"/>
-              </a:spcAft>
-              <a:buNone/>
-            </a:pPr>
-            <a:r>
-              <a:rPr lang="en-US" sz="1500" b="0">
-                <a:solidFill>
-                  <a:srgbClr val="202B33"/>
-                </a:solidFill>
-                <a:latin typeface="Arial"/>
-                <a:ea typeface="Arial"/>
-                <a:cs typeface="Arial"/>
-              </a:rPr>
-              <a:t xml:space="preserve">acquired a queue.</a:t>
+              <a:t xml:space="preserve">Four features shipped before lunch. All</a:t>
+            </a:r>
+            <a:endParaRPr lang="en-US" sz="1500"/>
+          </a:p>
+          <a:p>
+            <a:pPr marL="0" indent="0">
+              <a:lnSpc>
+                <a:spcPts val="1950"/>
+              </a:lnSpc>
+              <a:spcAft>
+                <a:spcPts val="0"/>
+              </a:spcAft>
+              <a:buNone/>
+            </a:pPr>
+            <a:r>
+              <a:rPr lang="en-US" sz="1500" b="0">
+                <a:solidFill>
+                  <a:srgbClr val="202B33"/>
+                </a:solidFill>
+                <a:latin typeface="Arial"/>
+                <a:ea typeface="Arial"/>
+                <a:cs typeface="Arial"/>
+              </a:rPr>
+              <a:t xml:space="preserve">four work. All four have tests. Your best</a:t>
+            </a:r>
+            <a:endParaRPr lang="en-US" sz="1500"/>
+          </a:p>
+          <a:p>
+            <a:pPr marL="0" indent="0">
+              <a:lnSpc>
+                <a:spcPts val="1950"/>
+              </a:lnSpc>
+              <a:spcAft>
+                <a:spcPts val="0"/>
+              </a:spcAft>
+              <a:buNone/>
+            </a:pPr>
+            <a:r>
+              <a:rPr lang="en-US" sz="1500" b="0">
+                <a:solidFill>
+                  <a:srgbClr val="202B33"/>
+                </a:solidFill>
+                <a:latin typeface="Arial"/>
+                <a:ea typeface="Arial"/>
+                <a:cs typeface="Arial"/>
+              </a:rPr>
+              <a:t xml:space="preserve">customer opens the app for the first time</a:t>
+            </a:r>
+            <a:endParaRPr lang="en-US" sz="1500"/>
+          </a:p>
+          <a:p>
+            <a:pPr marL="0" indent="0">
+              <a:lnSpc>
+                <a:spcPts val="1950"/>
+              </a:lnSpc>
+              <a:spcAft>
+                <a:spcPts val="0"/>
+              </a:spcAft>
+              <a:buNone/>
+            </a:pPr>
+            <a:r>
+              <a:rPr lang="en-US" sz="1500" b="0">
+                <a:solidFill>
+                  <a:srgbClr val="202B33"/>
+                </a:solidFill>
+                <a:latin typeface="Arial"/>
+                <a:ea typeface="Arial"/>
+                <a:cs typeface="Arial"/>
+              </a:rPr>
+              <a:t xml:space="preserve">in six weeks and cannot find the button she</a:t>
+            </a:r>
+            <a:endParaRPr lang="en-US" sz="1500"/>
+          </a:p>
+          <a:p>
+            <a:pPr marL="0" indent="0">
+              <a:lnSpc>
+                <a:spcPts val="1950"/>
+              </a:lnSpc>
+              <a:spcAft>
+                <a:spcPts val="0"/>
+              </a:spcAft>
+              <a:buNone/>
+            </a:pPr>
+            <a:r>
+              <a:rPr lang="en-US" sz="1500" b="0">
+                <a:solidFill>
+                  <a:srgbClr val="202B33"/>
+                </a:solidFill>
+                <a:latin typeface="Arial"/>
+                <a:ea typeface="Arial"/>
+                <a:cs typeface="Arial"/>
+              </a:rPr>
+              <a:t xml:space="preserve">used every Friday. Nobody filed a bug.</a:t>
             </a:r>
             <a:endParaRPr lang="en-US" sz="1500"/>
           </a:p>
@@ -4766,75 +5414,6 @@
                 <a:cs typeface="Arial"/>
               </a:rPr>
               <a:t xml:space="preserve"/>
-            </a:r>
-            <a:endParaRPr lang="en-US" sz="1500"/>
-          </a:p>
-          <a:p>
-            <a:pPr marL="0" indent="0">
-              <a:lnSpc>
-                <a:spcPts val="1950"/>
-              </a:lnSpc>
-              <a:spcAft>
-                <a:spcPts val="0"/>
-              </a:spcAft>
-              <a:buNone/>
-            </a:pPr>
-            <a:r>
-              <a:rPr lang="en-US" sz="1500" b="0">
-                <a:solidFill>
-                  <a:srgbClr val="202B33"/>
-                </a:solidFill>
-                <a:latin typeface="Arial"/>
-                <a:ea typeface="Arial"/>
-                <a:cs typeface="Arial"/>
-              </a:rPr>
-              <a:t xml:space="preserve">If your organization uses AI to build an</a:t>
-            </a:r>
-            <a:endParaRPr lang="en-US" sz="1500"/>
-          </a:p>
-          <a:p>
-            <a:pPr marL="0" indent="0">
-              <a:lnSpc>
-                <a:spcPts val="1950"/>
-              </a:lnSpc>
-              <a:spcAft>
-                <a:spcPts val="0"/>
-              </a:spcAft>
-              <a:buNone/>
-            </a:pPr>
-            <a:r>
-              <a:rPr lang="en-US" sz="1500" b="0">
-                <a:solidFill>
-                  <a:srgbClr val="202B33"/>
-                </a:solidFill>
-                <a:latin typeface="Arial"/>
-                <a:ea typeface="Arial"/>
-                <a:cs typeface="Arial"/>
-              </a:rPr>
-              <a:t xml:space="preserve">infinite feature machine, you have</a:t>
-            </a:r>
-            <a:endParaRPr lang="en-US" sz="1500"/>
-          </a:p>
-          <a:p>
-            <a:pPr marL="0" indent="0">
-              <a:lnSpc>
-                <a:spcPts val="1950"/>
-              </a:lnSpc>
-              <a:spcAft>
-                <a:spcPts val="0"/>
-              </a:spcAft>
-              <a:buNone/>
-            </a:pPr>
-            <a:r>
-              <a:rPr lang="en-US" sz="1500" b="0">
-                <a:solidFill>
-                  <a:srgbClr val="202B33"/>
-                </a:solidFill>
-                <a:latin typeface="Arial"/>
-                <a:ea typeface="Arial"/>
-                <a:cs typeface="Arial"/>
-              </a:rPr>
-              <a:t xml:space="preserve">tragically missed the potential of the</a:t>
             </a:r>
             <a:endParaRPr lang="en-US" sz="1500"/>
           </a:p>
@@ -4883,53 +5462,53 @@
                 <a:ea typeface="Arial"/>
                 <a:cs typeface="Arial"/>
               </a:rPr>
-              <a:t xml:space="preserve">magic AI genie. We can spend the gain on</a:t>
-            </a:r>
-            <a:endParaRPr lang="en-US" sz="1500"/>
-          </a:p>
-          <a:p>
-            <a:pPr marL="0" indent="0">
-              <a:lnSpc>
-                <a:spcPts val="1950"/>
-              </a:lnSpc>
-              <a:spcAft>
-                <a:spcPts val="0"/>
-              </a:spcAft>
-              <a:buNone/>
-            </a:pPr>
-            <a:r>
-              <a:rPr lang="en-US" sz="1500" b="0">
-                <a:solidFill>
-                  <a:srgbClr val="202B33"/>
-                </a:solidFill>
-                <a:latin typeface="Arial"/>
-                <a:ea typeface="Arial"/>
-                <a:cs typeface="Arial"/>
-              </a:rPr>
-              <a:t xml:space="preserve">fewer defects and smaller changes. We do</a:t>
-            </a:r>
-            <a:endParaRPr lang="en-US" sz="1500"/>
-          </a:p>
-          <a:p>
-            <a:pPr marL="0" indent="0">
-              <a:lnSpc>
-                <a:spcPts val="1950"/>
-              </a:lnSpc>
-              <a:spcAft>
-                <a:spcPts val="0"/>
-              </a:spcAft>
-              <a:buNone/>
-            </a:pPr>
-            <a:r>
-              <a:rPr lang="en-US" sz="1500" b="0">
-                <a:solidFill>
-                  <a:srgbClr val="202B33"/>
-                </a:solidFill>
-                <a:latin typeface="Arial"/>
-                <a:ea typeface="Arial"/>
-                <a:cs typeface="Arial"/>
-              </a:rPr>
-              <a:t xml:space="preserve">not have to spend it all on more code.</a:t>
+              <a:t xml:space="preserve">Here is the line this talk has to earn.</a:t>
+            </a:r>
+            <a:endParaRPr lang="en-US" sz="1500"/>
+          </a:p>
+          <a:p>
+            <a:pPr marL="0" indent="0">
+              <a:lnSpc>
+                <a:spcPts val="1950"/>
+              </a:lnSpc>
+              <a:spcAft>
+                <a:spcPts val="0"/>
+              </a:spcAft>
+              <a:buNone/>
+            </a:pPr>
+            <a:r>
+              <a:rPr lang="en-US" sz="1500" b="0">
+                <a:solidFill>
+                  <a:srgbClr val="202B33"/>
+                </a:solidFill>
+                <a:latin typeface="Arial"/>
+                <a:ea typeface="Arial"/>
+                <a:cs typeface="Arial"/>
+              </a:rPr>
+              <a:t xml:space="preserve">Don't count what the feature cost you to</a:t>
+            </a:r>
+            <a:endParaRPr lang="en-US" sz="1500"/>
+          </a:p>
+          <a:p>
+            <a:pPr marL="0" indent="0">
+              <a:lnSpc>
+                <a:spcPts val="1950"/>
+              </a:lnSpc>
+              <a:spcAft>
+                <a:spcPts val="0"/>
+              </a:spcAft>
+              <a:buNone/>
+            </a:pPr>
+            <a:r>
+              <a:rPr lang="en-US" sz="1500" b="0">
+                <a:solidFill>
+                  <a:srgbClr val="202B33"/>
+                </a:solidFill>
+                <a:latin typeface="Arial"/>
+                <a:ea typeface="Arial"/>
+                <a:cs typeface="Arial"/>
+              </a:rPr>
+              <a:t xml:space="preserve">build, count what it costs them to relearn.</a:t>
             </a:r>
             <a:endParaRPr lang="en-US" sz="1500"/>
           </a:p>
@@ -4975,168 +5554,122 @@
                 <a:ea typeface="Arial"/>
                 <a:cs typeface="Arial"/>
               </a:rPr>
-              <a:t xml:space="preserve">Here is the scope once: the queue and</a:t>
-            </a:r>
-            <a:endParaRPr lang="en-US" sz="1500"/>
-          </a:p>
-          <a:p>
-            <a:pPr marL="0" indent="0">
-              <a:lnSpc>
-                <a:spcPts val="1950"/>
-              </a:lnSpc>
-              <a:spcAft>
-                <a:spcPts val="0"/>
-              </a:spcAft>
-              <a:buNone/>
-            </a:pPr>
-            <a:r>
-              <a:rPr lang="en-US" sz="1500" b="0">
-                <a:solidFill>
-                  <a:srgbClr val="202B33"/>
-                </a:solidFill>
-                <a:latin typeface="Arial"/>
-                <a:ea typeface="Arial"/>
-                <a:cs typeface="Arial"/>
-              </a:rPr>
-              <a:t xml:space="preserve">permission examples are teaching models,</a:t>
-            </a:r>
-            <a:endParaRPr lang="en-US" sz="1500"/>
-          </a:p>
-          <a:p>
-            <a:pPr marL="0" indent="0">
-              <a:lnSpc>
-                <a:spcPts val="1950"/>
-              </a:lnSpc>
-              <a:spcAft>
-                <a:spcPts val="0"/>
-              </a:spcAft>
-              <a:buNone/>
-            </a:pPr>
-            <a:r>
-              <a:rPr lang="en-US" sz="1500" b="0">
-                <a:solidFill>
-                  <a:srgbClr val="202B33"/>
-                </a:solidFill>
-                <a:latin typeface="Arial"/>
-                <a:ea typeface="Arial"/>
-                <a:cs typeface="Arial"/>
-              </a:rPr>
-              <a:t xml:space="preserve">not measurements of your team. The</a:t>
-            </a:r>
-            <a:endParaRPr lang="en-US" sz="1500"/>
-          </a:p>
-          <a:p>
-            <a:pPr marL="0" indent="0">
-              <a:lnSpc>
-                <a:spcPts val="1950"/>
-              </a:lnSpc>
-              <a:spcAft>
-                <a:spcPts val="0"/>
-              </a:spcAft>
-              <a:buNone/>
-            </a:pPr>
-            <a:r>
-              <a:rPr lang="en-US" sz="1500" b="0">
-                <a:solidFill>
-                  <a:srgbClr val="202B33"/>
-                </a:solidFill>
-                <a:latin typeface="Arial"/>
-                <a:ea typeface="Arial"/>
-                <a:cs typeface="Arial"/>
-              </a:rPr>
-              <a:t xml:space="preserve">nineteen-times wait assumes one server and</a:t>
-            </a:r>
-            <a:endParaRPr lang="en-US" sz="1500"/>
-          </a:p>
-          <a:p>
-            <a:pPr marL="0" indent="0">
-              <a:lnSpc>
-                <a:spcPts val="1950"/>
-              </a:lnSpc>
-              <a:spcAft>
-                <a:spcPts val="0"/>
-              </a:spcAft>
-              <a:buNone/>
-            </a:pPr>
-            <a:r>
-              <a:rPr lang="en-US" sz="1500" b="0">
-                <a:solidFill>
-                  <a:srgbClr val="202B33"/>
-                </a:solidFill>
-                <a:latin typeface="Arial"/>
-                <a:ea typeface="Arial"/>
-                <a:cs typeface="Arial"/>
-              </a:rPr>
-              <a:t xml:space="preserve">a variability factor of one. We will do the</a:t>
-            </a:r>
-            <a:endParaRPr lang="en-US" sz="1500"/>
-          </a:p>
-          <a:p>
-            <a:pPr marL="0" indent="0">
-              <a:lnSpc>
-                <a:spcPts val="1950"/>
-              </a:lnSpc>
-              <a:spcAft>
-                <a:spcPts val="0"/>
-              </a:spcAft>
-              <a:buNone/>
-            </a:pPr>
-            <a:r>
-              <a:rPr lang="en-US" sz="1500" b="0">
-                <a:solidFill>
-                  <a:srgbClr val="202B33"/>
-                </a:solidFill>
-                <a:latin typeface="Arial"/>
-                <a:ea typeface="Arial"/>
-                <a:cs typeface="Arial"/>
-              </a:rPr>
-              <a:t xml:space="preserve">arithmetic. The argument is that protecting</a:t>
-            </a:r>
-            <a:endParaRPr lang="en-US" sz="1500"/>
-          </a:p>
-          <a:p>
-            <a:pPr marL="0" indent="0">
-              <a:lnSpc>
-                <a:spcPts val="1950"/>
-              </a:lnSpc>
-              <a:spcAft>
-                <a:spcPts val="0"/>
-              </a:spcAft>
-              <a:buNone/>
-            </a:pPr>
-            <a:r>
-              <a:rPr lang="en-US" sz="1500" b="0">
-                <a:solidFill>
-                  <a:srgbClr val="202B33"/>
-                </a:solidFill>
-                <a:latin typeface="Arial"/>
-                <a:ea typeface="Arial"/>
-                <a:cs typeface="Arial"/>
-              </a:rPr>
-              <a:t xml:space="preserve">review capacity belongs upstream, where we</a:t>
-            </a:r>
-            <a:endParaRPr lang="en-US" sz="1500"/>
-          </a:p>
-          <a:p>
-            <a:pPr marL="0" indent="0">
-              <a:lnSpc>
-                <a:spcPts val="1950"/>
-              </a:lnSpc>
-              <a:spcAft>
-                <a:spcPts val="0"/>
-              </a:spcAft>
-              <a:buNone/>
-            </a:pPr>
-            <a:r>
-              <a:rPr lang="en-US" sz="1500" b="0">
-                <a:solidFill>
-                  <a:srgbClr val="202B33"/>
-                </a:solidFill>
-                <a:latin typeface="Arial"/>
-                <a:ea typeface="Arial"/>
-                <a:cs typeface="Arial"/>
-              </a:rPr>
-              <a:t xml:space="preserve">decide what enters the queue.</a:t>
+              <a:t xml:space="preserve">The title is a Spinal Tap joke and it is</a:t>
+            </a:r>
+            <a:endParaRPr lang="en-US" sz="1500"/>
+          </a:p>
+          <a:p>
+            <a:pPr marL="0" indent="0">
+              <a:lnSpc>
+                <a:spcPts val="1950"/>
+              </a:lnSpc>
+              <a:spcAft>
+                <a:spcPts val="0"/>
+              </a:spcAft>
+              <a:buNone/>
+            </a:pPr>
+            <a:r>
+              <a:rPr lang="en-US" sz="1500" b="0">
+                <a:solidFill>
+                  <a:srgbClr val="202B33"/>
+                </a:solidFill>
+                <a:latin typeface="Arial"/>
+                <a:ea typeface="Arial"/>
+                <a:cs typeface="Arial"/>
+              </a:rPr>
+              <a:t xml:space="preserve">load-bearing. Turn the reasoning budget up</a:t>
+            </a:r>
+            <a:endParaRPr lang="en-US" sz="1500"/>
+          </a:p>
+          <a:p>
+            <a:pPr marL="0" indent="0">
+              <a:lnSpc>
+                <a:spcPts val="1950"/>
+              </a:lnSpc>
+              <a:spcAft>
+                <a:spcPts val="0"/>
+              </a:spcAft>
+              <a:buNone/>
+            </a:pPr>
+            <a:r>
+              <a:rPr lang="en-US" sz="1500" b="0">
+                <a:solidFill>
+                  <a:srgbClr val="202B33"/>
+                </a:solidFill>
+                <a:latin typeface="Arial"/>
+                <a:ea typeface="Arial"/>
+                <a:cs typeface="Arial"/>
+              </a:rPr>
+              <a:t xml:space="preserve">to eleven. More tokens buy more</a:t>
+            </a:r>
+            <a:endParaRPr lang="en-US" sz="1500"/>
+          </a:p>
+          <a:p>
+            <a:pPr marL="0" indent="0">
+              <a:lnSpc>
+                <a:spcPts val="1950"/>
+              </a:lnSpc>
+              <a:spcAft>
+                <a:spcPts val="0"/>
+              </a:spcAft>
+              <a:buNone/>
+            </a:pPr>
+            <a:r>
+              <a:rPr lang="en-US" sz="1500" b="0">
+                <a:solidFill>
+                  <a:srgbClr val="202B33"/>
+                </a:solidFill>
+                <a:latin typeface="Arial"/>
+                <a:ea typeface="Arial"/>
+                <a:cs typeface="Arial"/>
+              </a:rPr>
+              <a:t xml:space="preserve">consideration of situations the model has</a:t>
+            </a:r>
+            <a:endParaRPr lang="en-US" sz="1500"/>
+          </a:p>
+          <a:p>
+            <a:pPr marL="0" indent="0">
+              <a:lnSpc>
+                <a:spcPts val="1950"/>
+              </a:lnSpc>
+              <a:spcAft>
+                <a:spcPts val="0"/>
+              </a:spcAft>
+              <a:buNone/>
+            </a:pPr>
+            <a:r>
+              <a:rPr lang="en-US" sz="1500" b="0">
+                <a:solidFill>
+                  <a:srgbClr val="202B33"/>
+                </a:solidFill>
+                <a:latin typeface="Arial"/>
+                <a:ea typeface="Arial"/>
+                <a:cs typeface="Arial"/>
+              </a:rPr>
+              <a:t xml:space="preserve">already seen. They do not buy taste, and</a:t>
+            </a:r>
+            <a:endParaRPr lang="en-US" sz="1500"/>
+          </a:p>
+          <a:p>
+            <a:pPr marL="0" indent="0">
+              <a:lnSpc>
+                <a:spcPts val="1950"/>
+              </a:lnSpc>
+              <a:spcAft>
+                <a:spcPts val="0"/>
+              </a:spcAft>
+              <a:buNone/>
+            </a:pPr>
+            <a:r>
+              <a:rPr lang="en-US" sz="1500" b="0">
+                <a:solidFill>
+                  <a:srgbClr val="202B33"/>
+                </a:solidFill>
+                <a:latin typeface="Arial"/>
+                <a:ea typeface="Arial"/>
+                <a:cs typeface="Arial"/>
+              </a:rPr>
+              <a:t xml:space="preserve">they do not tell you which Tuesday.</a:t>
             </a:r>
             <a:endParaRPr lang="en-US" sz="1500"/>
           </a:p>
@@ -5185,7 +5718,7 @@
                 <a:ea typeface="Arial"/>
                 <a:cs typeface="Arial"/>
               </a:rPr>
-              <a:t xml:space="preserve">Code Is Cheap. Judgment Is Expensive.</a:t>
+              <a:t xml:space="preserve">Turn Your Thinkin' Tokens Up to 11</a:t>
             </a:r>
             <a:endParaRPr lang="en-US" sz="975"/>
           </a:p>
@@ -5316,7 +5849,7 @@
                 <a:ea typeface="Arial"/>
                 <a:cs typeface="Arial"/>
               </a:rPr>
-              <a:t xml:space="preserve">02 / 07    SOURCE SLIDE 3</a:t>
+              <a:t xml:space="preserve">02 / 07    SOURCE SLIDE 4</a:t>
             </a:r>
             <a:endParaRPr lang="en-US" sz="1050"/>
           </a:p>
@@ -5365,7 +5898,7 @@
                 <a:ea typeface="Arial"/>
                 <a:cs typeface="Arial"/>
               </a:rPr>
-              <a:t xml:space="preserve">A queue does not care how you feel about it</a:t>
+              <a:t xml:space="preserve">Feature fatigue is a measured effect</a:t>
             </a:r>
             <a:endParaRPr lang="en-US" sz="2550"/>
           </a:p>
@@ -5373,69 +5906,14 @@
       </p:sp>
       <p:sp>
         <p:nvSpPr>
-          <p:cNvPr id="4" name="Image background"/>
-          <p:cNvSpPr/>
-          <p:nvPr/>
-        </p:nvSpPr>
-        <p:spPr>
-          <a:xfrm>
-            <a:off x="1554480" y="1781175"/>
-            <a:ext cx="6949440" cy="2714625"/>
-          </a:xfrm>
-          <a:prstGeom prst="rect">
-            <a:avLst/>
-          </a:prstGeom>
-          <a:solidFill>
-            <a:srgbClr val="161D26"/>
-          </a:solidFill>
-          <a:ln>
-            <a:noFill/>
-          </a:ln>
-        </p:spPr>
-      </p:sp>
-      <p:pic>
-        <p:nvPicPr>
-          <p:cNvPr id="5" name="8de9aa7b0e58010a491d155d2a0aaafbe5d48c9d4da5759fad5af686b3fce993" descr="Kingman: queue wait vs reviewer utilization, variability factor one"/>
-          <p:cNvPicPr>
-            <a:picLocks noChangeAspect="1"/>
-          </p:cNvPicPr>
-          <p:nvPr/>
-        </p:nvPicPr>
-        <p:blipFill>
-          <a:blip r:embed="rIdImage1">
-            <a:extLst>
-              <a:ext uri="{96DAC541-7B7A-43D3-8B79-37D633B846F1}">
-                <asvg:svgBlip xmlns:asvg="http://schemas.microsoft.com/office/drawing/2016/SVG/main" r:embed="rIdSvg1"/>
-              </a:ext>
-            </a:extLst>
-          </a:blip>
-          <a:stretch>
-            <a:fillRect/>
-          </a:stretch>
-        </p:blipFill>
-        <p:spPr>
-          <a:xfrm>
-            <a:off x="1554480" y="1781175"/>
-            <a:ext cx="6949440" cy="2714625"/>
-          </a:xfrm>
-          <a:prstGeom prst="rect">
-            <a:avLst/>
-          </a:prstGeom>
-          <a:ln>
-            <a:noFill/>
-          </a:ln>
-        </p:spPr>
-      </p:pic>
-      <p:sp>
-        <p:nvSpPr>
-          <p:cNvPr id="6" name="Text 6"/>
+          <p:cNvPr id="4" name="Text 4"/>
           <p:cNvSpPr txBox="1"/>
           <p:nvPr/>
         </p:nvSpPr>
         <p:spPr>
           <a:xfrm>
-            <a:off x="457200" y="4648200"/>
-            <a:ext cx="4352925" cy="2647950"/>
+            <a:off x="457200" y="1971675"/>
+            <a:ext cx="4352925" cy="5314950"/>
           </a:xfrm>
           <a:prstGeom prst="rect">
             <a:avLst/>
@@ -5453,38 +5931,38 @@
           <a:p>
             <a:pPr marL="0" indent="0">
               <a:lnSpc>
-                <a:spcPts val="1575"/>
-              </a:lnSpc>
-              <a:spcAft>
-                <a:spcPts val="0"/>
-              </a:spcAft>
-              <a:buNone/>
-            </a:pPr>
-            <a:r>
-              <a:rPr lang="en-US" sz="1200" b="0">
-                <a:solidFill>
-                  <a:srgbClr val="202B33"/>
-                </a:solidFill>
-                <a:latin typeface="Arial"/>
-                <a:ea typeface="Arial"/>
-                <a:cs typeface="Arial"/>
-              </a:rPr>
-              <a:t xml:space="preserve">Wq ≈ ((ca² + cs²) / 2) × ρ / (1 − ρ) × E[S]</a:t>
-            </a:r>
-            <a:endParaRPr lang="en-US" sz="1200"/>
-          </a:p>
-          <a:p>
-            <a:pPr marL="0" indent="0">
-              <a:lnSpc>
-                <a:spcPts val="1575"/>
-              </a:lnSpc>
-              <a:spcAft>
-                <a:spcPts val="0"/>
-              </a:spcAft>
-              <a:buNone/>
-            </a:pPr>
-            <a:r>
-              <a:rPr lang="en-US" sz="1200" b="0">
+                <a:spcPts val="1950"/>
+              </a:lnSpc>
+              <a:spcAft>
+                <a:spcPts val="0"/>
+              </a:spcAft>
+              <a:buNone/>
+            </a:pPr>
+            <a:r>
+              <a:rPr lang="en-US" sz="1500" b="0">
+                <a:solidFill>
+                  <a:srgbClr val="202B33"/>
+                </a:solidFill>
+                <a:latin typeface="Arial"/>
+                <a:ea typeface="Arial"/>
+                <a:cs typeface="Arial"/>
+              </a:rPr>
+              <a:t xml:space="preserve">Before use: capability wins</a:t>
+            </a:r>
+            <a:endParaRPr lang="en-US" sz="1500"/>
+          </a:p>
+          <a:p>
+            <a:pPr marL="0" indent="0">
+              <a:lnSpc>
+                <a:spcPts val="1950"/>
+              </a:lnSpc>
+              <a:spcAft>
+                <a:spcPts val="0"/>
+              </a:spcAft>
+              <a:buNone/>
+            </a:pPr>
+            <a:r>
+              <a:rPr lang="en-US" sz="1500" b="0">
                 <a:solidFill>
                   <a:srgbClr val="202B33"/>
                 </a:solidFill>
@@ -5494,43 +5972,43 @@
               </a:rPr>
               <a:t xml:space="preserve"/>
             </a:r>
-            <a:endParaRPr lang="en-US" sz="1200"/>
-          </a:p>
-          <a:p>
-            <a:pPr marL="0" indent="0">
-              <a:lnSpc>
-                <a:spcPts val="1575"/>
-              </a:lnSpc>
-              <a:spcAft>
-                <a:spcPts val="0"/>
-              </a:spcAft>
-              <a:buNone/>
-            </a:pPr>
-            <a:r>
-              <a:rPr lang="en-US" sz="1200" b="0">
-                <a:solidFill>
-                  <a:srgbClr val="202B33"/>
-                </a:solidFill>
-                <a:latin typeface="Arial"/>
-                <a:ea typeface="Arial"/>
-                <a:cs typeface="Arial"/>
-              </a:rPr>
-              <a:t xml:space="preserve">V = 1: 80% → 4×; 90% → 9×; 95% → 19×</a:t>
-            </a:r>
-            <a:endParaRPr lang="en-US" sz="1200"/>
-          </a:p>
-          <a:p>
-            <a:pPr marL="0" indent="0">
-              <a:lnSpc>
-                <a:spcPts val="1575"/>
-              </a:lnSpc>
-              <a:spcAft>
-                <a:spcPts val="0"/>
-              </a:spcAft>
-              <a:buNone/>
-            </a:pPr>
-            <a:r>
-              <a:rPr lang="en-US" sz="1200" b="0">
+            <a:endParaRPr lang="en-US" sz="1500"/>
+          </a:p>
+          <a:p>
+            <a:pPr marL="0" indent="0">
+              <a:lnSpc>
+                <a:spcPts val="1950"/>
+              </a:lnSpc>
+              <a:spcAft>
+                <a:spcPts val="0"/>
+              </a:spcAft>
+              <a:buNone/>
+            </a:pPr>
+            <a:r>
+              <a:rPr lang="en-US" sz="1500" b="0">
+                <a:solidFill>
+                  <a:srgbClr val="202B33"/>
+                </a:solidFill>
+                <a:latin typeface="Arial"/>
+                <a:ea typeface="Arial"/>
+                <a:cs typeface="Arial"/>
+              </a:rPr>
+              <a:t xml:space="preserve">After use: usability wins</a:t>
+            </a:r>
+            <a:endParaRPr lang="en-US" sz="1500"/>
+          </a:p>
+          <a:p>
+            <a:pPr marL="0" indent="0">
+              <a:lnSpc>
+                <a:spcPts val="1950"/>
+              </a:lnSpc>
+              <a:spcAft>
+                <a:spcPts val="0"/>
+              </a:spcAft>
+              <a:buNone/>
+            </a:pPr>
+            <a:r>
+              <a:rPr lang="en-US" sz="1500" b="0">
                 <a:solidFill>
                   <a:srgbClr val="202B33"/>
                 </a:solidFill>
@@ -5540,181 +6018,43 @@
               </a:rPr>
               <a:t xml:space="preserve"/>
             </a:r>
-            <a:endParaRPr lang="en-US" sz="1200"/>
-          </a:p>
-          <a:p>
-            <a:pPr marL="0" indent="0">
-              <a:lnSpc>
-                <a:spcPts val="1575"/>
-              </a:lnSpc>
-              <a:spcAft>
-                <a:spcPts val="0"/>
-              </a:spcAft>
-              <a:buNone/>
-            </a:pPr>
-            <a:r>
-              <a:rPr lang="en-US" sz="1200" b="0">
-                <a:solidFill>
-                  <a:srgbClr val="202B33"/>
-                </a:solidFill>
-                <a:latin typeface="Arial"/>
-                <a:ea typeface="Arial"/>
-                <a:cs typeface="Arial"/>
-              </a:rPr>
-              <a:t xml:space="preserve">Kingman's single-server approximation separates three</a:t>
-            </a:r>
-            <a:endParaRPr lang="en-US" sz="1200"/>
-          </a:p>
-          <a:p>
-            <a:pPr marL="0" indent="0">
-              <a:lnSpc>
-                <a:spcPts val="1575"/>
-              </a:lnSpc>
-              <a:spcAft>
-                <a:spcPts val="0"/>
-              </a:spcAft>
-              <a:buNone/>
-            </a:pPr>
-            <a:r>
-              <a:rPr lang="en-US" sz="1200" b="0">
-                <a:solidFill>
-                  <a:srgbClr val="202B33"/>
-                </a:solidFill>
-                <a:latin typeface="Arial"/>
-                <a:ea typeface="Arial"/>
-                <a:cs typeface="Arial"/>
-              </a:rPr>
-              <a:t xml:space="preserve">things: variability, utilization, and mean service</a:t>
-            </a:r>
-            <a:endParaRPr lang="en-US" sz="1200"/>
-          </a:p>
-          <a:p>
-            <a:pPr marL="0" indent="0">
-              <a:lnSpc>
-                <a:spcPts val="1575"/>
-              </a:lnSpc>
-              <a:spcAft>
-                <a:spcPts val="0"/>
-              </a:spcAft>
-              <a:buNone/>
-            </a:pPr>
-            <a:r>
-              <a:rPr lang="en-US" sz="1200" b="0">
-                <a:solidFill>
-                  <a:srgbClr val="202B33"/>
-                </a:solidFill>
-                <a:latin typeface="Arial"/>
-                <a:ea typeface="Arial"/>
-                <a:cs typeface="Arial"/>
-              </a:rPr>
-              <a:t xml:space="preserve">time. Call the variability term V. Set V to one for</a:t>
-            </a:r>
-            <a:endParaRPr lang="en-US" sz="1200"/>
-          </a:p>
-          <a:p>
-            <a:pPr marL="0" indent="0">
-              <a:lnSpc>
-                <a:spcPts val="1575"/>
-              </a:lnSpc>
-              <a:spcAft>
-                <a:spcPts val="0"/>
-              </a:spcAft>
-              <a:buNone/>
-            </a:pPr>
-            <a:r>
-              <a:rPr lang="en-US" sz="1200" b="0">
-                <a:solidFill>
-                  <a:srgbClr val="202B33"/>
-                </a:solidFill>
-                <a:latin typeface="Arial"/>
-                <a:ea typeface="Arial"/>
-                <a:cs typeface="Arial"/>
-              </a:rPr>
-              <a:t xml:space="preserve">this curve. At eighty percent utilization, point</a:t>
-            </a:r>
-            <a:endParaRPr lang="en-US" sz="1200"/>
-          </a:p>
-          <a:p>
-            <a:pPr marL="0" indent="0">
-              <a:lnSpc>
-                <a:spcPts val="1575"/>
-              </a:lnSpc>
-              <a:spcAft>
-                <a:spcPts val="0"/>
-              </a:spcAft>
-              <a:buNone/>
-            </a:pPr>
-            <a:r>
-              <a:rPr lang="en-US" sz="1200" b="0">
-                <a:solidFill>
-                  <a:srgbClr val="202B33"/>
-                </a:solidFill>
-                <a:latin typeface="Arial"/>
-                <a:ea typeface="Arial"/>
-                <a:cs typeface="Arial"/>
-              </a:rPr>
-              <a:t xml:space="preserve">eight divided by point two is four. At ninety-five,</a:t>
-            </a:r>
-            <a:endParaRPr lang="en-US" sz="1200"/>
-          </a:p>
-          <a:p>
-            <a:pPr marL="0" indent="0">
-              <a:lnSpc>
-                <a:spcPts val="1575"/>
-              </a:lnSpc>
-              <a:spcAft>
-                <a:spcPts val="0"/>
-              </a:spcAft>
-              <a:buNone/>
-            </a:pPr>
-            <a:r>
-              <a:rPr lang="en-US" sz="1200" b="0">
-                <a:solidFill>
-                  <a:srgbClr val="202B33"/>
-                </a:solidFill>
-                <a:latin typeface="Arial"/>
-                <a:ea typeface="Arial"/>
-                <a:cs typeface="Arial"/>
-              </a:rPr>
-              <a:t xml:space="preserve">point nine five divided by point zero five is</a:t>
-            </a:r>
-            <a:endParaRPr lang="en-US" sz="1200"/>
-          </a:p>
-          <a:p>
-            <a:pPr marL="0" indent="0">
-              <a:lnSpc>
-                <a:spcPts val="1575"/>
-              </a:lnSpc>
-              <a:spcAft>
-                <a:spcPts val="0"/>
-              </a:spcAft>
-              <a:buNone/>
-            </a:pPr>
-            <a:r>
-              <a:rPr lang="en-US" sz="1200" b="0">
-                <a:solidFill>
-                  <a:srgbClr val="202B33"/>
-                </a:solidFill>
-                <a:latin typeface="Arial"/>
-                <a:ea typeface="Arial"/>
-                <a:cs typeface="Arial"/>
-              </a:rPr>
-              <a:t xml:space="preserve">nineteen.</a:t>
-            </a:r>
-            <a:endParaRPr lang="en-US" sz="1200"/>
-          </a:p>
-          <a:p>
-            <a:pPr marL="0" indent="0">
-              <a:lnSpc>
-                <a:spcPts val="1575"/>
-              </a:lnSpc>
-              <a:spcAft>
-                <a:spcPts val="0"/>
-              </a:spcAft>
-              <a:buNone/>
-            </a:pPr>
-            <a:r>
-              <a:rPr lang="en-US" sz="1200" b="0">
+            <a:endParaRPr lang="en-US" sz="1500"/>
+          </a:p>
+          <a:p>
+            <a:pPr marL="0" indent="0">
+              <a:lnSpc>
+                <a:spcPts val="1950"/>
+              </a:lnSpc>
+              <a:spcAft>
+                <a:spcPts val="0"/>
+              </a:spcAft>
+              <a:buNone/>
+            </a:pPr>
+            <a:r>
+              <a:rPr lang="en-US" sz="1500" b="0">
+                <a:solidFill>
+                  <a:srgbClr val="202B33"/>
+                </a:solidFill>
+                <a:latin typeface="Arial"/>
+                <a:ea typeface="Arial"/>
+                <a:cs typeface="Arial"/>
+              </a:rPr>
+              <a:t xml:space="preserve">Delighters decay into expectations</a:t>
+            </a:r>
+            <a:endParaRPr lang="en-US" sz="1500"/>
+          </a:p>
+          <a:p>
+            <a:pPr marL="0" indent="0">
+              <a:lnSpc>
+                <a:spcPts val="1950"/>
+              </a:lnSpc>
+              <a:spcAft>
+                <a:spcPts val="0"/>
+              </a:spcAft>
+              <a:buNone/>
+            </a:pPr>
+            <a:r>
+              <a:rPr lang="en-US" sz="1500" b="0">
                 <a:solidFill>
                   <a:srgbClr val="202B33"/>
                 </a:solidFill>
@@ -5724,20 +6064,158 @@
               </a:rPr>
               <a:t xml:space="preserve"/>
             </a:r>
-            <a:endParaRPr lang="en-US" sz="1200"/>
+            <a:endParaRPr lang="en-US" sz="1500"/>
+          </a:p>
+          <a:p>
+            <a:pPr marL="0" indent="0">
+              <a:lnSpc>
+                <a:spcPts val="1950"/>
+              </a:lnSpc>
+              <a:spcAft>
+                <a:spcPts val="0"/>
+              </a:spcAft>
+              <a:buNone/>
+            </a:pPr>
+            <a:r>
+              <a:rPr lang="en-US" sz="1500" b="0">
+                <a:solidFill>
+                  <a:srgbClr val="202B33"/>
+                </a:solidFill>
+                <a:latin typeface="Arial"/>
+                <a:ea typeface="Arial"/>
+                <a:cs typeface="Arial"/>
+              </a:rPr>
+              <a:t xml:space="preserve">Thompson, Hamilton and Rust ran this in</a:t>
+            </a:r>
+            <a:endParaRPr lang="en-US" sz="1500"/>
+          </a:p>
+          <a:p>
+            <a:pPr marL="0" indent="0">
+              <a:lnSpc>
+                <a:spcPts val="1950"/>
+              </a:lnSpc>
+              <a:spcAft>
+                <a:spcPts val="0"/>
+              </a:spcAft>
+              <a:buNone/>
+            </a:pPr>
+            <a:r>
+              <a:rPr lang="en-US" sz="1500" b="0">
+                <a:solidFill>
+                  <a:srgbClr val="202B33"/>
+                </a:solidFill>
+                <a:latin typeface="Arial"/>
+                <a:ea typeface="Arial"/>
+                <a:cs typeface="Arial"/>
+              </a:rPr>
+              <a:t xml:space="preserve">2005 and named it feature fatigue. Before</a:t>
+            </a:r>
+            <a:endParaRPr lang="en-US" sz="1500"/>
+          </a:p>
+          <a:p>
+            <a:pPr marL="0" indent="0">
+              <a:lnSpc>
+                <a:spcPts val="1950"/>
+              </a:lnSpc>
+              <a:spcAft>
+                <a:spcPts val="0"/>
+              </a:spcAft>
+              <a:buNone/>
+            </a:pPr>
+            <a:r>
+              <a:rPr lang="en-US" sz="1500" b="0">
+                <a:solidFill>
+                  <a:srgbClr val="202B33"/>
+                </a:solidFill>
+                <a:latin typeface="Arial"/>
+                <a:ea typeface="Arial"/>
+                <a:cs typeface="Arial"/>
+              </a:rPr>
+              <a:t xml:space="preserve">purchase, people prefer the product with</a:t>
+            </a:r>
+            <a:endParaRPr lang="en-US" sz="1500"/>
+          </a:p>
+          <a:p>
+            <a:pPr marL="0" indent="0">
+              <a:lnSpc>
+                <a:spcPts val="1950"/>
+              </a:lnSpc>
+              <a:spcAft>
+                <a:spcPts val="0"/>
+              </a:spcAft>
+              <a:buNone/>
+            </a:pPr>
+            <a:r>
+              <a:rPr lang="en-US" sz="1500" b="0">
+                <a:solidFill>
+                  <a:srgbClr val="202B33"/>
+                </a:solidFill>
+                <a:latin typeface="Arial"/>
+                <a:ea typeface="Arial"/>
+                <a:cs typeface="Arial"/>
+              </a:rPr>
+              <a:t xml:space="preserve">more capabilities. After using it,</a:t>
+            </a:r>
+            <a:endParaRPr lang="en-US" sz="1500"/>
+          </a:p>
+          <a:p>
+            <a:pPr marL="0" indent="0">
+              <a:lnSpc>
+                <a:spcPts val="1950"/>
+              </a:lnSpc>
+              <a:spcAft>
+                <a:spcPts val="0"/>
+              </a:spcAft>
+              <a:buNone/>
+            </a:pPr>
+            <a:r>
+              <a:rPr lang="en-US" sz="1500" b="0">
+                <a:solidFill>
+                  <a:srgbClr val="202B33"/>
+                </a:solidFill>
+                <a:latin typeface="Arial"/>
+                <a:ea typeface="Arial"/>
+                <a:cs typeface="Arial"/>
+              </a:rPr>
+              <a:t xml:space="preserve">satisfaction tracks usability instead. The</a:t>
+            </a:r>
+            <a:endParaRPr lang="en-US" sz="1500"/>
+          </a:p>
+          <a:p>
+            <a:pPr marL="0" indent="0">
+              <a:lnSpc>
+                <a:spcPts val="1950"/>
+              </a:lnSpc>
+              <a:spcAft>
+                <a:spcPts val="0"/>
+              </a:spcAft>
+              <a:buNone/>
+            </a:pPr>
+            <a:r>
+              <a:rPr lang="en-US" sz="1500" b="0">
+                <a:solidFill>
+                  <a:srgbClr val="202B33"/>
+                </a:solidFill>
+                <a:latin typeface="Arial"/>
+                <a:ea typeface="Arial"/>
+                <a:cs typeface="Arial"/>
+              </a:rPr>
+              <a:t xml:space="preserve">same person picks the loaded one and then</a:t>
+            </a:r>
+            <a:endParaRPr lang="en-US" sz="1500"/>
           </a:p>
         </p:txBody>
       </p:sp>
       <p:sp>
         <p:nvSpPr>
-          <p:cNvPr id="7" name="Text 7"/>
+          <p:cNvPr id="5" name="Text 5"/>
           <p:cNvSpPr txBox="1"/>
           <p:nvPr/>
         </p:nvSpPr>
         <p:spPr>
           <a:xfrm>
-            <a:off x="5238750" y="4648200"/>
-            <a:ext cx="4362450" cy="2647950"/>
+            <a:off x="5238750" y="1971675"/>
+            <a:ext cx="4362450" cy="5314950"/>
           </a:xfrm>
           <a:prstGeom prst="rect">
             <a:avLst/>
@@ -5755,130 +6233,38 @@
           <a:p>
             <a:pPr marL="0" indent="0">
               <a:lnSpc>
-                <a:spcPts val="1575"/>
-              </a:lnSpc>
-              <a:spcAft>
-                <a:spcPts val="0"/>
-              </a:spcAft>
-              <a:buNone/>
-            </a:pPr>
-            <a:r>
-              <a:rPr lang="en-US" sz="1200" b="0">
-                <a:solidFill>
-                  <a:srgbClr val="202B33"/>
-                </a:solidFill>
-                <a:latin typeface="Arial"/>
-                <a:ea typeface="Arial"/>
-                <a:cs typeface="Arial"/>
-              </a:rPr>
-              <a:t xml:space="preserve">Fifteen percentage points of utilization bought</a:t>
-            </a:r>
-            <a:endParaRPr lang="en-US" sz="1200"/>
-          </a:p>
-          <a:p>
-            <a:pPr marL="0" indent="0">
-              <a:lnSpc>
-                <a:spcPts val="1575"/>
-              </a:lnSpc>
-              <a:spcAft>
-                <a:spcPts val="0"/>
-              </a:spcAft>
-              <a:buNone/>
-            </a:pPr>
-            <a:r>
-              <a:rPr lang="en-US" sz="1200" b="0">
-                <a:solidFill>
-                  <a:srgbClr val="202B33"/>
-                </a:solidFill>
-                <a:latin typeface="Arial"/>
-                <a:ea typeface="Arial"/>
-                <a:cs typeface="Arial"/>
-              </a:rPr>
-              <a:t xml:space="preserve">nearly five times the wait. That is the price of the</a:t>
-            </a:r>
-            <a:endParaRPr lang="en-US" sz="1200"/>
-          </a:p>
-          <a:p>
-            <a:pPr marL="0" indent="0">
-              <a:lnSpc>
-                <a:spcPts val="1575"/>
-              </a:lnSpc>
-              <a:spcAft>
-                <a:spcPts val="0"/>
-              </a:spcAft>
-              <a:buNone/>
-            </a:pPr>
-            <a:r>
-              <a:rPr lang="en-US" sz="1200" b="0">
-                <a:solidFill>
-                  <a:srgbClr val="202B33"/>
-                </a:solidFill>
-                <a:latin typeface="Arial"/>
-                <a:ea typeface="Arial"/>
-                <a:cs typeface="Arial"/>
-              </a:rPr>
-              <a:t xml:space="preserve">last bit of headroom. The multiplier is waiting time</a:t>
-            </a:r>
-            <a:endParaRPr lang="en-US" sz="1200"/>
-          </a:p>
-          <a:p>
-            <a:pPr marL="0" indent="0">
-              <a:lnSpc>
-                <a:spcPts val="1575"/>
-              </a:lnSpc>
-              <a:spcAft>
-                <a:spcPts val="0"/>
-              </a:spcAft>
-              <a:buNone/>
-            </a:pPr>
-            <a:r>
-              <a:rPr lang="en-US" sz="1200" b="0">
-                <a:solidFill>
-                  <a:srgbClr val="202B33"/>
-                </a:solidFill>
-                <a:latin typeface="Arial"/>
-                <a:ea typeface="Arial"/>
-                <a:cs typeface="Arial"/>
-              </a:rPr>
-              <a:t xml:space="preserve">divided by hands-on review time. It does not include</a:t>
-            </a:r>
-            <a:endParaRPr lang="en-US" sz="1200"/>
-          </a:p>
-          <a:p>
-            <a:pPr marL="0" indent="0">
-              <a:lnSpc>
-                <a:spcPts val="1575"/>
-              </a:lnSpc>
-              <a:spcAft>
-                <a:spcPts val="0"/>
-              </a:spcAft>
-              <a:buNone/>
-            </a:pPr>
-            <a:r>
-              <a:rPr lang="en-US" sz="1200" b="0">
-                <a:solidFill>
-                  <a:srgbClr val="202B33"/>
-                </a:solidFill>
-                <a:latin typeface="Arial"/>
-                <a:ea typeface="Arial"/>
-                <a:cs typeface="Arial"/>
-              </a:rPr>
-              <a:t xml:space="preserve">the review itself.</a:t>
-            </a:r>
-            <a:endParaRPr lang="en-US" sz="1200"/>
-          </a:p>
-          <a:p>
-            <a:pPr marL="0" indent="0">
-              <a:lnSpc>
-                <a:spcPts val="1575"/>
-              </a:lnSpc>
-              <a:spcAft>
-                <a:spcPts val="0"/>
-              </a:spcAft>
-              <a:buNone/>
-            </a:pPr>
-            <a:r>
-              <a:rPr lang="en-US" sz="1200" b="0">
+                <a:spcPts val="1950"/>
+              </a:lnSpc>
+              <a:spcAft>
+                <a:spcPts val="0"/>
+              </a:spcAft>
+              <a:buNone/>
+            </a:pPr>
+            <a:r>
+              <a:rPr lang="en-US" sz="1500" b="0">
+                <a:solidFill>
+                  <a:srgbClr val="202B33"/>
+                </a:solidFill>
+                <a:latin typeface="Arial"/>
+                <a:ea typeface="Arial"/>
+                <a:cs typeface="Arial"/>
+              </a:rPr>
+              <a:t xml:space="preserve">resents it.</a:t>
+            </a:r>
+            <a:endParaRPr lang="en-US" sz="1500"/>
+          </a:p>
+          <a:p>
+            <a:pPr marL="0" indent="0">
+              <a:lnSpc>
+                <a:spcPts val="1950"/>
+              </a:lnSpc>
+              <a:spcAft>
+                <a:spcPts val="0"/>
+              </a:spcAft>
+              <a:buNone/>
+            </a:pPr>
+            <a:r>
+              <a:rPr lang="en-US" sz="1500" b="0">
                 <a:solidFill>
                   <a:srgbClr val="202B33"/>
                 </a:solidFill>
@@ -5888,128 +6274,220 @@
               </a:rPr>
               <a:t xml:space="preserve"/>
             </a:r>
-            <a:endParaRPr lang="en-US" sz="1200"/>
-          </a:p>
-          <a:p>
-            <a:pPr marL="0" indent="0">
-              <a:lnSpc>
-                <a:spcPts val="1575"/>
-              </a:lnSpc>
-              <a:spcAft>
-                <a:spcPts val="0"/>
-              </a:spcAft>
-              <a:buNone/>
-            </a:pPr>
-            <a:r>
-              <a:rPr lang="en-US" sz="1200" b="0">
-                <a:solidFill>
-                  <a:srgbClr val="202B33"/>
-                </a:solidFill>
-                <a:latin typeface="Arial"/>
-                <a:ea typeface="Arial"/>
-                <a:cs typeface="Arial"/>
-              </a:rPr>
-              <a:t xml:space="preserve">Little's law gives a separate accounting identity for</a:t>
-            </a:r>
-            <a:endParaRPr lang="en-US" sz="1200"/>
-          </a:p>
-          <a:p>
-            <a:pPr marL="0" indent="0">
-              <a:lnSpc>
-                <a:spcPts val="1575"/>
-              </a:lnSpc>
-              <a:spcAft>
-                <a:spcPts val="0"/>
-              </a:spcAft>
-              <a:buNone/>
-            </a:pPr>
-            <a:r>
-              <a:rPr lang="en-US" sz="1200" b="0">
-                <a:solidFill>
-                  <a:srgbClr val="202B33"/>
-                </a:solidFill>
-                <a:latin typeface="Arial"/>
-                <a:ea typeface="Arial"/>
-                <a:cs typeface="Arial"/>
-              </a:rPr>
-              <a:t xml:space="preserve">a stable system: average work in progress equals</a:t>
-            </a:r>
-            <a:endParaRPr lang="en-US" sz="1200"/>
-          </a:p>
-          <a:p>
-            <a:pPr marL="0" indent="0">
-              <a:lnSpc>
-                <a:spcPts val="1575"/>
-              </a:lnSpc>
-              <a:spcAft>
-                <a:spcPts val="0"/>
-              </a:spcAft>
-              <a:buNone/>
-            </a:pPr>
-            <a:r>
-              <a:rPr lang="en-US" sz="1200" b="0">
-                <a:solidFill>
-                  <a:srgbClr val="202B33"/>
-                </a:solidFill>
-                <a:latin typeface="Arial"/>
-                <a:ea typeface="Arial"/>
-                <a:cs typeface="Arial"/>
-              </a:rPr>
-              <a:t xml:space="preserve">throughput times average time in the system. They</a:t>
-            </a:r>
-            <a:endParaRPr lang="en-US" sz="1200"/>
-          </a:p>
-          <a:p>
-            <a:pPr marL="0" indent="0">
-              <a:lnSpc>
-                <a:spcPts val="1575"/>
-              </a:lnSpc>
-              <a:spcAft>
-                <a:spcPts val="0"/>
-              </a:spcAft>
-              <a:buNone/>
-            </a:pPr>
-            <a:r>
-              <a:rPr lang="en-US" sz="1200" b="0">
-                <a:solidFill>
-                  <a:srgbClr val="202B33"/>
-                </a:solidFill>
-                <a:latin typeface="Arial"/>
-                <a:ea typeface="Arial"/>
-                <a:cs typeface="Arial"/>
-              </a:rPr>
-              <a:t xml:space="preserve">tell us what to measure before claiming the reviewer</a:t>
-            </a:r>
-            <a:endParaRPr lang="en-US" sz="1200"/>
-          </a:p>
-          <a:p>
-            <a:pPr marL="0" indent="0">
-              <a:lnSpc>
-                <a:spcPts val="1575"/>
-              </a:lnSpc>
-              <a:spcAft>
-                <a:spcPts val="0"/>
-              </a:spcAft>
-              <a:buNone/>
-            </a:pPr>
-            <a:r>
-              <a:rPr lang="en-US" sz="1200" b="0">
-                <a:solidFill>
-                  <a:srgbClr val="202B33"/>
-                </a:solidFill>
-                <a:latin typeface="Arial"/>
-                <a:ea typeface="Arial"/>
-                <a:cs typeface="Arial"/>
-              </a:rPr>
-              <a:t xml:space="preserve">just needs to try harder.</a:t>
-            </a:r>
-            <a:endParaRPr lang="en-US" sz="1200"/>
+            <a:endParaRPr lang="en-US" sz="1500"/>
+          </a:p>
+          <a:p>
+            <a:pPr marL="0" indent="0">
+              <a:lnSpc>
+                <a:spcPts val="1950"/>
+              </a:lnSpc>
+              <a:spcAft>
+                <a:spcPts val="0"/>
+              </a:spcAft>
+              <a:buNone/>
+            </a:pPr>
+            <a:r>
+              <a:rPr lang="en-US" sz="1500" b="0">
+                <a:solidFill>
+                  <a:srgbClr val="202B33"/>
+                </a:solidFill>
+                <a:latin typeface="Arial"/>
+                <a:ea typeface="Arial"/>
+                <a:cs typeface="Arial"/>
+              </a:rPr>
+              <a:t xml:space="preserve">That is not a quirk, it is a structural</a:t>
+            </a:r>
+            <a:endParaRPr lang="en-US" sz="1500"/>
+          </a:p>
+          <a:p>
+            <a:pPr marL="0" indent="0">
+              <a:lnSpc>
+                <a:spcPts val="1950"/>
+              </a:lnSpc>
+              <a:spcAft>
+                <a:spcPts val="0"/>
+              </a:spcAft>
+              <a:buNone/>
+            </a:pPr>
+            <a:r>
+              <a:rPr lang="en-US" sz="1500" b="0">
+                <a:solidFill>
+                  <a:srgbClr val="202B33"/>
+                </a:solidFill>
+                <a:latin typeface="Arial"/>
+                <a:ea typeface="Arial"/>
+                <a:cs typeface="Arial"/>
+              </a:rPr>
+              <a:t xml:space="preserve">problem. Your acquisition signal and your</a:t>
+            </a:r>
+            <a:endParaRPr lang="en-US" sz="1500"/>
+          </a:p>
+          <a:p>
+            <a:pPr marL="0" indent="0">
+              <a:lnSpc>
+                <a:spcPts val="1950"/>
+              </a:lnSpc>
+              <a:spcAft>
+                <a:spcPts val="0"/>
+              </a:spcAft>
+              <a:buNone/>
+            </a:pPr>
+            <a:r>
+              <a:rPr lang="en-US" sz="1500" b="0">
+                <a:solidFill>
+                  <a:srgbClr val="202B33"/>
+                </a:solidFill>
+                <a:latin typeface="Arial"/>
+                <a:ea typeface="Arial"/>
+                <a:cs typeface="Arial"/>
+              </a:rPr>
+              <a:t xml:space="preserve">retention signal point in opposite</a:t>
+            </a:r>
+            <a:endParaRPr lang="en-US" sz="1500"/>
+          </a:p>
+          <a:p>
+            <a:pPr marL="0" indent="0">
+              <a:lnSpc>
+                <a:spcPts val="1950"/>
+              </a:lnSpc>
+              <a:spcAft>
+                <a:spcPts val="0"/>
+              </a:spcAft>
+              <a:buNone/>
+            </a:pPr>
+            <a:r>
+              <a:rPr lang="en-US" sz="1500" b="0">
+                <a:solidFill>
+                  <a:srgbClr val="202B33"/>
+                </a:solidFill>
+                <a:latin typeface="Arial"/>
+                <a:ea typeface="Arial"/>
+                <a:cs typeface="Arial"/>
+              </a:rPr>
+              <a:t xml:space="preserve">directions, and the feature list is exactly</a:t>
+            </a:r>
+            <a:endParaRPr lang="en-US" sz="1500"/>
+          </a:p>
+          <a:p>
+            <a:pPr marL="0" indent="0">
+              <a:lnSpc>
+                <a:spcPts val="1950"/>
+              </a:lnSpc>
+              <a:spcAft>
+                <a:spcPts val="0"/>
+              </a:spcAft>
+              <a:buNone/>
+            </a:pPr>
+            <a:r>
+              <a:rPr lang="en-US" sz="1500" b="0">
+                <a:solidFill>
+                  <a:srgbClr val="202B33"/>
+                </a:solidFill>
+                <a:latin typeface="Arial"/>
+                <a:ea typeface="Arial"/>
+                <a:cs typeface="Arial"/>
+              </a:rPr>
+              <a:t xml:space="preserve">where they diverge. Adding capability makes</a:t>
+            </a:r>
+            <a:endParaRPr lang="en-US" sz="1500"/>
+          </a:p>
+          <a:p>
+            <a:pPr marL="0" indent="0">
+              <a:lnSpc>
+                <a:spcPts val="1950"/>
+              </a:lnSpc>
+              <a:spcAft>
+                <a:spcPts val="0"/>
+              </a:spcAft>
+              <a:buNone/>
+            </a:pPr>
+            <a:r>
+              <a:rPr lang="en-US" sz="1500" b="0">
+                <a:solidFill>
+                  <a:srgbClr val="202B33"/>
+                </a:solidFill>
+                <a:latin typeface="Arial"/>
+                <a:ea typeface="Arial"/>
+                <a:cs typeface="Arial"/>
+              </a:rPr>
+              <a:t xml:space="preserve">the sale and costs the renewal. Both</a:t>
+            </a:r>
+            <a:endParaRPr lang="en-US" sz="1500"/>
+          </a:p>
+          <a:p>
+            <a:pPr marL="0" indent="0">
+              <a:lnSpc>
+                <a:spcPts val="1950"/>
+              </a:lnSpc>
+              <a:spcAft>
+                <a:spcPts val="0"/>
+              </a:spcAft>
+              <a:buNone/>
+            </a:pPr>
+            <a:r>
+              <a:rPr lang="en-US" sz="1500" b="0">
+                <a:solidFill>
+                  <a:srgbClr val="202B33"/>
+                </a:solidFill>
+                <a:latin typeface="Arial"/>
+                <a:ea typeface="Arial"/>
+                <a:cs typeface="Arial"/>
+              </a:rPr>
+              <a:t xml:space="preserve">effects are real and they arrive at</a:t>
+            </a:r>
+            <a:endParaRPr lang="en-US" sz="1500"/>
+          </a:p>
+          <a:p>
+            <a:pPr marL="0" indent="0">
+              <a:lnSpc>
+                <a:spcPts val="1950"/>
+              </a:lnSpc>
+              <a:spcAft>
+                <a:spcPts val="0"/>
+              </a:spcAft>
+              <a:buNone/>
+            </a:pPr>
+            <a:r>
+              <a:rPr lang="en-US" sz="1500" b="0">
+                <a:solidFill>
+                  <a:srgbClr val="202B33"/>
+                </a:solidFill>
+                <a:latin typeface="Arial"/>
+                <a:ea typeface="Arial"/>
+                <a:cs typeface="Arial"/>
+              </a:rPr>
+              <a:t xml:space="preserve">different times, which is why no single</a:t>
+            </a:r>
+            <a:endParaRPr lang="en-US" sz="1500"/>
+          </a:p>
+          <a:p>
+            <a:pPr marL="0" indent="0">
+              <a:lnSpc>
+                <a:spcPts val="1950"/>
+              </a:lnSpc>
+              <a:spcAft>
+                <a:spcPts val="0"/>
+              </a:spcAft>
+              <a:buNone/>
+            </a:pPr>
+            <a:r>
+              <a:rPr lang="en-US" sz="1500" b="0">
+                <a:solidFill>
+                  <a:srgbClr val="202B33"/>
+                </a:solidFill>
+                <a:latin typeface="Arial"/>
+                <a:ea typeface="Arial"/>
+                <a:cs typeface="Arial"/>
+              </a:rPr>
+              <a:t xml:space="preserve">dashboard shows you the trade.</a:t>
+            </a:r>
+            <a:endParaRPr lang="en-US" sz="1500"/>
           </a:p>
         </p:txBody>
       </p:sp>
       <p:sp>
         <p:nvSpPr>
-          <p:cNvPr id="8" name="Text 8"/>
+          <p:cNvPr id="6" name="Text 6"/>
           <p:cNvSpPr txBox="1"/>
           <p:nvPr/>
         </p:nvSpPr>
@@ -6050,7 +6528,7 @@
                 <a:ea typeface="Arial"/>
                 <a:cs typeface="Arial"/>
               </a:rPr>
-              <a:t xml:space="preserve">Code Is Cheap. Judgment Is Expensive.</a:t>
+              <a:t xml:space="preserve">Turn Your Thinkin' Tokens Up to 11</a:t>
             </a:r>
             <a:endParaRPr lang="en-US" sz="975"/>
           </a:p>
@@ -6058,7 +6536,7 @@
       </p:sp>
       <p:sp>
         <p:nvSpPr>
-          <p:cNvPr id="9" name="Text 9"/>
+          <p:cNvPr id="7" name="Text 7"/>
           <p:cNvSpPr txBox="1"/>
           <p:nvPr/>
         </p:nvSpPr>
@@ -6181,7 +6659,7 @@
                 <a:ea typeface="Arial"/>
                 <a:cs typeface="Arial"/>
               </a:rPr>
-              <a:t xml:space="preserve">03 / 07    SOURCE SLIDE 6</a:t>
+              <a:t xml:space="preserve">03 / 07    SOURCE SLIDE 5</a:t>
             </a:r>
             <a:endParaRPr lang="en-US" sz="1050"/>
           </a:p>
@@ -6230,7 +6708,7 @@
                 <a:ea typeface="Arial"/>
                 <a:cs typeface="Arial"/>
               </a:rPr>
-              <a:t xml:space="preserve">"Add enterprise permissions"</a:t>
+              <a:t xml:space="preserve">A change is a loss before it is a gain</a:t>
             </a:r>
             <a:endParaRPr lang="en-US" sz="2550"/>
           </a:p>
@@ -6279,7 +6757,7 @@
                 <a:ea typeface="Arial"/>
                 <a:cs typeface="Arial"/>
               </a:rPr>
-              <a:t xml:space="preserve">Who can do what, in which tenant?</a:t>
+              <a:t xml:space="preserve">Status quo bias · endowment effect</a:t>
             </a:r>
             <a:endParaRPr lang="en-US" sz="1500"/>
           </a:p>
@@ -6325,7 +6803,7 @@
                 <a:ea typeface="Arial"/>
                 <a:cs typeface="Arial"/>
               </a:rPr>
-              <a:t xml:space="preserve">What happens when access changes?</a:t>
+              <a:t xml:space="preserve">Recognition, not recall</a:t>
             </a:r>
             <a:endParaRPr lang="en-US" sz="1500"/>
           </a:p>
@@ -6371,7 +6849,30 @@
                 <a:ea typeface="Arial"/>
                 <a:cs typeface="Arial"/>
               </a:rPr>
-              <a:t xml:space="preserve">What must never happen?</a:t>
+              <a:t xml:space="preserve">The gain is yours. The loss is theirs,</a:t>
+            </a:r>
+            <a:endParaRPr lang="en-US" sz="1500"/>
+          </a:p>
+          <a:p>
+            <a:pPr marL="0" indent="0">
+              <a:lnSpc>
+                <a:spcPts val="1950"/>
+              </a:lnSpc>
+              <a:spcAft>
+                <a:spcPts val="0"/>
+              </a:spcAft>
+              <a:buNone/>
+            </a:pPr>
+            <a:r>
+              <a:rPr lang="en-US" sz="1500" b="0">
+                <a:solidFill>
+                  <a:srgbClr val="202B33"/>
+                </a:solidFill>
+                <a:latin typeface="Arial"/>
+                <a:ea typeface="Arial"/>
+                <a:cs typeface="Arial"/>
+              </a:rPr>
+              <a:t xml:space="preserve">today.</a:t>
             </a:r>
             <a:endParaRPr lang="en-US" sz="1500"/>
           </a:p>
@@ -6417,99 +6918,76 @@
                 <a:ea typeface="Arial"/>
                 <a:cs typeface="Arial"/>
               </a:rPr>
-              <a:t xml:space="preserve">Add enterprise permissions. That is the</a:t>
-            </a:r>
-            <a:endParaRPr lang="en-US" sz="1500"/>
-          </a:p>
-          <a:p>
-            <a:pPr marL="0" indent="0">
-              <a:lnSpc>
-                <a:spcPts val="1950"/>
-              </a:lnSpc>
-              <a:spcAft>
-                <a:spcPts val="0"/>
-              </a:spcAft>
-              <a:buNone/>
-            </a:pPr>
-            <a:r>
-              <a:rPr lang="en-US" sz="1500" b="0">
-                <a:solidFill>
-                  <a:srgbClr val="202B33"/>
-                </a:solidFill>
-                <a:latin typeface="Arial"/>
-                <a:ea typeface="Arial"/>
-                <a:cs typeface="Arial"/>
-              </a:rPr>
-              <a:t xml:space="preserve">entire request.</a:t>
-            </a:r>
-            <a:endParaRPr lang="en-US" sz="1500"/>
-          </a:p>
-          <a:p>
-            <a:pPr marL="0" indent="0">
-              <a:lnSpc>
-                <a:spcPts val="1950"/>
-              </a:lnSpc>
-              <a:spcAft>
-                <a:spcPts val="0"/>
-              </a:spcAft>
-              <a:buNone/>
-            </a:pPr>
-            <a:r>
-              <a:rPr lang="en-US" sz="1500" b="0">
-                <a:solidFill>
-                  <a:srgbClr val="202B33"/>
-                </a:solidFill>
-                <a:latin typeface="Arial"/>
-                <a:ea typeface="Arial"/>
-                <a:cs typeface="Arial"/>
-              </a:rPr>
-              <a:t xml:space="preserve"/>
-            </a:r>
-            <a:endParaRPr lang="en-US" sz="1500"/>
-          </a:p>
-          <a:p>
-            <a:pPr marL="0" indent="0">
-              <a:lnSpc>
-                <a:spcPts val="1950"/>
-              </a:lnSpc>
-              <a:spcAft>
-                <a:spcPts val="0"/>
-              </a:spcAft>
-              <a:buNone/>
-            </a:pPr>
-            <a:r>
-              <a:rPr lang="en-US" sz="1500" b="0">
-                <a:solidFill>
-                  <a:srgbClr val="202B33"/>
-                </a:solidFill>
-                <a:latin typeface="Arial"/>
-                <a:ea typeface="Arial"/>
-                <a:cs typeface="Arial"/>
-              </a:rPr>
-              <a:t xml:space="preserve">Who can grant a role? Does it apply to one</a:t>
-            </a:r>
-            <a:endParaRPr lang="en-US" sz="1500"/>
-          </a:p>
-          <a:p>
-            <a:pPr marL="0" indent="0">
-              <a:lnSpc>
-                <a:spcPts val="1950"/>
-              </a:lnSpc>
-              <a:spcAft>
-                <a:spcPts val="0"/>
-              </a:spcAft>
-              <a:buNone/>
-            </a:pPr>
-            <a:r>
-              <a:rPr lang="en-US" sz="1500" b="0">
-                <a:solidFill>
-                  <a:srgbClr val="202B33"/>
-                </a:solidFill>
-                <a:latin typeface="Arial"/>
-                <a:ea typeface="Arial"/>
-                <a:cs typeface="Arial"/>
-              </a:rPr>
-              <a:t xml:space="preserve">tenant or every tenant? What happens to an</a:t>
+              <a:t xml:space="preserve">Samuelson and Zeckhauser named status quo</a:t>
+            </a:r>
+            <a:endParaRPr lang="en-US" sz="1500"/>
+          </a:p>
+          <a:p>
+            <a:pPr marL="0" indent="0">
+              <a:lnSpc>
+                <a:spcPts val="1950"/>
+              </a:lnSpc>
+              <a:spcAft>
+                <a:spcPts val="0"/>
+              </a:spcAft>
+              <a:buNone/>
+            </a:pPr>
+            <a:r>
+              <a:rPr lang="en-US" sz="1500" b="0">
+                <a:solidFill>
+                  <a:srgbClr val="202B33"/>
+                </a:solidFill>
+                <a:latin typeface="Arial"/>
+                <a:ea typeface="Arial"/>
+                <a:cs typeface="Arial"/>
+              </a:rPr>
+              <a:t xml:space="preserve">bias in 1988: across lab and field</a:t>
+            </a:r>
+            <a:endParaRPr lang="en-US" sz="1500"/>
+          </a:p>
+          <a:p>
+            <a:pPr marL="0" indent="0">
+              <a:lnSpc>
+                <a:spcPts val="1950"/>
+              </a:lnSpc>
+              <a:spcAft>
+                <a:spcPts val="0"/>
+              </a:spcAft>
+              <a:buNone/>
+            </a:pPr>
+            <a:r>
+              <a:rPr lang="en-US" sz="1500" b="0">
+                <a:solidFill>
+                  <a:srgbClr val="202B33"/>
+                </a:solidFill>
+                <a:latin typeface="Arial"/>
+                <a:ea typeface="Arial"/>
+                <a:cs typeface="Arial"/>
+              </a:rPr>
+              <a:t xml:space="preserve">decisions, people over-select the option</a:t>
+            </a:r>
+            <a:endParaRPr lang="en-US" sz="1500"/>
+          </a:p>
+          <a:p>
+            <a:pPr marL="0" indent="0">
+              <a:lnSpc>
+                <a:spcPts val="1950"/>
+              </a:lnSpc>
+              <a:spcAft>
+                <a:spcPts val="0"/>
+              </a:spcAft>
+              <a:buNone/>
+            </a:pPr>
+            <a:r>
+              <a:rPr lang="en-US" sz="1500" b="0">
+                <a:solidFill>
+                  <a:srgbClr val="202B33"/>
+                </a:solidFill>
+                <a:latin typeface="Arial"/>
+                <a:ea typeface="Arial"/>
+                <a:cs typeface="Arial"/>
+              </a:rPr>
+              <a:t xml:space="preserve">they already hold. Kahneman, Knetsch and</a:t>
             </a:r>
             <a:endParaRPr lang="en-US" sz="1500"/>
           </a:p>
@@ -6558,99 +7036,76 @@
                 <a:ea typeface="Arial"/>
                 <a:cs typeface="Arial"/>
               </a:rPr>
-              <a:t xml:space="preserve">existing session after revocation? What</a:t>
-            </a:r>
-            <a:endParaRPr lang="en-US" sz="1500"/>
-          </a:p>
-          <a:p>
-            <a:pPr marL="0" indent="0">
-              <a:lnSpc>
-                <a:spcPts val="1950"/>
-              </a:lnSpc>
-              <a:spcAft>
-                <a:spcPts val="0"/>
-              </a:spcAft>
-              <a:buNone/>
-            </a:pPr>
-            <a:r>
-              <a:rPr lang="en-US" sz="1500" b="0">
-                <a:solidFill>
-                  <a:srgbClr val="202B33"/>
-                </a:solidFill>
-                <a:latin typeface="Arial"/>
-                <a:ea typeface="Arial"/>
-                <a:cs typeface="Arial"/>
-              </a:rPr>
-              <a:t xml:space="preserve">does the audit record need to show? There</a:t>
-            </a:r>
-            <a:endParaRPr lang="en-US" sz="1500"/>
-          </a:p>
-          <a:p>
-            <a:pPr marL="0" indent="0">
-              <a:lnSpc>
-                <a:spcPts val="1950"/>
-              </a:lnSpc>
-              <a:spcAft>
-                <a:spcPts val="0"/>
-              </a:spcAft>
-              <a:buNone/>
-            </a:pPr>
-            <a:r>
-              <a:rPr lang="en-US" sz="1500" b="0">
-                <a:solidFill>
-                  <a:srgbClr val="202B33"/>
-                </a:solidFill>
-                <a:latin typeface="Arial"/>
-                <a:ea typeface="Arial"/>
-                <a:cs typeface="Arial"/>
-              </a:rPr>
-              <a:t xml:space="preserve">are several plausible implementations, and</a:t>
-            </a:r>
-            <a:endParaRPr lang="en-US" sz="1500"/>
-          </a:p>
-          <a:p>
-            <a:pPr marL="0" indent="0">
-              <a:lnSpc>
-                <a:spcPts val="1950"/>
-              </a:lnSpc>
-              <a:spcAft>
-                <a:spcPts val="0"/>
-              </a:spcAft>
-              <a:buNone/>
-            </a:pPr>
-            <a:r>
-              <a:rPr lang="en-US" sz="1500" b="0">
-                <a:solidFill>
-                  <a:srgbClr val="202B33"/>
-                </a:solidFill>
-                <a:latin typeface="Arial"/>
-                <a:ea typeface="Arial"/>
-                <a:cs typeface="Arial"/>
-              </a:rPr>
-              <a:t xml:space="preserve">most disagree about behavior the ticket</a:t>
-            </a:r>
-            <a:endParaRPr lang="en-US" sz="1500"/>
-          </a:p>
-          <a:p>
-            <a:pPr marL="0" indent="0">
-              <a:lnSpc>
-                <a:spcPts val="1950"/>
-              </a:lnSpc>
-              <a:spcAft>
-                <a:spcPts val="0"/>
-              </a:spcAft>
-              <a:buNone/>
-            </a:pPr>
-            <a:r>
-              <a:rPr lang="en-US" sz="1500" b="0">
-                <a:solidFill>
-                  <a:srgbClr val="202B33"/>
-                </a:solidFill>
-                <a:latin typeface="Arial"/>
-                <a:ea typeface="Arial"/>
-                <a:cs typeface="Arial"/>
-              </a:rPr>
-              <a:t xml:space="preserve">never specified.</a:t>
+              <a:t xml:space="preserve">Thaler measured the endowment effect the</a:t>
+            </a:r>
+            <a:endParaRPr lang="en-US" sz="1500"/>
+          </a:p>
+          <a:p>
+            <a:pPr marL="0" indent="0">
+              <a:lnSpc>
+                <a:spcPts val="1950"/>
+              </a:lnSpc>
+              <a:spcAft>
+                <a:spcPts val="0"/>
+              </a:spcAft>
+              <a:buNone/>
+            </a:pPr>
+            <a:r>
+              <a:rPr lang="en-US" sz="1500" b="0">
+                <a:solidFill>
+                  <a:srgbClr val="202B33"/>
+                </a:solidFill>
+                <a:latin typeface="Arial"/>
+                <a:ea typeface="Arial"/>
+                <a:cs typeface="Arial"/>
+              </a:rPr>
+              <a:t xml:space="preserve">same way — you want more for the mug once</a:t>
+            </a:r>
+            <a:endParaRPr lang="en-US" sz="1500"/>
+          </a:p>
+          <a:p>
+            <a:pPr marL="0" indent="0">
+              <a:lnSpc>
+                <a:spcPts val="1950"/>
+              </a:lnSpc>
+              <a:spcAft>
+                <a:spcPts val="0"/>
+              </a:spcAft>
+              <a:buNone/>
+            </a:pPr>
+            <a:r>
+              <a:rPr lang="en-US" sz="1500" b="0">
+                <a:solidFill>
+                  <a:srgbClr val="202B33"/>
+                </a:solidFill>
+                <a:latin typeface="Arial"/>
+                <a:ea typeface="Arial"/>
+                <a:cs typeface="Arial"/>
+              </a:rPr>
+              <a:t xml:space="preserve">it is yours. Your user owns a workflow, and</a:t>
+            </a:r>
+            <a:endParaRPr lang="en-US" sz="1500"/>
+          </a:p>
+          <a:p>
+            <a:pPr marL="0" indent="0">
+              <a:lnSpc>
+                <a:spcPts val="1950"/>
+              </a:lnSpc>
+              <a:spcAft>
+                <a:spcPts val="0"/>
+              </a:spcAft>
+              <a:buNone/>
+            </a:pPr>
+            <a:r>
+              <a:rPr lang="en-US" sz="1500" b="0">
+                <a:solidFill>
+                  <a:srgbClr val="202B33"/>
+                </a:solidFill>
+                <a:latin typeface="Arial"/>
+                <a:ea typeface="Arial"/>
+                <a:cs typeface="Arial"/>
+              </a:rPr>
+              <a:t xml:space="preserve">you are proposing to take it.</a:t>
             </a:r>
             <a:endParaRPr lang="en-US" sz="1500"/>
           </a:p>
@@ -6696,76 +7151,122 @@
                 <a:ea typeface="Arial"/>
                 <a:cs typeface="Arial"/>
               </a:rPr>
-              <a:t xml:space="preserve">We made code cheap and left the question</a:t>
-            </a:r>
-            <a:endParaRPr lang="en-US" sz="1500"/>
-          </a:p>
-          <a:p>
-            <a:pPr marL="0" indent="0">
-              <a:lnSpc>
-                <a:spcPts val="1950"/>
-              </a:lnSpc>
-              <a:spcAft>
-                <a:spcPts val="0"/>
-              </a:spcAft>
-              <a:buNone/>
-            </a:pPr>
-            <a:r>
-              <a:rPr lang="en-US" sz="1500" b="0">
-                <a:solidFill>
-                  <a:srgbClr val="202B33"/>
-                </a:solidFill>
-                <a:latin typeface="Arial"/>
-                <a:ea typeface="Arial"/>
-                <a:cs typeface="Arial"/>
-              </a:rPr>
-              <a:t xml:space="preserve">expensive. Writing down the answer is part</a:t>
-            </a:r>
-            <a:endParaRPr lang="en-US" sz="1500"/>
-          </a:p>
-          <a:p>
-            <a:pPr marL="0" indent="0">
-              <a:lnSpc>
-                <a:spcPts val="1950"/>
-              </a:lnSpc>
-              <a:spcAft>
-                <a:spcPts val="0"/>
-              </a:spcAft>
-              <a:buNone/>
-            </a:pPr>
-            <a:r>
-              <a:rPr lang="en-US" sz="1500" b="0">
-                <a:solidFill>
-                  <a:srgbClr val="202B33"/>
-                </a:solidFill>
-                <a:latin typeface="Arial"/>
-                <a:ea typeface="Arial"/>
-                <a:cs typeface="Arial"/>
-              </a:rPr>
-              <a:t xml:space="preserve">of implementation. It just happens before</a:t>
-            </a:r>
-            <a:endParaRPr lang="en-US" sz="1500"/>
-          </a:p>
-          <a:p>
-            <a:pPr marL="0" indent="0">
-              <a:lnSpc>
-                <a:spcPts val="1950"/>
-              </a:lnSpc>
-              <a:spcAft>
-                <a:spcPts val="0"/>
-              </a:spcAft>
-              <a:buNone/>
-            </a:pPr>
-            <a:r>
-              <a:rPr lang="en-US" sz="1500" b="0">
-                <a:solidFill>
-                  <a:srgbClr val="202B33"/>
-                </a:solidFill>
-                <a:latin typeface="Arial"/>
-                <a:ea typeface="Arial"/>
-                <a:cs typeface="Arial"/>
-              </a:rPr>
-              <a:t xml:space="preserve">the diff.</a:t>
+              <a:t xml:space="preserve">The gain from a redesign is real, and it</a:t>
+            </a:r>
+            <a:endParaRPr lang="en-US" sz="1500"/>
+          </a:p>
+          <a:p>
+            <a:pPr marL="0" indent="0">
+              <a:lnSpc>
+                <a:spcPts val="1950"/>
+              </a:lnSpc>
+              <a:spcAft>
+                <a:spcPts val="0"/>
+              </a:spcAft>
+              <a:buNone/>
+            </a:pPr>
+            <a:r>
+              <a:rPr lang="en-US" sz="1500" b="0">
+                <a:solidFill>
+                  <a:srgbClr val="202B33"/>
+                </a:solidFill>
+                <a:latin typeface="Arial"/>
+                <a:ea typeface="Arial"/>
+                <a:cs typeface="Arial"/>
+              </a:rPr>
+              <a:t xml:space="preserve">arrives later, spread thin. The loss is</a:t>
+            </a:r>
+            <a:endParaRPr lang="en-US" sz="1500"/>
+          </a:p>
+          <a:p>
+            <a:pPr marL="0" indent="0">
+              <a:lnSpc>
+                <a:spcPts val="1950"/>
+              </a:lnSpc>
+              <a:spcAft>
+                <a:spcPts val="0"/>
+              </a:spcAft>
+              <a:buNone/>
+            </a:pPr>
+            <a:r>
+              <a:rPr lang="en-US" sz="1500" b="0">
+                <a:solidFill>
+                  <a:srgbClr val="202B33"/>
+                </a:solidFill>
+                <a:latin typeface="Arial"/>
+                <a:ea typeface="Arial"/>
+                <a:cs typeface="Arial"/>
+              </a:rPr>
+              <a:t xml:space="preserve">small, specific and arrives on first login.</a:t>
+            </a:r>
+            <a:endParaRPr lang="en-US" sz="1500"/>
+          </a:p>
+          <a:p>
+            <a:pPr marL="0" indent="0">
+              <a:lnSpc>
+                <a:spcPts val="1950"/>
+              </a:lnSpc>
+              <a:spcAft>
+                <a:spcPts val="0"/>
+              </a:spcAft>
+              <a:buNone/>
+            </a:pPr>
+            <a:r>
+              <a:rPr lang="en-US" sz="1500" b="0">
+                <a:solidFill>
+                  <a:srgbClr val="202B33"/>
+                </a:solidFill>
+                <a:latin typeface="Arial"/>
+                <a:ea typeface="Arial"/>
+                <a:cs typeface="Arial"/>
+              </a:rPr>
+              <a:t xml:space="preserve">Individually every change was an</a:t>
+            </a:r>
+            <a:endParaRPr lang="en-US" sz="1500"/>
+          </a:p>
+          <a:p>
+            <a:pPr marL="0" indent="0">
+              <a:lnSpc>
+                <a:spcPts val="1950"/>
+              </a:lnSpc>
+              <a:spcAft>
+                <a:spcPts val="0"/>
+              </a:spcAft>
+              <a:buNone/>
+            </a:pPr>
+            <a:r>
+              <a:rPr lang="en-US" sz="1500" b="0">
+                <a:solidFill>
+                  <a:srgbClr val="202B33"/>
+                </a:solidFill>
+                <a:latin typeface="Arial"/>
+                <a:ea typeface="Arial"/>
+                <a:cs typeface="Arial"/>
+              </a:rPr>
+              <a:t xml:space="preserve">improvement. In aggregate, at your cadence,</a:t>
+            </a:r>
+            <a:endParaRPr lang="en-US" sz="1500"/>
+          </a:p>
+          <a:p>
+            <a:pPr marL="0" indent="0">
+              <a:lnSpc>
+                <a:spcPts val="1950"/>
+              </a:lnSpc>
+              <a:spcAft>
+                <a:spcPts val="0"/>
+              </a:spcAft>
+              <a:buNone/>
+            </a:pPr>
+            <a:r>
+              <a:rPr lang="en-US" sz="1500" b="0">
+                <a:solidFill>
+                  <a:srgbClr val="202B33"/>
+                </a:solidFill>
+                <a:latin typeface="Arial"/>
+                <a:ea typeface="Arial"/>
+                <a:cs typeface="Arial"/>
+              </a:rPr>
+              <a:t xml:space="preserve">it reads as instability.</a:t>
             </a:r>
             <a:endParaRPr lang="en-US" sz="1500"/>
           </a:p>
@@ -6814,7 +7315,7 @@
                 <a:ea typeface="Arial"/>
                 <a:cs typeface="Arial"/>
               </a:rPr>
-              <a:t xml:space="preserve">Code Is Cheap. Judgment Is Expensive.</a:t>
+              <a:t xml:space="preserve">Turn Your Thinkin' Tokens Up to 11</a:t>
             </a:r>
             <a:endParaRPr lang="en-US" sz="975"/>
           </a:p>
@@ -6945,7 +7446,7 @@
                 <a:ea typeface="Arial"/>
                 <a:cs typeface="Arial"/>
               </a:rPr>
-              <a:t xml:space="preserve">04 / 07    SOURCE SLIDE 7</a:t>
+              <a:t xml:space="preserve">04 / 07    SOURCE SLIDE 8</a:t>
             </a:r>
             <a:endParaRPr lang="en-US" sz="1050"/>
           </a:p>
@@ -6994,7 +7495,7 @@
                 <a:ea typeface="Arial"/>
                 <a:cs typeface="Arial"/>
               </a:rPr>
-              <a:t xml:space="preserve">A spec reduces variance</a:t>
+              <a:t xml:space="preserve">Turn the tokens up</a:t>
             </a:r>
             <a:endParaRPr lang="en-US" sz="2550"/>
           </a:p>
@@ -7043,7 +7544,7 @@
                 <a:ea typeface="Arial"/>
                 <a:cs typeface="Arial"/>
               </a:rPr>
-              <a:t xml:space="preserve">Actor + tenant + action + resource</a:t>
+              <a:t xml:space="preserve">6 features · 3 cohorts → 524,880 plans</a:t>
             </a:r>
             <a:endParaRPr lang="en-US" sz="1500"/>
           </a:p>
@@ -7089,7 +7590,7 @@
                 <a:ea typeface="Arial"/>
                 <a:cs typeface="Arial"/>
               </a:rPr>
-              <a:t xml:space="preserve">Revocation changes the next decision</a:t>
+              <a:t xml:space="preserve">12,000 weekly actives · 4 weeks → 16 arms</a:t>
             </a:r>
             <a:endParaRPr lang="en-US" sz="1500"/>
           </a:p>
@@ -7135,7 +7636,7 @@
                 <a:ea typeface="Arial"/>
                 <a:cs typeface="Arial"/>
               </a:rPr>
-              <a:t xml:space="preserve">Denied actions leave state unchanged</a:t>
+              <a:t xml:space="preserve">32,805 plans per arm of evidence</a:t>
             </a:r>
             <a:endParaRPr lang="en-US" sz="1500"/>
           </a:p>
@@ -7181,122 +7682,145 @@
                 <a:ea typeface="Arial"/>
                 <a:cs typeface="Arial"/>
               </a:rPr>
-              <a:t xml:space="preserve">For this example, an administrator can</a:t>
-            </a:r>
-            <a:endParaRPr lang="en-US" sz="1500"/>
-          </a:p>
-          <a:p>
-            <a:pPr marL="0" indent="0">
-              <a:lnSpc>
-                <a:spcPts val="1950"/>
-              </a:lnSpc>
-              <a:spcAft>
-                <a:spcPts val="0"/>
-              </a:spcAft>
-              <a:buNone/>
-            </a:pPr>
-            <a:r>
-              <a:rPr lang="en-US" sz="1500" b="0">
-                <a:solidFill>
-                  <a:srgbClr val="202B33"/>
-                </a:solidFill>
-                <a:latin typeface="Arial"/>
-                <a:ea typeface="Arial"/>
-                <a:cs typeface="Arial"/>
-              </a:rPr>
-              <a:t xml:space="preserve">grant a role only inside the tenant they</a:t>
-            </a:r>
-            <a:endParaRPr lang="en-US" sz="1500"/>
-          </a:p>
-          <a:p>
-            <a:pPr marL="0" indent="0">
-              <a:lnSpc>
-                <a:spcPts val="1950"/>
-              </a:lnSpc>
-              <a:spcAft>
-                <a:spcPts val="0"/>
-              </a:spcAft>
-              <a:buNone/>
-            </a:pPr>
-            <a:r>
-              <a:rPr lang="en-US" sz="1500" b="0">
-                <a:solidFill>
-                  <a:srgbClr val="202B33"/>
-                </a:solidFill>
-                <a:latin typeface="Arial"/>
-                <a:ea typeface="Arial"/>
-                <a:cs typeface="Arial"/>
-              </a:rPr>
-              <a:t xml:space="preserve">administer. A revoked role cannot authorize</a:t>
-            </a:r>
-            <a:endParaRPr lang="en-US" sz="1500"/>
-          </a:p>
-          <a:p>
-            <a:pPr marL="0" indent="0">
-              <a:lnSpc>
-                <a:spcPts val="1950"/>
-              </a:lnSpc>
-              <a:spcAft>
-                <a:spcPts val="0"/>
-              </a:spcAft>
-              <a:buNone/>
-            </a:pPr>
-            <a:r>
-              <a:rPr lang="en-US" sz="1500" b="0">
-                <a:solidFill>
-                  <a:srgbClr val="202B33"/>
-                </a:solidFill>
-                <a:latin typeface="Arial"/>
-                <a:ea typeface="Arial"/>
-                <a:cs typeface="Arial"/>
-              </a:rPr>
-              <a:t xml:space="preserve">the next operation. A denied change leaves</a:t>
-            </a:r>
-            <a:endParaRPr lang="en-US" sz="1500"/>
-          </a:p>
-          <a:p>
-            <a:pPr marL="0" indent="0">
-              <a:lnSpc>
-                <a:spcPts val="1950"/>
-              </a:lnSpc>
-              <a:spcAft>
-                <a:spcPts val="0"/>
-              </a:spcAft>
-              <a:buNone/>
-            </a:pPr>
-            <a:r>
-              <a:rPr lang="en-US" sz="1500" b="0">
-                <a:solidFill>
-                  <a:srgbClr val="202B33"/>
-                </a:solidFill>
-                <a:latin typeface="Arial"/>
-                <a:ea typeface="Arial"/>
-                <a:cs typeface="Arial"/>
-              </a:rPr>
-              <a:t xml:space="preserve">protected state untouched and records the</a:t>
-            </a:r>
-            <a:endParaRPr lang="en-US" sz="1500"/>
-          </a:p>
-          <a:p>
-            <a:pPr marL="0" indent="0">
-              <a:lnSpc>
-                <a:spcPts val="1950"/>
-              </a:lnSpc>
-              <a:spcAft>
-                <a:spcPts val="0"/>
-              </a:spcAft>
-              <a:buNone/>
-            </a:pPr>
-            <a:r>
-              <a:rPr lang="en-US" sz="1500" b="0">
-                <a:solidFill>
-                  <a:srgbClr val="202B33"/>
-                </a:solidFill>
-                <a:latin typeface="Arial"/>
-                <a:ea typeface="Arial"/>
-                <a:cs typeface="Arial"/>
-              </a:rPr>
-              <a:t xml:space="preserve">failed attempt.</a:t>
+              <a:t xml:space="preserve">Six features. Order them: seven hundred and</a:t>
+            </a:r>
+            <a:endParaRPr lang="en-US" sz="1500"/>
+          </a:p>
+          <a:p>
+            <a:pPr marL="0" indent="0">
+              <a:lnSpc>
+                <a:spcPts val="1950"/>
+              </a:lnSpc>
+              <a:spcAft>
+                <a:spcPts val="0"/>
+              </a:spcAft>
+              <a:buNone/>
+            </a:pPr>
+            <a:r>
+              <a:rPr lang="en-US" sz="1500" b="0">
+                <a:solidFill>
+                  <a:srgbClr val="202B33"/>
+                </a:solidFill>
+                <a:latin typeface="Arial"/>
+                <a:ea typeface="Arial"/>
+                <a:cs typeface="Arial"/>
+              </a:rPr>
+              <a:t xml:space="preserve">twenty sequences. Assign each to one of</a:t>
+            </a:r>
+            <a:endParaRPr lang="en-US" sz="1500"/>
+          </a:p>
+          <a:p>
+            <a:pPr marL="0" indent="0">
+              <a:lnSpc>
+                <a:spcPts val="1950"/>
+              </a:lnSpc>
+              <a:spcAft>
+                <a:spcPts val="0"/>
+              </a:spcAft>
+              <a:buNone/>
+            </a:pPr>
+            <a:r>
+              <a:rPr lang="en-US" sz="1500" b="0">
+                <a:solidFill>
+                  <a:srgbClr val="202B33"/>
+                </a:solidFill>
+                <a:latin typeface="Arial"/>
+                <a:ea typeface="Arial"/>
+                <a:cs typeface="Arial"/>
+              </a:rPr>
+              <a:t xml:space="preserve">three cohorts: three to the sixth, seven</a:t>
+            </a:r>
+            <a:endParaRPr lang="en-US" sz="1500"/>
+          </a:p>
+          <a:p>
+            <a:pPr marL="0" indent="0">
+              <a:lnSpc>
+                <a:spcPts val="1950"/>
+              </a:lnSpc>
+              <a:spcAft>
+                <a:spcPts val="0"/>
+              </a:spcAft>
+              <a:buNone/>
+            </a:pPr>
+            <a:r>
+              <a:rPr lang="en-US" sz="1500" b="0">
+                <a:solidFill>
+                  <a:srgbClr val="202B33"/>
+                </a:solidFill>
+                <a:latin typeface="Arial"/>
+                <a:ea typeface="Arial"/>
+                <a:cs typeface="Arial"/>
+              </a:rPr>
+              <a:t xml:space="preserve">hundred and twenty-nine. Multiply. Five</a:t>
+            </a:r>
+            <a:endParaRPr lang="en-US" sz="1500"/>
+          </a:p>
+          <a:p>
+            <a:pPr marL="0" indent="0">
+              <a:lnSpc>
+                <a:spcPts val="1950"/>
+              </a:lnSpc>
+              <a:spcAft>
+                <a:spcPts val="0"/>
+              </a:spcAft>
+              <a:buNone/>
+            </a:pPr>
+            <a:r>
+              <a:rPr lang="en-US" sz="1500" b="0">
+                <a:solidFill>
+                  <a:srgbClr val="202B33"/>
+                </a:solidFill>
+                <a:latin typeface="Arial"/>
+                <a:ea typeface="Arial"/>
+                <a:cs typeface="Arial"/>
+              </a:rPr>
+              <a:t xml:space="preserve">hundred and twenty-four thousand, eight</a:t>
+            </a:r>
+            <a:endParaRPr lang="en-US" sz="1500"/>
+          </a:p>
+          <a:p>
+            <a:pPr marL="0" indent="0">
+              <a:lnSpc>
+                <a:spcPts val="1950"/>
+              </a:lnSpc>
+              <a:spcAft>
+                <a:spcPts val="0"/>
+              </a:spcAft>
+              <a:buNone/>
+            </a:pPr>
+            <a:r>
+              <a:rPr lang="en-US" sz="1500" b="0">
+                <a:solidFill>
+                  <a:srgbClr val="202B33"/>
+                </a:solidFill>
+                <a:latin typeface="Arial"/>
+                <a:ea typeface="Arial"/>
+                <a:cs typeface="Arial"/>
+              </a:rPr>
+              <a:t xml:space="preserve">hundred and eighty distinct plans, and that</a:t>
+            </a:r>
+            <a:endParaRPr lang="en-US" sz="1500"/>
+          </a:p>
+          <a:p>
+            <a:pPr marL="0" indent="0">
+              <a:lnSpc>
+                <a:spcPts val="1950"/>
+              </a:lnSpc>
+              <a:spcAft>
+                <a:spcPts val="0"/>
+              </a:spcAft>
+              <a:buNone/>
+            </a:pPr>
+            <a:r>
+              <a:rPr lang="en-US" sz="1500" b="0">
+                <a:solidFill>
+                  <a:srgbClr val="202B33"/>
+                </a:solidFill>
+                <a:latin typeface="Arial"/>
+                <a:ea typeface="Arial"/>
+                <a:cs typeface="Arial"/>
+              </a:rPr>
+              <a:t xml:space="preserve">is before batching and before dates.</a:t>
             </a:r>
             <a:endParaRPr lang="en-US" sz="1500"/>
           </a:p>
@@ -7320,6 +7844,144 @@
                 <a:cs typeface="Arial"/>
               </a:rPr>
               <a:t xml:space="preserve"/>
+            </a:r>
+            <a:endParaRPr lang="en-US" sz="1500"/>
+          </a:p>
+          <a:p>
+            <a:pPr marL="0" indent="0">
+              <a:lnSpc>
+                <a:spcPts val="1950"/>
+              </a:lnSpc>
+              <a:spcAft>
+                <a:spcPts val="0"/>
+              </a:spcAft>
+              <a:buNone/>
+            </a:pPr>
+            <a:r>
+              <a:rPr lang="en-US" sz="1500" b="0">
+                <a:solidFill>
+                  <a:srgbClr val="202B33"/>
+                </a:solidFill>
+                <a:latin typeface="Arial"/>
+                <a:ea typeface="Arial"/>
+                <a:cs typeface="Arial"/>
+              </a:rPr>
+              <a:t xml:space="preserve">Now the evidence you can buy. Twelve</a:t>
+            </a:r>
+            <a:endParaRPr lang="en-US" sz="1500"/>
+          </a:p>
+          <a:p>
+            <a:pPr marL="0" indent="0">
+              <a:lnSpc>
+                <a:spcPts val="1950"/>
+              </a:lnSpc>
+              <a:spcAft>
+                <a:spcPts val="0"/>
+              </a:spcAft>
+              <a:buNone/>
+            </a:pPr>
+            <a:r>
+              <a:rPr lang="en-US" sz="1500" b="0">
+                <a:solidFill>
+                  <a:srgbClr val="202B33"/>
+                </a:solidFill>
+                <a:latin typeface="Arial"/>
+                <a:ea typeface="Arial"/>
+                <a:cs typeface="Arial"/>
+              </a:rPr>
+              <a:t xml:space="preserve">thousand weekly actives, a four-week</a:t>
+            </a:r>
+            <a:endParaRPr lang="en-US" sz="1500"/>
+          </a:p>
+          <a:p>
+            <a:pPr marL="0" indent="0">
+              <a:lnSpc>
+                <a:spcPts val="1950"/>
+              </a:lnSpc>
+              <a:spcAft>
+                <a:spcPts val="0"/>
+              </a:spcAft>
+              <a:buNone/>
+            </a:pPr>
+            <a:r>
+              <a:rPr lang="en-US" sz="1500" b="0">
+                <a:solidFill>
+                  <a:srgbClr val="202B33"/>
+                </a:solidFill>
+                <a:latin typeface="Arial"/>
+                <a:ea typeface="Arial"/>
+                <a:cs typeface="Arial"/>
+              </a:rPr>
+              <a:t xml:space="preserve">window, forty-eight thousand exposures. At</a:t>
+            </a:r>
+            <a:endParaRPr lang="en-US" sz="1500"/>
+          </a:p>
+          <a:p>
+            <a:pPr marL="0" indent="0">
+              <a:lnSpc>
+                <a:spcPts val="1950"/>
+              </a:lnSpc>
+              <a:spcAft>
+                <a:spcPts val="0"/>
+              </a:spcAft>
+              <a:buNone/>
+            </a:pPr>
+            <a:r>
+              <a:rPr lang="en-US" sz="1500" b="0">
+                <a:solidFill>
+                  <a:srgbClr val="202B33"/>
+                </a:solidFill>
+                <a:latin typeface="Arial"/>
+                <a:ea typeface="Arial"/>
+                <a:cs typeface="Arial"/>
+              </a:rPr>
+              <a:t xml:space="preserve">an eight percent baseline, detecting a</a:t>
+            </a:r>
+            <a:endParaRPr lang="en-US" sz="1500"/>
+          </a:p>
+          <a:p>
+            <a:pPr marL="0" indent="0">
+              <a:lnSpc>
+                <a:spcPts val="1950"/>
+              </a:lnSpc>
+              <a:spcAft>
+                <a:spcPts val="0"/>
+              </a:spcAft>
+              <a:buNone/>
+            </a:pPr>
+            <a:r>
+              <a:rPr lang="en-US" sz="1500" b="0">
+                <a:solidFill>
+                  <a:srgbClr val="202B33"/>
+                </a:solidFill>
+                <a:latin typeface="Arial"/>
+                <a:ea typeface="Arial"/>
+                <a:cs typeface="Arial"/>
+              </a:rPr>
+              <a:t xml:space="preserve">two-point lift needs roughly three thousand</a:t>
+            </a:r>
+            <a:endParaRPr lang="en-US" sz="1500"/>
+          </a:p>
+          <a:p>
+            <a:pPr marL="0" indent="0">
+              <a:lnSpc>
+                <a:spcPts val="1950"/>
+              </a:lnSpc>
+              <a:spcAft>
+                <a:spcPts val="0"/>
+              </a:spcAft>
+              <a:buNone/>
+            </a:pPr>
+            <a:r>
+              <a:rPr lang="en-US" sz="1500" b="0">
+                <a:solidFill>
+                  <a:srgbClr val="202B33"/>
+                </a:solidFill>
+                <a:latin typeface="Arial"/>
+                <a:ea typeface="Arial"/>
+                <a:cs typeface="Arial"/>
+              </a:rPr>
+              <a:t xml:space="preserve">per arm, so sixteen arms. Divide:</a:t>
             </a:r>
             <a:endParaRPr lang="en-US" sz="1500"/>
           </a:p>
@@ -7368,122 +8030,76 @@
                 <a:ea typeface="Arial"/>
                 <a:cs typeface="Arial"/>
               </a:rPr>
-              <a:t xml:space="preserve">Those statements produce cases. An admin in</a:t>
-            </a:r>
-            <a:endParaRPr lang="en-US" sz="1500"/>
-          </a:p>
-          <a:p>
-            <a:pPr marL="0" indent="0">
-              <a:lnSpc>
-                <a:spcPts val="1950"/>
-              </a:lnSpc>
-              <a:spcAft>
-                <a:spcPts val="0"/>
-              </a:spcAft>
-              <a:buNone/>
-            </a:pPr>
-            <a:r>
-              <a:rPr lang="en-US" sz="1500" b="0">
-                <a:solidFill>
-                  <a:srgbClr val="202B33"/>
-                </a:solidFill>
-                <a:latin typeface="Arial"/>
-                <a:ea typeface="Arial"/>
-                <a:cs typeface="Arial"/>
-              </a:rPr>
-              <a:t xml:space="preserve">tenant A requests a change in A: allow. The</a:t>
-            </a:r>
-            <a:endParaRPr lang="en-US" sz="1500"/>
-          </a:p>
-          <a:p>
-            <a:pPr marL="0" indent="0">
-              <a:lnSpc>
-                <a:spcPts val="1950"/>
-              </a:lnSpc>
-              <a:spcAft>
-                <a:spcPts val="0"/>
-              </a:spcAft>
-              <a:buNone/>
-            </a:pPr>
-            <a:r>
-              <a:rPr lang="en-US" sz="1500" b="0">
-                <a:solidFill>
-                  <a:srgbClr val="202B33"/>
-                </a:solidFill>
-                <a:latin typeface="Arial"/>
-                <a:ea typeface="Arial"/>
-                <a:cs typeface="Arial"/>
-              </a:rPr>
-              <a:t xml:space="preserve">same admin requests a change in B: deny.</a:t>
-            </a:r>
-            <a:endParaRPr lang="en-US" sz="1500"/>
-          </a:p>
-          <a:p>
-            <a:pPr marL="0" indent="0">
-              <a:lnSpc>
-                <a:spcPts val="1950"/>
-              </a:lnSpc>
-              <a:spcAft>
-                <a:spcPts val="0"/>
-              </a:spcAft>
-              <a:buNone/>
-            </a:pPr>
-            <a:r>
-              <a:rPr lang="en-US" sz="1500" b="0">
-                <a:solidFill>
-                  <a:srgbClr val="202B33"/>
-                </a:solidFill>
-                <a:latin typeface="Arial"/>
-                <a:ea typeface="Arial"/>
-                <a:cs typeface="Arial"/>
-              </a:rPr>
-              <a:t xml:space="preserve">Revoke the role, repeat the A request:</a:t>
-            </a:r>
-            <a:endParaRPr lang="en-US" sz="1500"/>
-          </a:p>
-          <a:p>
-            <a:pPr marL="0" indent="0">
-              <a:lnSpc>
-                <a:spcPts val="1950"/>
-              </a:lnSpc>
-              <a:spcAft>
-                <a:spcPts val="0"/>
-              </a:spcAft>
-              <a:buNone/>
-            </a:pPr>
-            <a:r>
-              <a:rPr lang="en-US" sz="1500" b="0">
-                <a:solidFill>
-                  <a:srgbClr val="202B33"/>
-                </a:solidFill>
-                <a:latin typeface="Arial"/>
-                <a:ea typeface="Arial"/>
-                <a:cs typeface="Arial"/>
-              </a:rPr>
-              <a:t xml:space="preserve">deny. Check the resulting state, not just</a:t>
-            </a:r>
-            <a:endParaRPr lang="en-US" sz="1500"/>
-          </a:p>
-          <a:p>
-            <a:pPr marL="0" indent="0">
-              <a:lnSpc>
-                <a:spcPts val="1950"/>
-              </a:lnSpc>
-              <a:spcAft>
-                <a:spcPts val="0"/>
-              </a:spcAft>
-              <a:buNone/>
-            </a:pPr>
-            <a:r>
-              <a:rPr lang="en-US" sz="1500" b="0">
-                <a:solidFill>
-                  <a:srgbClr val="202B33"/>
-                </a:solidFill>
-                <a:latin typeface="Arial"/>
-                <a:ea typeface="Arial"/>
-                <a:cs typeface="Arial"/>
-              </a:rPr>
-              <a:t xml:space="preserve">the status message.</a:t>
+              <a:t xml:space="preserve">thirty-two thousand, eight hundred and five</a:t>
+            </a:r>
+            <a:endParaRPr lang="en-US" sz="1500"/>
+          </a:p>
+          <a:p>
+            <a:pPr marL="0" indent="0">
+              <a:lnSpc>
+                <a:spcPts val="1950"/>
+              </a:lnSpc>
+              <a:spcAft>
+                <a:spcPts val="0"/>
+              </a:spcAft>
+              <a:buNone/>
+            </a:pPr>
+            <a:r>
+              <a:rPr lang="en-US" sz="1500" b="0">
+                <a:solidFill>
+                  <a:srgbClr val="202B33"/>
+                </a:solidFill>
+                <a:latin typeface="Arial"/>
+                <a:ea typeface="Arial"/>
+                <a:cs typeface="Arial"/>
+              </a:rPr>
+              <a:t xml:space="preserve">plans for every arm of evidence you can</a:t>
+            </a:r>
+            <a:endParaRPr lang="en-US" sz="1500"/>
+          </a:p>
+          <a:p>
+            <a:pPr marL="0" indent="0">
+              <a:lnSpc>
+                <a:spcPts val="1950"/>
+              </a:lnSpc>
+              <a:spcAft>
+                <a:spcPts val="0"/>
+              </a:spcAft>
+              <a:buNone/>
+            </a:pPr>
+            <a:r>
+              <a:rPr lang="en-US" sz="1500" b="0">
+                <a:solidFill>
+                  <a:srgbClr val="202B33"/>
+                </a:solidFill>
+                <a:latin typeface="Arial"/>
+                <a:ea typeface="Arial"/>
+                <a:cs typeface="Arial"/>
+              </a:rPr>
+              <a:t xml:space="preserve">afford. Benchmarks owns the power</a:t>
+            </a:r>
+            <a:endParaRPr lang="en-US" sz="1500"/>
+          </a:p>
+          <a:p>
+            <a:pPr marL="0" indent="0">
+              <a:lnSpc>
+                <a:spcPts val="1950"/>
+              </a:lnSpc>
+              <a:spcAft>
+                <a:spcPts val="0"/>
+              </a:spcAft>
+              <a:buNone/>
+            </a:pPr>
+            <a:r>
+              <a:rPr lang="en-US" sz="1500" b="0">
+                <a:solidFill>
+                  <a:srgbClr val="202B33"/>
+                </a:solidFill>
+                <a:latin typeface="Arial"/>
+                <a:ea typeface="Arial"/>
+                <a:cs typeface="Arial"/>
+              </a:rPr>
+              <a:t xml:space="preserve">arithmetic; here I only need the count.</a:t>
             </a:r>
             <a:endParaRPr lang="en-US" sz="1500"/>
           </a:p>
@@ -7529,122 +8145,306 @@
                 <a:ea typeface="Arial"/>
                 <a:cs typeface="Arial"/>
               </a:rPr>
-              <a:t xml:space="preserve">Tie this back to the curve. Clear</a:t>
-            </a:r>
-            <a:endParaRPr lang="en-US" sz="1500"/>
-          </a:p>
-          <a:p>
-            <a:pPr marL="0" indent="0">
-              <a:lnSpc>
-                <a:spcPts val="1950"/>
-              </a:lnSpc>
-              <a:spcAft>
-                <a:spcPts val="0"/>
-              </a:spcAft>
-              <a:buNone/>
-            </a:pPr>
-            <a:r>
-              <a:rPr lang="en-US" sz="1500" b="0">
-                <a:solidFill>
-                  <a:srgbClr val="202B33"/>
-                </a:solidFill>
-                <a:latin typeface="Arial"/>
-                <a:ea typeface="Arial"/>
-                <a:cs typeface="Arial"/>
-              </a:rPr>
-              <a:t xml:space="preserve">boundaries reduce the number of</a:t>
-            </a:r>
-            <a:endParaRPr lang="en-US" sz="1500"/>
-          </a:p>
-          <a:p>
-            <a:pPr marL="0" indent="0">
-              <a:lnSpc>
-                <a:spcPts val="1950"/>
-              </a:lnSpc>
-              <a:spcAft>
-                <a:spcPts val="0"/>
-              </a:spcAft>
-              <a:buNone/>
-            </a:pPr>
-            <a:r>
-              <a:rPr lang="en-US" sz="1500" b="0">
-                <a:solidFill>
-                  <a:srgbClr val="202B33"/>
-                </a:solidFill>
-                <a:latin typeface="Arial"/>
-                <a:ea typeface="Arial"/>
-                <a:cs typeface="Arial"/>
-              </a:rPr>
-              <a:t xml:space="preserve">interpretations arriving at review. Bounded</a:t>
-            </a:r>
-            <a:endParaRPr lang="en-US" sz="1500"/>
-          </a:p>
-          <a:p>
-            <a:pPr marL="0" indent="0">
-              <a:lnSpc>
-                <a:spcPts val="1950"/>
-              </a:lnSpc>
-              <a:spcAft>
-                <a:spcPts val="0"/>
-              </a:spcAft>
-              <a:buNone/>
-            </a:pPr>
-            <a:r>
-              <a:rPr lang="en-US" sz="1500" b="0">
-                <a:solidFill>
-                  <a:srgbClr val="202B33"/>
-                </a:solidFill>
-                <a:latin typeface="Arial"/>
-                <a:ea typeface="Arial"/>
-                <a:cs typeface="Arial"/>
-              </a:rPr>
-              <a:t xml:space="preserve">diffs reduce the amount of code a reviewer</a:t>
-            </a:r>
-            <a:endParaRPr lang="en-US" sz="1500"/>
-          </a:p>
-          <a:p>
-            <a:pPr marL="0" indent="0">
-              <a:lnSpc>
-                <a:spcPts val="1950"/>
-              </a:lnSpc>
-              <a:spcAft>
-                <a:spcPts val="0"/>
-              </a:spcAft>
-              <a:buNone/>
-            </a:pPr>
-            <a:r>
-              <a:rPr lang="en-US" sz="1500" b="0">
-                <a:solidFill>
-                  <a:srgbClr val="202B33"/>
-                </a:solidFill>
-                <a:latin typeface="Arial"/>
-                <a:ea typeface="Arial"/>
-                <a:cs typeface="Arial"/>
-              </a:rPr>
-              <a:t xml:space="preserve">has to reconstruct at once. That is the</a:t>
-            </a:r>
-            <a:endParaRPr lang="en-US" sz="1500"/>
-          </a:p>
-          <a:p>
-            <a:pPr marL="0" indent="0">
-              <a:lnSpc>
-                <a:spcPts val="1950"/>
-              </a:lnSpc>
-              <a:spcAft>
-                <a:spcPts val="0"/>
-              </a:spcAft>
-              <a:buNone/>
-            </a:pPr>
-            <a:r>
-              <a:rPr lang="en-US" sz="1500" b="0">
-                <a:solidFill>
-                  <a:srgbClr val="202B33"/>
-                </a:solidFill>
-                <a:latin typeface="Arial"/>
-                <a:ea typeface="Arial"/>
-                <a:cs typeface="Arial"/>
-              </a:rPr>
-              <a:t xml:space="preserve">variance term. On purpose.</a:t>
+              <a:t xml:space="preserve">So turn the thinkin' tokens up. Chollet's</a:t>
+            </a:r>
+            <a:endParaRPr lang="en-US" sz="1500"/>
+          </a:p>
+          <a:p>
+            <a:pPr marL="0" indent="0">
+              <a:lnSpc>
+                <a:spcPts val="1950"/>
+              </a:lnSpc>
+              <a:spcAft>
+                <a:spcPts val="0"/>
+              </a:spcAft>
+              <a:buNone/>
+            </a:pPr>
+            <a:r>
+              <a:rPr lang="en-US" sz="1500" b="0">
+                <a:solidFill>
+                  <a:srgbClr val="202B33"/>
+                </a:solidFill>
+                <a:latin typeface="Arial"/>
+                <a:ea typeface="Arial"/>
+                <a:cs typeface="Arial"/>
+              </a:rPr>
+              <a:t xml:space="preserve">2019 definition treats intelligence as</a:t>
+            </a:r>
+            <a:endParaRPr lang="en-US" sz="1500"/>
+          </a:p>
+          <a:p>
+            <a:pPr marL="0" indent="0">
+              <a:lnSpc>
+                <a:spcPts val="1950"/>
+              </a:lnSpc>
+              <a:spcAft>
+                <a:spcPts val="0"/>
+              </a:spcAft>
+              <a:buNone/>
+            </a:pPr>
+            <a:r>
+              <a:rPr lang="en-US" sz="1500" b="0">
+                <a:solidFill>
+                  <a:srgbClr val="202B33"/>
+                </a:solidFill>
+                <a:latin typeface="Arial"/>
+                <a:ea typeface="Arial"/>
+                <a:cs typeface="Arial"/>
+              </a:rPr>
+              <a:t xml:space="preserve">skill acquisition over novel tasks, and a</a:t>
+            </a:r>
+            <a:endParaRPr lang="en-US" sz="1500"/>
+          </a:p>
+          <a:p>
+            <a:pPr marL="0" indent="0">
+              <a:lnSpc>
+                <a:spcPts val="1950"/>
+              </a:lnSpc>
+              <a:spcAft>
+                <a:spcPts val="0"/>
+              </a:spcAft>
+              <a:buNone/>
+            </a:pPr>
+            <a:r>
+              <a:rPr lang="en-US" sz="1500" b="0">
+                <a:solidFill>
+                  <a:srgbClr val="202B33"/>
+                </a:solidFill>
+                <a:latin typeface="Arial"/>
+                <a:ea typeface="Arial"/>
+                <a:cs typeface="Arial"/>
+              </a:rPr>
+              <a:t xml:space="preserve">system that has already seen the situation</a:t>
+            </a:r>
+            <a:endParaRPr lang="en-US" sz="1500"/>
+          </a:p>
+          <a:p>
+            <a:pPr marL="0" indent="0">
+              <a:lnSpc>
+                <a:spcPts val="1950"/>
+              </a:lnSpc>
+              <a:spcAft>
+                <a:spcPts val="0"/>
+              </a:spcAft>
+              <a:buNone/>
+            </a:pPr>
+            <a:r>
+              <a:rPr lang="en-US" sz="1500" b="0">
+                <a:solidFill>
+                  <a:srgbClr val="202B33"/>
+                </a:solidFill>
+                <a:latin typeface="Arial"/>
+                <a:ea typeface="Arial"/>
+                <a:cs typeface="Arial"/>
+              </a:rPr>
+              <a:t xml:space="preserve">is not demonstrating that. Your product's</a:t>
+            </a:r>
+            <a:endParaRPr lang="en-US" sz="1500"/>
+          </a:p>
+          <a:p>
+            <a:pPr marL="0" indent="0">
+              <a:lnSpc>
+                <a:spcPts val="1950"/>
+              </a:lnSpc>
+              <a:spcAft>
+                <a:spcPts val="0"/>
+              </a:spcAft>
+              <a:buNone/>
+            </a:pPr>
+            <a:r>
+              <a:rPr lang="en-US" sz="1500" b="0">
+                <a:solidFill>
+                  <a:srgbClr val="202B33"/>
+                </a:solidFill>
+                <a:latin typeface="Arial"/>
+                <a:ea typeface="Arial"/>
+                <a:cs typeface="Arial"/>
+              </a:rPr>
+              <a:t xml:space="preserve">next six months is a task nobody has seen,</a:t>
+            </a:r>
+            <a:endParaRPr lang="en-US" sz="1500"/>
+          </a:p>
+          <a:p>
+            <a:pPr marL="0" indent="0">
+              <a:lnSpc>
+                <a:spcPts val="1950"/>
+              </a:lnSpc>
+              <a:spcAft>
+                <a:spcPts val="0"/>
+              </a:spcAft>
+              <a:buNone/>
+            </a:pPr>
+            <a:r>
+              <a:rPr lang="en-US" sz="1500" b="0">
+                <a:solidFill>
+                  <a:srgbClr val="202B33"/>
+                </a:solidFill>
+                <a:latin typeface="Arial"/>
+                <a:ea typeface="Arial"/>
+                <a:cs typeface="Arial"/>
+              </a:rPr>
+              <a:t xml:space="preserve">including you.</a:t>
+            </a:r>
+            <a:endParaRPr lang="en-US" sz="1500"/>
+          </a:p>
+          <a:p>
+            <a:pPr marL="0" indent="0">
+              <a:lnSpc>
+                <a:spcPts val="1950"/>
+              </a:lnSpc>
+              <a:spcAft>
+                <a:spcPts val="0"/>
+              </a:spcAft>
+              <a:buNone/>
+            </a:pPr>
+            <a:r>
+              <a:rPr lang="en-US" sz="1500" b="0">
+                <a:solidFill>
+                  <a:srgbClr val="202B33"/>
+                </a:solidFill>
+                <a:latin typeface="Arial"/>
+                <a:ea typeface="Arial"/>
+                <a:cs typeface="Arial"/>
+              </a:rPr>
+              <a:t xml:space="preserve"/>
+            </a:r>
+            <a:endParaRPr lang="en-US" sz="1500"/>
+          </a:p>
+          <a:p>
+            <a:pPr marL="0" indent="0">
+              <a:lnSpc>
+                <a:spcPts val="1950"/>
+              </a:lnSpc>
+              <a:spcAft>
+                <a:spcPts val="0"/>
+              </a:spcAft>
+              <a:buNone/>
+            </a:pPr>
+            <a:r>
+              <a:rPr lang="en-US" sz="1500" b="0">
+                <a:solidFill>
+                  <a:srgbClr val="202B33"/>
+                </a:solidFill>
+                <a:latin typeface="Arial"/>
+                <a:ea typeface="Arial"/>
+                <a:cs typeface="Arial"/>
+              </a:rPr>
+              <a:t xml:space="preserve">My claim is weaker and safer. The model has</a:t>
+            </a:r>
+            <a:endParaRPr lang="en-US" sz="1500"/>
+          </a:p>
+          <a:p>
+            <a:pPr marL="0" indent="0">
+              <a:lnSpc>
+                <a:spcPts val="1950"/>
+              </a:lnSpc>
+              <a:spcAft>
+                <a:spcPts val="0"/>
+              </a:spcAft>
+              <a:buNone/>
+            </a:pPr>
+            <a:r>
+              <a:rPr lang="en-US" sz="1500" b="0">
+                <a:solidFill>
+                  <a:srgbClr val="202B33"/>
+                </a:solidFill>
+                <a:latin typeface="Arial"/>
+                <a:ea typeface="Arial"/>
+                <a:cs typeface="Arial"/>
+              </a:rPr>
+              <a:t xml:space="preserve">not met your users. More tokens do not fix</a:t>
+            </a:r>
+            <a:endParaRPr lang="en-US" sz="1500"/>
+          </a:p>
+          <a:p>
+            <a:pPr marL="0" indent="0">
+              <a:lnSpc>
+                <a:spcPts val="1950"/>
+              </a:lnSpc>
+              <a:spcAft>
+                <a:spcPts val="0"/>
+              </a:spcAft>
+              <a:buNone/>
+            </a:pPr>
+            <a:r>
+              <a:rPr lang="en-US" sz="1500" b="0">
+                <a:solidFill>
+                  <a:srgbClr val="202B33"/>
+                </a:solidFill>
+                <a:latin typeface="Arial"/>
+                <a:ea typeface="Arial"/>
+                <a:cs typeface="Arial"/>
+              </a:rPr>
+              <a:t xml:space="preserve">that, and neither does more of you, because</a:t>
+            </a:r>
+            <a:endParaRPr lang="en-US" sz="1500"/>
+          </a:p>
+          <a:p>
+            <a:pPr marL="0" indent="0">
+              <a:lnSpc>
+                <a:spcPts val="1950"/>
+              </a:lnSpc>
+              <a:spcAft>
+                <a:spcPts val="0"/>
+              </a:spcAft>
+              <a:buNone/>
+            </a:pPr>
+            <a:r>
+              <a:rPr lang="en-US" sz="1500" b="0">
+                <a:solidFill>
+                  <a:srgbClr val="202B33"/>
+                </a:solidFill>
+                <a:latin typeface="Arial"/>
+                <a:ea typeface="Arial"/>
+                <a:cs typeface="Arial"/>
+              </a:rPr>
+              <a:t xml:space="preserve">your judgment is biased too. The difference</a:t>
+            </a:r>
+            <a:endParaRPr lang="en-US" sz="1500"/>
+          </a:p>
+          <a:p>
+            <a:pPr marL="0" indent="0">
+              <a:lnSpc>
+                <a:spcPts val="1950"/>
+              </a:lnSpc>
+              <a:spcAft>
+                <a:spcPts val="0"/>
+              </a:spcAft>
+              <a:buNone/>
+            </a:pPr>
+            <a:r>
+              <a:rPr lang="en-US" sz="1500" b="0">
+                <a:solidFill>
+                  <a:srgbClr val="202B33"/>
+                </a:solidFill>
+                <a:latin typeface="Arial"/>
+                <a:ea typeface="Arial"/>
+                <a:cs typeface="Arial"/>
+              </a:rPr>
+              <a:t xml:space="preserve">is that you can write your prediction down</a:t>
+            </a:r>
+            <a:endParaRPr lang="en-US" sz="1500"/>
+          </a:p>
+          <a:p>
+            <a:pPr marL="0" indent="0">
+              <a:lnSpc>
+                <a:spcPts val="1950"/>
+              </a:lnSpc>
+              <a:spcAft>
+                <a:spcPts val="0"/>
+              </a:spcAft>
+              <a:buNone/>
+            </a:pPr>
+            <a:r>
+              <a:rPr lang="en-US" sz="1500" b="0">
+                <a:solidFill>
+                  <a:srgbClr val="202B33"/>
+                </a:solidFill>
+                <a:latin typeface="Arial"/>
+                <a:ea typeface="Arial"/>
+                <a:cs typeface="Arial"/>
+              </a:rPr>
+              <a:t xml:space="preserve">before the release and check it afterward.</a:t>
             </a:r>
             <a:endParaRPr lang="en-US" sz="1500"/>
           </a:p>
@@ -7693,7 +8493,7 @@
                 <a:ea typeface="Arial"/>
                 <a:cs typeface="Arial"/>
               </a:rPr>
-              <a:t xml:space="preserve">Code Is Cheap. Judgment Is Expensive.</a:t>
+              <a:t xml:space="preserve">Turn Your Thinkin' Tokens Up to 11</a:t>
             </a:r>
             <a:endParaRPr lang="en-US" sz="975"/>
           </a:p>
@@ -7824,7 +8624,7 @@
                 <a:ea typeface="Arial"/>
                 <a:cs typeface="Arial"/>
               </a:rPr>
-              <a:t xml:space="preserve">05 / 07    SOURCE SLIDE 9</a:t>
+              <a:t xml:space="preserve">05 / 07    SOURCE SLIDE 10</a:t>
             </a:r>
             <a:endParaRPr lang="en-US" sz="1050"/>
           </a:p>
@@ -7873,7 +8673,7 @@
                 <a:ea typeface="Arial"/>
                 <a:cs typeface="Arial"/>
               </a:rPr>
-              <a:t xml:space="preserve">Demo: the rubber stamp</a:t>
+              <a:t xml:space="preserve">Prediction: the version picker</a:t>
             </a:r>
             <a:endParaRPr lang="en-US" sz="2550"/>
           </a:p>
@@ -7881,14 +8681,69 @@
       </p:sp>
       <p:sp>
         <p:nvSpPr>
-          <p:cNvPr id="4" name="Text 4"/>
+          <p:cNvPr id="4" name="Image background"/>
+          <p:cNvSpPr/>
+          <p:nvPr/>
+        </p:nvSpPr>
+        <p:spPr>
+          <a:xfrm>
+            <a:off x="1554480" y="1781175"/>
+            <a:ext cx="6949440" cy="2714625"/>
+          </a:xfrm>
+          <a:prstGeom prst="rect">
+            <a:avLst/>
+          </a:prstGeom>
+          <a:solidFill>
+            <a:srgbClr val="161D26"/>
+          </a:solidFill>
+          <a:ln>
+            <a:noFill/>
+          </a:ln>
+        </p:spPr>
+      </p:sp>
+      <p:pic>
+        <p:nvPicPr>
+          <p:cNvPr id="5" name="237341e722f69667f7c423de1199c47784318efda85e9448d97e24c6015db4c6" descr="A settings panel where version sits beside theme and language"/>
+          <p:cNvPicPr>
+            <a:picLocks noChangeAspect="1"/>
+          </p:cNvPicPr>
+          <p:nvPr/>
+        </p:nvPicPr>
+        <p:blipFill>
+          <a:blip r:embed="rIdImage1">
+            <a:extLst>
+              <a:ext uri="{96DAC541-7B7A-43D3-8B79-37D633B846F1}">
+                <asvg:svgBlip xmlns:asvg="http://schemas.microsoft.com/office/drawing/2016/SVG/main" r:embed="rIdSvg1"/>
+              </a:ext>
+            </a:extLst>
+          </a:blip>
+          <a:stretch>
+            <a:fillRect/>
+          </a:stretch>
+        </p:blipFill>
+        <p:spPr>
+          <a:xfrm>
+            <a:off x="1554480" y="1781175"/>
+            <a:ext cx="6949440" cy="2714625"/>
+          </a:xfrm>
+          <a:prstGeom prst="rect">
+            <a:avLst/>
+          </a:prstGeom>
+          <a:ln>
+            <a:noFill/>
+          </a:ln>
+        </p:spPr>
+      </p:pic>
+      <p:sp>
+        <p:nvSpPr>
+          <p:cNvPr id="6" name="Text 6"/>
           <p:cNvSpPr txBox="1"/>
           <p:nvPr/>
         </p:nvSpPr>
         <p:spPr>
           <a:xfrm>
-            <a:off x="457200" y="1971675"/>
-            <a:ext cx="4352925" cy="5314950"/>
+            <a:off x="457200" y="4648200"/>
+            <a:ext cx="4352925" cy="2647950"/>
           </a:xfrm>
           <a:prstGeom prst="rect">
             <a:avLst/>
@@ -7906,61 +8761,38 @@
           <a:p>
             <a:pPr marL="0" indent="0">
               <a:lnSpc>
-                <a:spcPts val="1950"/>
-              </a:lnSpc>
-              <a:spcAft>
-                <a:spcPts val="0"/>
-              </a:spcAft>
-              <a:buNone/>
-            </a:pPr>
-            <a:r>
-              <a:rPr lang="en-US" sz="1500" b="0">
-                <a:solidFill>
-                  <a:srgbClr val="202B33"/>
-                </a:solidFill>
-                <a:latin typeface="Arial"/>
-                <a:ea typeface="Arial"/>
-                <a:cs typeface="Arial"/>
-              </a:rPr>
-              <a:t xml:space="preserve">canEdit(user, resourceTenant) =</a:t>
-            </a:r>
-            <a:endParaRPr lang="en-US" sz="1500"/>
-          </a:p>
-          <a:p>
-            <a:pPr marL="0" indent="0">
-              <a:lnSpc>
-                <a:spcPts val="1950"/>
-              </a:lnSpc>
-              <a:spcAft>
-                <a:spcPts val="0"/>
-              </a:spcAft>
-              <a:buNone/>
-            </a:pPr>
-            <a:r>
-              <a:rPr lang="en-US" sz="1500" b="0">
-                <a:solidFill>
-                  <a:srgbClr val="202B33"/>
-                </a:solidFill>
-                <a:latin typeface="Arial"/>
-                <a:ea typeface="Arial"/>
-                <a:cs typeface="Arial"/>
-              </a:rPr>
-              <a:t xml:space="preserve">user.roles.includes("admin")</a:t>
-            </a:r>
-            <a:endParaRPr lang="en-US" sz="1500"/>
-          </a:p>
-          <a:p>
-            <a:pPr marL="0" indent="0">
-              <a:lnSpc>
-                <a:spcPts val="1950"/>
-              </a:lnSpc>
-              <a:spcAft>
-                <a:spcPts val="0"/>
-              </a:spcAft>
-              <a:buNone/>
-            </a:pPr>
-            <a:r>
-              <a:rPr lang="en-US" sz="1500" b="0">
+                <a:spcPts val="1575"/>
+              </a:lnSpc>
+              <a:spcAft>
+                <a:spcPts val="0"/>
+              </a:spcAft>
+              <a:buNone/>
+            </a:pPr>
+            <a:r>
+              <a:rPr lang="en-US" sz="1200" b="0">
+                <a:solidFill>
+                  <a:srgbClr val="202B33"/>
+                </a:solidFill>
+                <a:latin typeface="Arial"/>
+                <a:ea typeface="Arial"/>
+                <a:cs typeface="Arial"/>
+              </a:rPr>
+              <a:t xml:space="preserve">Theme · Language · Version</a:t>
+            </a:r>
+            <a:endParaRPr lang="en-US" sz="1200"/>
+          </a:p>
+          <a:p>
+            <a:pPr marL="0" indent="0">
+              <a:lnSpc>
+                <a:spcPts val="1575"/>
+              </a:lnSpc>
+              <a:spcAft>
+                <a:spcPts val="0"/>
+              </a:spcAft>
+              <a:buNone/>
+            </a:pPr>
+            <a:r>
+              <a:rPr lang="en-US" sz="1200" b="0">
                 <a:solidFill>
                   <a:srgbClr val="202B33"/>
                 </a:solidFill>
@@ -7970,43 +8802,66 @@
               </a:rPr>
               <a:t xml:space="preserve"/>
             </a:r>
-            <a:endParaRPr lang="en-US" sz="1500"/>
-          </a:p>
-          <a:p>
-            <a:pPr marL="0" indent="0">
-              <a:lnSpc>
-                <a:spcPts val="1950"/>
-              </a:lnSpc>
-              <a:spcAft>
-                <a:spcPts val="0"/>
-              </a:spcAft>
-              <a:buNone/>
-            </a:pPr>
-            <a:r>
-              <a:rPr lang="en-US" sz="1500" b="0">
-                <a:solidFill>
-                  <a:srgbClr val="202B33"/>
-                </a:solidFill>
-                <a:latin typeface="Arial"/>
-                <a:ea typeface="Arial"/>
-                <a:cs typeface="Arial"/>
-              </a:rPr>
-              <a:t xml:space="preserve">Test: admin user → allowed</a:t>
-            </a:r>
-            <a:endParaRPr lang="en-US" sz="1500"/>
-          </a:p>
-          <a:p>
-            <a:pPr marL="0" indent="0">
-              <a:lnSpc>
-                <a:spcPts val="1950"/>
-              </a:lnSpc>
-              <a:spcAft>
-                <a:spcPts val="0"/>
-              </a:spcAft>
-              <a:buNone/>
-            </a:pPr>
-            <a:r>
-              <a:rPr lang="en-US" sz="1500" b="0">
+            <a:endParaRPr lang="en-US" sz="1200"/>
+          </a:p>
+          <a:p>
+            <a:pPr marL="0" indent="0">
+              <a:lnSpc>
+                <a:spcPts val="1575"/>
+              </a:lnSpc>
+              <a:spcAft>
+                <a:spcPts val="0"/>
+              </a:spcAft>
+              <a:buNone/>
+            </a:pPr>
+            <a:r>
+              <a:rPr lang="en-US" sz="1200" b="0">
+                <a:solidFill>
+                  <a:srgbClr val="202B33"/>
+                </a:solidFill>
+                <a:latin typeface="Arial"/>
+                <a:ea typeface="Arial"/>
+                <a:cs typeface="Arial"/>
+              </a:rPr>
+              <a:t xml:space="preserve">"You're on 4.2. It's 43 days old. Update, or turn on</a:t>
+            </a:r>
+            <a:endParaRPr lang="en-US" sz="1200"/>
+          </a:p>
+          <a:p>
+            <a:pPr marL="0" indent="0">
+              <a:lnSpc>
+                <a:spcPts val="1575"/>
+              </a:lnSpc>
+              <a:spcAft>
+                <a:spcPts val="0"/>
+              </a:spcAft>
+              <a:buNone/>
+            </a:pPr>
+            <a:r>
+              <a:rPr lang="en-US" sz="1200" b="0">
+                <a:solidFill>
+                  <a:srgbClr val="202B33"/>
+                </a:solidFill>
+                <a:latin typeface="Arial"/>
+                <a:ea typeface="Arial"/>
+                <a:cs typeface="Arial"/>
+              </a:rPr>
+              <a:t xml:space="preserve">auto-update."</a:t>
+            </a:r>
+            <a:endParaRPr lang="en-US" sz="1200"/>
+          </a:p>
+          <a:p>
+            <a:pPr marL="0" indent="0">
+              <a:lnSpc>
+                <a:spcPts val="1575"/>
+              </a:lnSpc>
+              <a:spcAft>
+                <a:spcPts val="0"/>
+              </a:spcAft>
+              <a:buNone/>
+            </a:pPr>
+            <a:r>
+              <a:rPr lang="en-US" sz="1200" b="0">
                 <a:solidFill>
                   <a:srgbClr val="202B33"/>
                 </a:solidFill>
@@ -8016,365 +8871,112 @@
               </a:rPr>
               <a:t xml:space="preserve"/>
             </a:r>
-            <a:endParaRPr lang="en-US" sz="1500"/>
-          </a:p>
-          <a:p>
-            <a:pPr marL="0" indent="0">
-              <a:lnSpc>
-                <a:spcPts val="1950"/>
-              </a:lnSpc>
-              <a:spcAft>
-                <a:spcPts val="0"/>
-              </a:spcAft>
-              <a:buNone/>
-            </a:pPr>
-            <a:r>
-              <a:rPr lang="en-US" sz="1500" b="0">
-                <a:solidFill>
-                  <a:srgbClr val="202B33"/>
-                </a:solidFill>
-                <a:latin typeface="Arial"/>
-                <a:ea typeface="Arial"/>
-                <a:cs typeface="Arial"/>
-              </a:rPr>
-              <a:t xml:space="preserve">PASS</a:t>
-            </a:r>
-            <a:endParaRPr lang="en-US" sz="1500"/>
-          </a:p>
-          <a:p>
-            <a:pPr marL="0" indent="0">
-              <a:lnSpc>
-                <a:spcPts val="1950"/>
-              </a:lnSpc>
-              <a:spcAft>
-                <a:spcPts val="0"/>
-              </a:spcAft>
-              <a:buNone/>
-            </a:pPr>
-            <a:r>
-              <a:rPr lang="en-US" sz="1500" b="0">
-                <a:solidFill>
-                  <a:srgbClr val="202B33"/>
-                </a:solidFill>
-                <a:latin typeface="Arial"/>
-                <a:ea typeface="Arial"/>
-                <a:cs typeface="Arial"/>
-              </a:rPr>
-              <a:t xml:space="preserve"/>
-            </a:r>
-            <a:endParaRPr lang="en-US" sz="1500"/>
-          </a:p>
-          <a:p>
-            <a:pPr marL="0" indent="0">
-              <a:lnSpc>
-                <a:spcPts val="1950"/>
-              </a:lnSpc>
-              <a:spcAft>
-                <a:spcPts val="0"/>
-              </a:spcAft>
-              <a:buNone/>
-            </a:pPr>
-            <a:r>
-              <a:rPr lang="en-US" sz="1500" b="0">
-                <a:solidFill>
-                  <a:srgbClr val="202B33"/>
-                </a:solidFill>
-                <a:latin typeface="Arial"/>
-                <a:ea typeface="Arial"/>
-                <a:cs typeface="Arial"/>
-              </a:rPr>
-              <a:t xml:space="preserve">Here is the implementation. Here is its</a:t>
-            </a:r>
-            <a:endParaRPr lang="en-US" sz="1500"/>
-          </a:p>
-          <a:p>
-            <a:pPr marL="0" indent="0">
-              <a:lnSpc>
-                <a:spcPts val="1950"/>
-              </a:lnSpc>
-              <a:spcAft>
-                <a:spcPts val="0"/>
-              </a:spcAft>
-              <a:buNone/>
-            </a:pPr>
-            <a:r>
-              <a:rPr lang="en-US" sz="1500" b="0">
-                <a:solidFill>
-                  <a:srgbClr val="202B33"/>
-                </a:solidFill>
-                <a:latin typeface="Arial"/>
-                <a:ea typeface="Arial"/>
-                <a:cs typeface="Arial"/>
-              </a:rPr>
-              <a:t xml:space="preserve">test. The user has the admin role. The</a:t>
-            </a:r>
-            <a:endParaRPr lang="en-US" sz="1500"/>
-          </a:p>
-          <a:p>
-            <a:pPr marL="0" indent="0">
-              <a:lnSpc>
-                <a:spcPts val="1950"/>
-              </a:lnSpc>
-              <a:spcAft>
-                <a:spcPts val="0"/>
-              </a:spcAft>
-              <a:buNone/>
-            </a:pPr>
-            <a:r>
-              <a:rPr lang="en-US" sz="1500" b="0">
-                <a:solidFill>
-                  <a:srgbClr val="202B33"/>
-                </a:solidFill>
-                <a:latin typeface="Arial"/>
-                <a:ea typeface="Arial"/>
-                <a:cs typeface="Arial"/>
-              </a:rPr>
-              <a:t xml:space="preserve">function allows the edit. The test passes.</a:t>
-            </a:r>
-            <a:endParaRPr lang="en-US" sz="1500"/>
-          </a:p>
-          <a:p>
-            <a:pPr marL="0" indent="0">
-              <a:lnSpc>
-                <a:spcPts val="1950"/>
-              </a:lnSpc>
-              <a:spcAft>
-                <a:spcPts val="0"/>
-              </a:spcAft>
-              <a:buNone/>
-            </a:pPr>
-            <a:r>
-              <a:rPr lang="en-US" sz="1500" b="0">
-                <a:solidFill>
-                  <a:srgbClr val="202B33"/>
-                </a:solidFill>
-                <a:latin typeface="Arial"/>
-                <a:ea typeface="Arial"/>
-                <a:cs typeface="Arial"/>
-              </a:rPr>
-              <a:t xml:space="preserve"/>
-            </a:r>
-            <a:endParaRPr lang="en-US" sz="1500"/>
-          </a:p>
-          <a:p>
-            <a:pPr marL="0" indent="0">
-              <a:lnSpc>
-                <a:spcPts val="1950"/>
-              </a:lnSpc>
-              <a:spcAft>
-                <a:spcPts val="0"/>
-              </a:spcAft>
-              <a:buNone/>
-            </a:pPr>
-            <a:r>
-              <a:rPr lang="en-US" sz="1500" b="0">
-                <a:solidFill>
-                  <a:srgbClr val="202B33"/>
-                </a:solidFill>
-                <a:latin typeface="Arial"/>
-                <a:ea typeface="Arial"/>
-                <a:cs typeface="Arial"/>
-              </a:rPr>
-              <a:t xml:space="preserve">The resource tenant is right there in the</a:t>
-            </a:r>
-            <a:endParaRPr lang="en-US" sz="1500"/>
-          </a:p>
-          <a:p>
-            <a:pPr marL="0" indent="0">
-              <a:lnSpc>
-                <a:spcPts val="1950"/>
-              </a:lnSpc>
-              <a:spcAft>
-                <a:spcPts val="0"/>
-              </a:spcAft>
-              <a:buNone/>
-            </a:pPr>
-            <a:r>
-              <a:rPr lang="en-US" sz="1500" b="0">
-                <a:solidFill>
-                  <a:srgbClr val="202B33"/>
-                </a:solidFill>
-                <a:latin typeface="Arial"/>
-                <a:ea typeface="Arial"/>
-                <a:cs typeface="Arial"/>
-              </a:rPr>
-              <a:t xml:space="preserve">signature. Nothing reads it. And you</a:t>
-            </a:r>
-            <a:endParaRPr lang="en-US" sz="1500"/>
-          </a:p>
-          <a:p>
-            <a:pPr marL="0" indent="0">
-              <a:lnSpc>
-                <a:spcPts val="1950"/>
-              </a:lnSpc>
-              <a:spcAft>
-                <a:spcPts val="0"/>
-              </a:spcAft>
-              <a:buNone/>
-            </a:pPr>
-            <a:r>
-              <a:rPr lang="en-US" sz="1500" b="0">
-                <a:solidFill>
-                  <a:srgbClr val="202B33"/>
-                </a:solidFill>
-                <a:latin typeface="Arial"/>
-                <a:ea typeface="Arial"/>
-                <a:cs typeface="Arial"/>
-              </a:rPr>
-              <a:t xml:space="preserve">already heard the cross-tenant case, back</a:t>
-            </a:r>
-            <a:endParaRPr lang="en-US" sz="1500"/>
-          </a:p>
-          <a:p>
-            <a:pPr marL="0" indent="0">
-              <a:lnSpc>
-                <a:spcPts val="1950"/>
-              </a:lnSpc>
-              <a:spcAft>
-                <a:spcPts val="0"/>
-              </a:spcAft>
-              <a:buNone/>
-            </a:pPr>
-            <a:r>
-              <a:rPr lang="en-US" sz="1500" b="0">
-                <a:solidFill>
-                  <a:srgbClr val="202B33"/>
-                </a:solidFill>
-                <a:latin typeface="Arial"/>
-                <a:ea typeface="Arial"/>
-                <a:cs typeface="Arial"/>
-              </a:rPr>
-              <a:t xml:space="preserve">on the spec slide. Watch the vote anyway.</a:t>
-            </a:r>
-            <a:endParaRPr lang="en-US" sz="1500"/>
-          </a:p>
-          <a:p>
-            <a:pPr marL="0" indent="0">
-              <a:lnSpc>
-                <a:spcPts val="1950"/>
-              </a:lnSpc>
-              <a:spcAft>
-                <a:spcPts val="0"/>
-              </a:spcAft>
-              <a:buNone/>
-            </a:pPr>
-            <a:r>
-              <a:rPr lang="en-US" sz="1500" b="0">
-                <a:solidFill>
-                  <a:srgbClr val="202B33"/>
-                </a:solidFill>
-                <a:latin typeface="Arial"/>
-                <a:ea typeface="Arial"/>
-                <a:cs typeface="Arial"/>
-              </a:rPr>
-              <a:t xml:space="preserve"/>
-            </a:r>
-            <a:endParaRPr lang="en-US" sz="1500"/>
-          </a:p>
-          <a:p>
-            <a:pPr marL="0" indent="0">
-              <a:lnSpc>
-                <a:spcPts val="1950"/>
-              </a:lnSpc>
-              <a:spcAft>
-                <a:spcPts val="0"/>
-              </a:spcAft>
-              <a:buNone/>
-            </a:pPr>
-            <a:r>
-              <a:rPr lang="en-US" sz="1500" b="0">
-                <a:solidFill>
-                  <a:srgbClr val="202B33"/>
-                </a:solidFill>
-                <a:latin typeface="Arial"/>
-                <a:ea typeface="Arial"/>
-                <a:cs typeface="Arial"/>
-              </a:rPr>
-              <a:t xml:space="preserve">Would you approve it? Now run the case</a:t>
-            </a:r>
-            <a:endParaRPr lang="en-US" sz="1500"/>
-          </a:p>
-          <a:p>
-            <a:pPr marL="0" indent="0">
-              <a:lnSpc>
-                <a:spcPts val="1950"/>
-              </a:lnSpc>
-              <a:spcAft>
-                <a:spcPts val="0"/>
-              </a:spcAft>
-              <a:buNone/>
-            </a:pPr>
-            <a:r>
-              <a:rPr lang="en-US" sz="1500" b="0">
-                <a:solidFill>
-                  <a:srgbClr val="202B33"/>
-                </a:solidFill>
-                <a:latin typeface="Arial"/>
-                <a:ea typeface="Arial"/>
-                <a:cs typeface="Arial"/>
-              </a:rPr>
-              <a:t xml:space="preserve">where that administrator belongs to tenant</a:t>
-            </a:r>
-            <a:endParaRPr lang="en-US" sz="1500"/>
-          </a:p>
-          <a:p>
-            <a:pPr marL="0" indent="0">
-              <a:lnSpc>
-                <a:spcPts val="1950"/>
-              </a:lnSpc>
-              <a:spcAft>
-                <a:spcPts val="0"/>
-              </a:spcAft>
-              <a:buNone/>
-            </a:pPr>
-            <a:r>
-              <a:rPr lang="en-US" sz="1500" b="0">
-                <a:solidFill>
-                  <a:srgbClr val="202B33"/>
-                </a:solidFill>
-                <a:latin typeface="Arial"/>
-                <a:ea typeface="Arial"/>
-                <a:cs typeface="Arial"/>
-              </a:rPr>
-              <a:t xml:space="preserve">A and the resource belongs to tenant B. The</a:t>
-            </a:r>
-            <a:endParaRPr lang="en-US" sz="1500"/>
-          </a:p>
-          <a:p>
-            <a:pPr marL="0" indent="0">
-              <a:lnSpc>
-                <a:spcPts val="1950"/>
-              </a:lnSpc>
-              <a:spcAft>
-                <a:spcPts val="0"/>
-              </a:spcAft>
-              <a:buNone/>
-            </a:pPr>
-            <a:r>
-              <a:rPr lang="en-US" sz="1500" b="0">
-                <a:solidFill>
-                  <a:srgbClr val="202B33"/>
-                </a:solidFill>
-                <a:latin typeface="Arial"/>
-                <a:ea typeface="Arial"/>
-                <a:cs typeface="Arial"/>
-              </a:rPr>
-              <a:t xml:space="preserve">test was accurate about the behavior it</a:t>
-            </a:r>
-            <a:endParaRPr lang="en-US" sz="1500"/>
+            <a:endParaRPr lang="en-US" sz="1200"/>
+          </a:p>
+          <a:p>
+            <a:pPr marL="0" indent="0">
+              <a:lnSpc>
+                <a:spcPts val="1575"/>
+              </a:lnSpc>
+              <a:spcAft>
+                <a:spcPts val="0"/>
+              </a:spcAft>
+              <a:buNone/>
+            </a:pPr>
+            <a:r>
+              <a:rPr lang="en-US" sz="1200" b="0">
+                <a:solidFill>
+                  <a:srgbClr val="202B33"/>
+                </a:solidFill>
+                <a:latin typeface="Arial"/>
+                <a:ea typeface="Arial"/>
+                <a:cs typeface="Arial"/>
+              </a:rPr>
+              <a:t xml:space="preserve">First prediction, labeled once as a prediction.</a:t>
+            </a:r>
+            <a:endParaRPr lang="en-US" sz="1200"/>
+          </a:p>
+          <a:p>
+            <a:pPr marL="0" indent="0">
+              <a:lnSpc>
+                <a:spcPts val="1575"/>
+              </a:lnSpc>
+              <a:spcAft>
+                <a:spcPts val="0"/>
+              </a:spcAft>
+              <a:buNone/>
+            </a:pPr>
+            <a:r>
+              <a:rPr lang="en-US" sz="1200" b="0">
+                <a:solidFill>
+                  <a:srgbClr val="202B33"/>
+                </a:solidFill>
+                <a:latin typeface="Arial"/>
+                <a:ea typeface="Arial"/>
+                <a:cs typeface="Arial"/>
+              </a:rPr>
+              <a:t xml:space="preserve">Version becomes a first-class user-facing control,</a:t>
+            </a:r>
+            <a:endParaRPr lang="en-US" sz="1200"/>
+          </a:p>
+          <a:p>
+            <a:pPr marL="0" indent="0">
+              <a:lnSpc>
+                <a:spcPts val="1575"/>
+              </a:lnSpc>
+              <a:spcAft>
+                <a:spcPts val="0"/>
+              </a:spcAft>
+              <a:buNone/>
+            </a:pPr>
+            <a:r>
+              <a:rPr lang="en-US" sz="1200" b="0">
+                <a:solidFill>
+                  <a:srgbClr val="202B33"/>
+                </a:solidFill>
+                <a:latin typeface="Arial"/>
+                <a:ea typeface="Arial"/>
+                <a:cs typeface="Arial"/>
+              </a:rPr>
+              <a:t xml:space="preserve">sitting in settings beside theme and language,</a:t>
+            </a:r>
+            <a:endParaRPr lang="en-US" sz="1200"/>
+          </a:p>
+          <a:p>
+            <a:pPr marL="0" indent="0">
+              <a:lnSpc>
+                <a:spcPts val="1575"/>
+              </a:lnSpc>
+              <a:spcAft>
+                <a:spcPts val="0"/>
+              </a:spcAft>
+              <a:buNone/>
+            </a:pPr>
+            <a:r>
+              <a:rPr lang="en-US" sz="1200" b="0">
+                <a:solidFill>
+                  <a:srgbClr val="202B33"/>
+                </a:solidFill>
+                <a:latin typeface="Arial"/>
+                <a:ea typeface="Arial"/>
+                <a:cs typeface="Arial"/>
+              </a:rPr>
+              <a:t xml:space="preserve">because those two are already there for exactly this</a:t>
+            </a:r>
+            <a:endParaRPr lang="en-US" sz="1200"/>
           </a:p>
         </p:txBody>
       </p:sp>
       <p:sp>
         <p:nvSpPr>
-          <p:cNvPr id="5" name="Text 5"/>
+          <p:cNvPr id="7" name="Text 7"/>
           <p:cNvSpPr txBox="1"/>
           <p:nvPr/>
         </p:nvSpPr>
         <p:spPr>
           <a:xfrm>
-            <a:off x="5238750" y="1971675"/>
-            <a:ext cx="4362450" cy="5314950"/>
+            <a:off x="5238750" y="4648200"/>
+            <a:ext cx="4362450" cy="2647950"/>
           </a:xfrm>
           <a:prstGeom prst="rect">
             <a:avLst/>
@@ -8392,61 +8994,61 @@
           <a:p>
             <a:pPr marL="0" indent="0">
               <a:lnSpc>
-                <a:spcPts val="1950"/>
-              </a:lnSpc>
-              <a:spcAft>
-                <a:spcPts val="0"/>
-              </a:spcAft>
-              <a:buNone/>
-            </a:pPr>
-            <a:r>
-              <a:rPr lang="en-US" sz="1500" b="0">
-                <a:solidFill>
-                  <a:srgbClr val="202B33"/>
-                </a:solidFill>
-                <a:latin typeface="Arial"/>
-                <a:ea typeface="Arial"/>
-                <a:cs typeface="Arial"/>
-              </a:rPr>
-              <a:t xml:space="preserve">checked. The behavior was incomplete in</a:t>
-            </a:r>
-            <a:endParaRPr lang="en-US" sz="1500"/>
-          </a:p>
-          <a:p>
-            <a:pPr marL="0" indent="0">
-              <a:lnSpc>
-                <a:spcPts val="1950"/>
-              </a:lnSpc>
-              <a:spcAft>
-                <a:spcPts val="0"/>
-              </a:spcAft>
-              <a:buNone/>
-            </a:pPr>
-            <a:r>
-              <a:rPr lang="en-US" sz="1500" b="0">
-                <a:solidFill>
-                  <a:srgbClr val="202B33"/>
-                </a:solidFill>
-                <a:latin typeface="Arial"/>
-                <a:ea typeface="Arial"/>
-                <a:cs typeface="Arial"/>
-              </a:rPr>
-              <a:t xml:space="preserve">exactly the same way as the implementation.</a:t>
-            </a:r>
-            <a:endParaRPr lang="en-US" sz="1500"/>
-          </a:p>
-          <a:p>
-            <a:pPr marL="0" indent="0">
-              <a:lnSpc>
-                <a:spcPts val="1950"/>
-              </a:lnSpc>
-              <a:spcAft>
-                <a:spcPts val="0"/>
-              </a:spcAft>
-              <a:buNone/>
-            </a:pPr>
-            <a:r>
-              <a:rPr lang="en-US" sz="1500" b="0">
+                <a:spcPts val="1575"/>
+              </a:lnSpc>
+              <a:spcAft>
+                <a:spcPts val="0"/>
+              </a:spcAft>
+              <a:buNone/>
+            </a:pPr>
+            <a:r>
+              <a:rPr lang="en-US" sz="1200" b="0">
+                <a:solidFill>
+                  <a:srgbClr val="202B33"/>
+                </a:solidFill>
+                <a:latin typeface="Arial"/>
+                <a:ea typeface="Arial"/>
+                <a:cs typeface="Arial"/>
+              </a:rPr>
+              <a:t xml:space="preserve">reason. They are preferences about how the software</a:t>
+            </a:r>
+            <a:endParaRPr lang="en-US" sz="1200"/>
+          </a:p>
+          <a:p>
+            <a:pPr marL="0" indent="0">
+              <a:lnSpc>
+                <a:spcPts val="1575"/>
+              </a:lnSpc>
+              <a:spcAft>
+                <a:spcPts val="0"/>
+              </a:spcAft>
+              <a:buNone/>
+            </a:pPr>
+            <a:r>
+              <a:rPr lang="en-US" sz="1200" b="0">
+                <a:solidFill>
+                  <a:srgbClr val="202B33"/>
+                </a:solidFill>
+                <a:latin typeface="Arial"/>
+                <a:ea typeface="Arial"/>
+                <a:cs typeface="Arial"/>
+              </a:rPr>
+              <a:t xml:space="preserve">meets you.</a:t>
+            </a:r>
+            <a:endParaRPr lang="en-US" sz="1200"/>
+          </a:p>
+          <a:p>
+            <a:pPr marL="0" indent="0">
+              <a:lnSpc>
+                <a:spcPts val="1575"/>
+              </a:lnSpc>
+              <a:spcAft>
+                <a:spcPts val="0"/>
+              </a:spcAft>
+              <a:buNone/>
+            </a:pPr>
+            <a:r>
+              <a:rPr lang="en-US" sz="1200" b="0">
                 <a:solidFill>
                   <a:srgbClr val="202B33"/>
                 </a:solidFill>
@@ -8456,381 +9058,151 @@
               </a:rPr>
               <a:t xml:space="preserve"/>
             </a:r>
-            <a:endParaRPr lang="en-US" sz="1500"/>
-          </a:p>
-          <a:p>
-            <a:pPr marL="0" indent="0">
-              <a:lnSpc>
-                <a:spcPts val="1950"/>
-              </a:lnSpc>
-              <a:spcAft>
-                <a:spcPts val="0"/>
-              </a:spcAft>
-              <a:buNone/>
-            </a:pPr>
-            <a:r>
-              <a:rPr lang="en-US" sz="1500" b="0">
-                <a:solidFill>
-                  <a:srgbClr val="202B33"/>
-                </a:solidFill>
-                <a:latin typeface="Arial"/>
-                <a:ea typeface="Arial"/>
-                <a:cs typeface="Arial"/>
-              </a:rPr>
-              <a:t xml:space="preserve">The model wrote the test that agrees with</a:t>
-            </a:r>
-            <a:endParaRPr lang="en-US" sz="1500"/>
-          </a:p>
-          <a:p>
-            <a:pPr marL="0" indent="0">
-              <a:lnSpc>
-                <a:spcPts val="1950"/>
-              </a:lnSpc>
-              <a:spcAft>
-                <a:spcPts val="0"/>
-              </a:spcAft>
-              <a:buNone/>
-            </a:pPr>
-            <a:r>
-              <a:rPr lang="en-US" sz="1500" b="0">
-                <a:solidFill>
-                  <a:srgbClr val="202B33"/>
-                </a:solidFill>
-                <a:latin typeface="Arial"/>
-                <a:ea typeface="Arial"/>
-                <a:cs typeface="Arial"/>
-              </a:rPr>
-              <a:t xml:space="preserve">the bug. Both of them are very confident.</a:t>
-            </a:r>
-            <a:endParaRPr lang="en-US" sz="1500"/>
-          </a:p>
-          <a:p>
-            <a:pPr marL="0" indent="0">
-              <a:lnSpc>
-                <a:spcPts val="1950"/>
-              </a:lnSpc>
-              <a:spcAft>
-                <a:spcPts val="0"/>
-              </a:spcAft>
-              <a:buNone/>
-            </a:pPr>
-            <a:r>
-              <a:rPr lang="en-US" sz="1500" b="0">
-                <a:solidFill>
-                  <a:srgbClr val="202B33"/>
-                </a:solidFill>
-                <a:latin typeface="Arial"/>
-                <a:ea typeface="Arial"/>
-                <a:cs typeface="Arial"/>
-              </a:rPr>
-              <a:t xml:space="preserve"/>
-            </a:r>
-            <a:endParaRPr lang="en-US" sz="1500"/>
-          </a:p>
-          <a:p>
-            <a:pPr marL="0" indent="0">
-              <a:lnSpc>
-                <a:spcPts val="1950"/>
-              </a:lnSpc>
-              <a:spcAft>
-                <a:spcPts val="0"/>
-              </a:spcAft>
-              <a:buNone/>
-            </a:pPr>
-            <a:r>
-              <a:rPr lang="en-US" sz="1500" b="0">
-                <a:solidFill>
-                  <a:srgbClr val="202B33"/>
-                </a:solidFill>
-                <a:latin typeface="Arial"/>
-                <a:ea typeface="Arial"/>
-                <a:cs typeface="Arial"/>
-              </a:rPr>
-              <a:t xml:space="preserve">Bainbridge asks what automation leaves the</a:t>
-            </a:r>
-            <a:endParaRPr lang="en-US" sz="1500"/>
-          </a:p>
-          <a:p>
-            <a:pPr marL="0" indent="0">
-              <a:lnSpc>
-                <a:spcPts val="1950"/>
-              </a:lnSpc>
-              <a:spcAft>
-                <a:spcPts val="0"/>
-              </a:spcAft>
-              <a:buNone/>
-            </a:pPr>
-            <a:r>
-              <a:rPr lang="en-US" sz="1500" b="0">
-                <a:solidFill>
-                  <a:srgbClr val="202B33"/>
-                </a:solidFill>
-                <a:latin typeface="Arial"/>
-                <a:ea typeface="Arial"/>
-                <a:cs typeface="Arial"/>
-              </a:rPr>
-              <a:t xml:space="preserve">operator doing. Skitka and colleagues put</a:t>
-            </a:r>
-            <a:endParaRPr lang="en-US" sz="1500"/>
-          </a:p>
-          <a:p>
-            <a:pPr marL="0" indent="0">
-              <a:lnSpc>
-                <a:spcPts val="1950"/>
-              </a:lnSpc>
-              <a:spcAft>
-                <a:spcPts val="0"/>
-              </a:spcAft>
-              <a:buNone/>
-            </a:pPr>
-            <a:r>
-              <a:rPr lang="en-US" sz="1500" b="0">
-                <a:solidFill>
-                  <a:srgbClr val="202B33"/>
-                </a:solidFill>
-                <a:latin typeface="Arial"/>
-                <a:ea typeface="Arial"/>
-                <a:cs typeface="Arial"/>
-              </a:rPr>
-              <a:t xml:space="preserve">people in a flight simulator with an</a:t>
-            </a:r>
-            <a:endParaRPr lang="en-US" sz="1500"/>
-          </a:p>
-          <a:p>
-            <a:pPr marL="0" indent="0">
-              <a:lnSpc>
-                <a:spcPts val="1950"/>
-              </a:lnSpc>
-              <a:spcAft>
-                <a:spcPts val="0"/>
-              </a:spcAft>
-              <a:buNone/>
-            </a:pPr>
-            <a:r>
-              <a:rPr lang="en-US" sz="1500" b="0">
-                <a:solidFill>
-                  <a:srgbClr val="202B33"/>
-                </a:solidFill>
-                <a:latin typeface="Arial"/>
-                <a:ea typeface="Arial"/>
-                <a:cs typeface="Arial"/>
-              </a:rPr>
-              <a:t xml:space="preserve">automated monitoring aid and counted the</a:t>
-            </a:r>
-            <a:endParaRPr lang="en-US" sz="1500"/>
-          </a:p>
-          <a:p>
-            <a:pPr marL="0" indent="0">
-              <a:lnSpc>
-                <a:spcPts val="1950"/>
-              </a:lnSpc>
-              <a:spcAft>
-                <a:spcPts val="0"/>
-              </a:spcAft>
-              <a:buNone/>
-            </a:pPr>
-            <a:r>
-              <a:rPr lang="en-US" sz="1500" b="0">
-                <a:solidFill>
-                  <a:srgbClr val="202B33"/>
-                </a:solidFill>
-                <a:latin typeface="Arial"/>
-                <a:ea typeface="Arial"/>
-                <a:cs typeface="Arial"/>
-              </a:rPr>
-              <a:t xml:space="preserve">trials where the aid was wrong. On those</a:t>
-            </a:r>
-            <a:endParaRPr lang="en-US" sz="1500"/>
-          </a:p>
-          <a:p>
-            <a:pPr marL="0" indent="0">
-              <a:lnSpc>
-                <a:spcPts val="1950"/>
-              </a:lnSpc>
-              <a:spcAft>
-                <a:spcPts val="0"/>
-              </a:spcAft>
-              <a:buNone/>
-            </a:pPr>
-            <a:r>
-              <a:rPr lang="en-US" sz="1500" b="0">
-                <a:solidFill>
-                  <a:srgbClr val="202B33"/>
-                </a:solidFill>
-                <a:latin typeface="Arial"/>
-                <a:ea typeface="Arial"/>
-                <a:cs typeface="Arial"/>
-              </a:rPr>
-              <a:t xml:space="preserve">trials people missed events the aid did not</a:t>
-            </a:r>
-            <a:endParaRPr lang="en-US" sz="1500"/>
-          </a:p>
-          <a:p>
-            <a:pPr marL="0" indent="0">
-              <a:lnSpc>
-                <a:spcPts val="1950"/>
-              </a:lnSpc>
-              <a:spcAft>
-                <a:spcPts val="0"/>
-              </a:spcAft>
-              <a:buNone/>
-            </a:pPr>
-            <a:r>
-              <a:rPr lang="en-US" sz="1500" b="0">
-                <a:solidFill>
-                  <a:srgbClr val="202B33"/>
-                </a:solidFill>
-                <a:latin typeface="Arial"/>
-                <a:ea typeface="Arial"/>
-                <a:cs typeface="Arial"/>
-              </a:rPr>
-              <a:t xml:space="preserve">flag, and acted on prompts the other</a:t>
-            </a:r>
-            <a:endParaRPr lang="en-US" sz="1500"/>
-          </a:p>
-          <a:p>
-            <a:pPr marL="0" indent="0">
-              <a:lnSpc>
-                <a:spcPts val="1950"/>
-              </a:lnSpc>
-              <a:spcAft>
-                <a:spcPts val="0"/>
-              </a:spcAft>
-              <a:buNone/>
-            </a:pPr>
-            <a:r>
-              <a:rPr lang="en-US" sz="1500" b="0">
-                <a:solidFill>
-                  <a:srgbClr val="202B33"/>
-                </a:solidFill>
-                <a:latin typeface="Arial"/>
-                <a:ea typeface="Arial"/>
-                <a:cs typeface="Arial"/>
-              </a:rPr>
-              <a:t xml:space="preserve">instruments contradicted. That is the whole</a:t>
-            </a:r>
-            <a:endParaRPr lang="en-US" sz="1500"/>
-          </a:p>
-          <a:p>
-            <a:pPr marL="0" indent="0">
-              <a:lnSpc>
-                <a:spcPts val="1950"/>
-              </a:lnSpc>
-              <a:spcAft>
-                <a:spcPts val="0"/>
-              </a:spcAft>
-              <a:buNone/>
-            </a:pPr>
-            <a:r>
-              <a:rPr lang="en-US" sz="1500" b="0">
-                <a:solidFill>
-                  <a:srgbClr val="202B33"/>
-                </a:solidFill>
-                <a:latin typeface="Arial"/>
-                <a:ea typeface="Arial"/>
-                <a:cs typeface="Arial"/>
-              </a:rPr>
-              <a:t xml:space="preserve">finding, and it is about the trials where</a:t>
-            </a:r>
-            <a:endParaRPr lang="en-US" sz="1500"/>
-          </a:p>
-          <a:p>
-            <a:pPr marL="0" indent="0">
-              <a:lnSpc>
-                <a:spcPts val="1950"/>
-              </a:lnSpc>
-              <a:spcAft>
-                <a:spcPts val="0"/>
-              </a:spcAft>
-              <a:buNone/>
-            </a:pPr>
-            <a:r>
-              <a:rPr lang="en-US" sz="1500" b="0">
-                <a:solidFill>
-                  <a:srgbClr val="202B33"/>
-                </a:solidFill>
-                <a:latin typeface="Arial"/>
-                <a:ea typeface="Arial"/>
-                <a:cs typeface="Arial"/>
-              </a:rPr>
-              <a:t xml:space="preserve">the aid was wrong. This fixture is how the</a:t>
-            </a:r>
-            <a:endParaRPr lang="en-US" sz="1500"/>
-          </a:p>
-          <a:p>
-            <a:pPr marL="0" indent="0">
-              <a:lnSpc>
-                <a:spcPts val="1950"/>
-              </a:lnSpc>
-              <a:spcAft>
-                <a:spcPts val="0"/>
-              </a:spcAft>
-              <a:buNone/>
-            </a:pPr>
-            <a:r>
-              <a:rPr lang="en-US" sz="1500" b="0">
-                <a:solidFill>
-                  <a:srgbClr val="202B33"/>
-                </a:solidFill>
-                <a:latin typeface="Arial"/>
-                <a:ea typeface="Arial"/>
-                <a:cs typeface="Arial"/>
-              </a:rPr>
-              <a:t xml:space="preserve">same concern shows up in our queue: the</a:t>
-            </a:r>
-            <a:endParaRPr lang="en-US" sz="1500"/>
-          </a:p>
-          <a:p>
-            <a:pPr marL="0" indent="0">
-              <a:lnSpc>
-                <a:spcPts val="1950"/>
-              </a:lnSpc>
-              <a:spcAft>
-                <a:spcPts val="0"/>
-              </a:spcAft>
-              <a:buNone/>
-            </a:pPr>
-            <a:r>
-              <a:rPr lang="en-US" sz="1500" b="0">
-                <a:solidFill>
-                  <a:srgbClr val="202B33"/>
-                </a:solidFill>
-                <a:latin typeface="Arial"/>
-                <a:ea typeface="Arial"/>
-                <a:cs typeface="Arial"/>
-              </a:rPr>
-              <a:t xml:space="preserve">green signal gets attention that the</a:t>
-            </a:r>
-            <a:endParaRPr lang="en-US" sz="1500"/>
-          </a:p>
-          <a:p>
-            <a:pPr marL="0" indent="0">
-              <a:lnSpc>
-                <a:spcPts val="1950"/>
-              </a:lnSpc>
-              <a:spcAft>
-                <a:spcPts val="0"/>
-              </a:spcAft>
-              <a:buNone/>
-            </a:pPr>
-            <a:r>
-              <a:rPr lang="en-US" sz="1500" b="0">
-                <a:solidFill>
-                  <a:srgbClr val="202B33"/>
-                </a:solidFill>
-                <a:latin typeface="Arial"/>
-                <a:ea typeface="Arial"/>
-                <a:cs typeface="Arial"/>
-              </a:rPr>
-              <a:t xml:space="preserve">missing case did not.</a:t>
-            </a:r>
-            <a:endParaRPr lang="en-US" sz="1500"/>
+            <a:endParaRPr lang="en-US" sz="1200"/>
+          </a:p>
+          <a:p>
+            <a:pPr marL="0" indent="0">
+              <a:lnSpc>
+                <a:spcPts val="1575"/>
+              </a:lnSpc>
+              <a:spcAft>
+                <a:spcPts val="0"/>
+              </a:spcAft>
+              <a:buNone/>
+            </a:pPr>
+            <a:r>
+              <a:rPr lang="en-US" sz="1200" b="0">
+                <a:solidFill>
+                  <a:srgbClr val="202B33"/>
+                </a:solidFill>
+                <a:latin typeface="Arial"/>
+                <a:ea typeface="Arial"/>
+                <a:cs typeface="Arial"/>
+              </a:rPr>
+              <a:t xml:space="preserve">A returning user lands on the version she left. The</a:t>
+            </a:r>
+            <a:endParaRPr lang="en-US" sz="1200"/>
+          </a:p>
+          <a:p>
+            <a:pPr marL="0" indent="0">
+              <a:lnSpc>
+                <a:spcPts val="1575"/>
+              </a:lnSpc>
+              <a:spcAft>
+                <a:spcPts val="0"/>
+              </a:spcAft>
+              <a:buNone/>
+            </a:pPr>
+            <a:r>
+              <a:rPr lang="en-US" sz="1200" b="0">
+                <a:solidFill>
+                  <a:srgbClr val="202B33"/>
+                </a:solidFill>
+                <a:latin typeface="Arial"/>
+                <a:ea typeface="Arial"/>
+                <a:cs typeface="Arial"/>
+              </a:rPr>
+              <a:t xml:space="preserve">banner reads: you are on 4.2, it is forty-three days</a:t>
+            </a:r>
+            <a:endParaRPr lang="en-US" sz="1200"/>
+          </a:p>
+          <a:p>
+            <a:pPr marL="0" indent="0">
+              <a:lnSpc>
+                <a:spcPts val="1575"/>
+              </a:lnSpc>
+              <a:spcAft>
+                <a:spcPts val="0"/>
+              </a:spcAft>
+              <a:buNone/>
+            </a:pPr>
+            <a:r>
+              <a:rPr lang="en-US" sz="1200" b="0">
+                <a:solidFill>
+                  <a:srgbClr val="202B33"/>
+                </a:solidFill>
+                <a:latin typeface="Arial"/>
+                <a:ea typeface="Arial"/>
+                <a:cs typeface="Arial"/>
+              </a:rPr>
+              <a:t xml:space="preserve">old, here is what changed, update now or turn on</a:t>
+            </a:r>
+            <a:endParaRPr lang="en-US" sz="1200"/>
+          </a:p>
+          <a:p>
+            <a:pPr marL="0" indent="0">
+              <a:lnSpc>
+                <a:spcPts val="1575"/>
+              </a:lnSpc>
+              <a:spcAft>
+                <a:spcPts val="0"/>
+              </a:spcAft>
+              <a:buNone/>
+            </a:pPr>
+            <a:r>
+              <a:rPr lang="en-US" sz="1200" b="0">
+                <a:solidFill>
+                  <a:srgbClr val="202B33"/>
+                </a:solidFill>
+                <a:latin typeface="Arial"/>
+                <a:ea typeface="Arial"/>
+                <a:cs typeface="Arial"/>
+              </a:rPr>
+              <a:t xml:space="preserve">auto-update. Change stops being something that</a:t>
+            </a:r>
+            <a:endParaRPr lang="en-US" sz="1200"/>
+          </a:p>
+          <a:p>
+            <a:pPr marL="0" indent="0">
+              <a:lnSpc>
+                <a:spcPts val="1575"/>
+              </a:lnSpc>
+              <a:spcAft>
+                <a:spcPts val="0"/>
+              </a:spcAft>
+              <a:buNone/>
+            </a:pPr>
+            <a:r>
+              <a:rPr lang="en-US" sz="1200" b="0">
+                <a:solidFill>
+                  <a:srgbClr val="202B33"/>
+                </a:solidFill>
+                <a:latin typeface="Arial"/>
+                <a:ea typeface="Arial"/>
+                <a:cs typeface="Arial"/>
+              </a:rPr>
+              <a:t xml:space="preserve">happened to her while she was away and becomes</a:t>
+            </a:r>
+            <a:endParaRPr lang="en-US" sz="1200"/>
+          </a:p>
+          <a:p>
+            <a:pPr marL="0" indent="0">
+              <a:lnSpc>
+                <a:spcPts val="1575"/>
+              </a:lnSpc>
+              <a:spcAft>
+                <a:spcPts val="0"/>
+              </a:spcAft>
+              <a:buNone/>
+            </a:pPr>
+            <a:r>
+              <a:rPr lang="en-US" sz="1200" b="0">
+                <a:solidFill>
+                  <a:srgbClr val="202B33"/>
+                </a:solidFill>
+                <a:latin typeface="Arial"/>
+                <a:ea typeface="Arial"/>
+                <a:cs typeface="Arial"/>
+              </a:rPr>
+              <a:t xml:space="preserve">something she asks for. That is the whole move.</a:t>
+            </a:r>
+            <a:endParaRPr lang="en-US" sz="1200"/>
           </a:p>
         </p:txBody>
       </p:sp>
       <p:sp>
         <p:nvSpPr>
-          <p:cNvPr id="6" name="Text 6"/>
+          <p:cNvPr id="8" name="Text 8"/>
           <p:cNvSpPr txBox="1"/>
           <p:nvPr/>
         </p:nvSpPr>
@@ -8871,7 +9243,7 @@
                 <a:ea typeface="Arial"/>
                 <a:cs typeface="Arial"/>
               </a:rPr>
-              <a:t xml:space="preserve">Code Is Cheap. Judgment Is Expensive.</a:t>
+              <a:t xml:space="preserve">Turn Your Thinkin' Tokens Up to 11</a:t>
             </a:r>
             <a:endParaRPr lang="en-US" sz="975"/>
           </a:p>
@@ -8879,7 +9251,7 @@
       </p:sp>
       <p:sp>
         <p:nvSpPr>
-          <p:cNvPr id="7" name="Text 7"/>
+          <p:cNvPr id="9" name="Text 9"/>
           <p:cNvSpPr txBox="1"/>
           <p:nvPr/>
         </p:nvSpPr>
@@ -9051,7 +9423,7 @@
                 <a:ea typeface="Arial"/>
                 <a:cs typeface="Arial"/>
               </a:rPr>
-              <a:t xml:space="preserve">Three levers on the queue</a:t>
+              <a:t xml:space="preserve">Prediction: the app your neighbor configured</a:t>
             </a:r>
             <a:endParaRPr lang="en-US" sz="2550"/>
           </a:p>
@@ -9100,7 +9472,7 @@
                 <a:ea typeface="Arial"/>
                 <a:cs typeface="Arial"/>
               </a:rPr>
-              <a:t xml:space="preserve">Arrivals: decline work before generating it</a:t>
+              <a:t xml:space="preserve">"Turn on what people like me have on"</a:t>
             </a:r>
             <a:endParaRPr lang="en-US" sz="1500"/>
           </a:p>
@@ -9146,30 +9518,7 @@
                 <a:ea typeface="Arial"/>
                 <a:cs typeface="Arial"/>
               </a:rPr>
-              <a:t xml:space="preserve">Variance: bounded diffs and explicit</a:t>
-            </a:r>
-            <a:endParaRPr lang="en-US" sz="1500"/>
-          </a:p>
-          <a:p>
-            <a:pPr marL="0" indent="0">
-              <a:lnSpc>
-                <a:spcPts val="1950"/>
-              </a:lnSpc>
-              <a:spcAft>
-                <a:spcPts val="0"/>
-              </a:spcAft>
-              <a:buNone/>
-            </a:pPr>
-            <a:r>
-              <a:rPr lang="en-US" sz="1500" b="0">
-                <a:solidFill>
-                  <a:srgbClr val="202B33"/>
-                </a:solidFill>
-                <a:latin typeface="Arial"/>
-                <a:ea typeface="Arial"/>
-                <a:cs typeface="Arial"/>
-              </a:rPr>
-              <a:t xml:space="preserve">behavior</a:t>
+              <a:t xml:space="preserve">Shareable configuration profiles</a:t>
             </a:r>
             <a:endParaRPr lang="en-US" sz="1500"/>
           </a:p>
@@ -9215,7 +9564,7 @@
                 <a:ea typeface="Arial"/>
                 <a:cs typeface="Arial"/>
               </a:rPr>
-              <a:t xml:space="preserve">Utilization: reserve actual review capacity</a:t>
+              <a:t xml:space="preserve">Developers have done this for thirty years</a:t>
             </a:r>
             <a:endParaRPr lang="en-US" sz="1500"/>
           </a:p>
@@ -9261,214 +9610,99 @@
                 <a:ea typeface="Arial"/>
                 <a:cs typeface="Arial"/>
               </a:rPr>
-              <a:t xml:space="preserve">Fewer arrivals means deciding which changes</a:t>
-            </a:r>
-            <a:endParaRPr lang="en-US" sz="1500"/>
-          </a:p>
-          <a:p>
-            <a:pPr marL="0" indent="0">
-              <a:lnSpc>
-                <a:spcPts val="1950"/>
-              </a:lnSpc>
-              <a:spcAft>
-                <a:spcPts val="0"/>
-              </a:spcAft>
-              <a:buNone/>
-            </a:pPr>
-            <a:r>
-              <a:rPr lang="en-US" sz="1500" b="0">
-                <a:solidFill>
-                  <a:srgbClr val="202B33"/>
-                </a:solidFill>
-                <a:latin typeface="Arial"/>
-                <a:ea typeface="Arial"/>
-                <a:cs typeface="Arial"/>
-              </a:rPr>
-              <a:t xml:space="preserve">should exist, including declining a second</a:t>
-            </a:r>
-            <a:endParaRPr lang="en-US" sz="1500"/>
-          </a:p>
-          <a:p>
-            <a:pPr marL="0" indent="0">
-              <a:lnSpc>
-                <a:spcPts val="1950"/>
-              </a:lnSpc>
-              <a:spcAft>
-                <a:spcPts val="0"/>
-              </a:spcAft>
-              <a:buNone/>
-            </a:pPr>
-            <a:r>
-              <a:rPr lang="en-US" sz="1500" b="0">
-                <a:solidFill>
-                  <a:srgbClr val="202B33"/>
-                </a:solidFill>
-                <a:latin typeface="Arial"/>
-                <a:ea typeface="Arial"/>
-                <a:cs typeface="Arial"/>
-              </a:rPr>
-              <a:t xml:space="preserve">implementation after the first already met</a:t>
-            </a:r>
-            <a:endParaRPr lang="en-US" sz="1500"/>
-          </a:p>
-          <a:p>
-            <a:pPr marL="0" indent="0">
-              <a:lnSpc>
-                <a:spcPts val="1950"/>
-              </a:lnSpc>
-              <a:spcAft>
-                <a:spcPts val="0"/>
-              </a:spcAft>
-              <a:buNone/>
-            </a:pPr>
-            <a:r>
-              <a:rPr lang="en-US" sz="1500" b="0">
-                <a:solidFill>
-                  <a:srgbClr val="202B33"/>
-                </a:solidFill>
-                <a:latin typeface="Arial"/>
-                <a:ea typeface="Arial"/>
-                <a:cs typeface="Arial"/>
-              </a:rPr>
-              <a:t xml:space="preserve">the need. That is a rule about review load,</a:t>
-            </a:r>
-            <a:endParaRPr lang="en-US" sz="1500"/>
-          </a:p>
-          <a:p>
-            <a:pPr marL="0" indent="0">
-              <a:lnSpc>
-                <a:spcPts val="1950"/>
-              </a:lnSpc>
-              <a:spcAft>
-                <a:spcPts val="0"/>
-              </a:spcAft>
-              <a:buNone/>
-            </a:pPr>
-            <a:r>
-              <a:rPr lang="en-US" sz="1500" b="0">
-                <a:solidFill>
-                  <a:srgbClr val="202B33"/>
-                </a:solidFill>
-                <a:latin typeface="Arial"/>
-                <a:ea typeface="Arial"/>
-                <a:cs typeface="Arial"/>
-              </a:rPr>
-              <a:t xml:space="preserve">not about generation: generate ten parallel</a:t>
-            </a:r>
-            <a:endParaRPr lang="en-US" sz="1500"/>
-          </a:p>
-          <a:p>
-            <a:pPr marL="0" indent="0">
-              <a:lnSpc>
-                <a:spcPts val="1950"/>
-              </a:lnSpc>
-              <a:spcAft>
-                <a:spcPts val="0"/>
-              </a:spcAft>
-              <a:buNone/>
-            </a:pPr>
-            <a:r>
-              <a:rPr lang="en-US" sz="1500" b="0">
-                <a:solidFill>
-                  <a:srgbClr val="202B33"/>
-                </a:solidFill>
-                <a:latin typeface="Arial"/>
-                <a:ea typeface="Arial"/>
-                <a:cs typeface="Arial"/>
-              </a:rPr>
-              <a:t xml:space="preserve">attempts if you like, as long as a gate</a:t>
-            </a:r>
-            <a:endParaRPr lang="en-US" sz="1500"/>
-          </a:p>
-          <a:p>
-            <a:pPr marL="0" indent="0">
-              <a:lnSpc>
-                <a:spcPts val="1950"/>
-              </a:lnSpc>
-              <a:spcAft>
-                <a:spcPts val="0"/>
-              </a:spcAft>
-              <a:buNone/>
-            </a:pPr>
-            <a:r>
-              <a:rPr lang="en-US" sz="1500" b="0">
-                <a:solidFill>
-                  <a:srgbClr val="202B33"/>
-                </a:solidFill>
-                <a:latin typeface="Arial"/>
-                <a:ea typeface="Arial"/>
-                <a:cs typeface="Arial"/>
-              </a:rPr>
-              <a:t xml:space="preserve">collapses them to one candidate before a</a:t>
-            </a:r>
-            <a:endParaRPr lang="en-US" sz="1500"/>
-          </a:p>
-          <a:p>
-            <a:pPr marL="0" indent="0">
-              <a:lnSpc>
-                <a:spcPts val="1950"/>
-              </a:lnSpc>
-              <a:spcAft>
-                <a:spcPts val="0"/>
-              </a:spcAft>
-              <a:buNone/>
-            </a:pPr>
-            <a:r>
-              <a:rPr lang="en-US" sz="1500" b="0">
-                <a:solidFill>
-                  <a:srgbClr val="202B33"/>
-                </a:solidFill>
-                <a:latin typeface="Arial"/>
-                <a:ea typeface="Arial"/>
-                <a:cs typeface="Arial"/>
-              </a:rPr>
-              <a:t xml:space="preserve">human reads any of them. Judging the ten is</a:t>
-            </a:r>
-            <a:endParaRPr lang="en-US" sz="1500"/>
-          </a:p>
-          <a:p>
-            <a:pPr marL="0" indent="0">
-              <a:lnSpc>
-                <a:spcPts val="1950"/>
-              </a:lnSpc>
-              <a:spcAft>
-                <a:spcPts val="0"/>
-              </a:spcAft>
-              <a:buNone/>
-            </a:pPr>
-            <a:r>
-              <a:rPr lang="en-US" sz="1500" b="0">
-                <a:solidFill>
-                  <a:srgbClr val="202B33"/>
-                </a:solidFill>
-                <a:latin typeface="Arial"/>
-                <a:ea typeface="Arial"/>
-                <a:cs typeface="Arial"/>
-              </a:rPr>
-              <a:t xml:space="preserve">Dynamic Scaling's talk, and its Council of</a:t>
-            </a:r>
-            <a:endParaRPr lang="en-US" sz="1500"/>
-          </a:p>
-          <a:p>
-            <a:pPr marL="0" indent="0">
-              <a:lnSpc>
-                <a:spcPts val="1950"/>
-              </a:lnSpc>
-              <a:spcAft>
-                <a:spcPts val="0"/>
-              </a:spcAft>
-              <a:buNone/>
-            </a:pPr>
-            <a:r>
-              <a:rPr lang="en-US" sz="1500" b="0">
-                <a:solidFill>
-                  <a:srgbClr val="202B33"/>
-                </a:solidFill>
-                <a:latin typeface="Arial"/>
-                <a:ea typeface="Arial"/>
-                <a:cs typeface="Arial"/>
-              </a:rPr>
-              <a:t xml:space="preserve">Guards eats nine. This one protects the</a:t>
+              <a:t xml:space="preserve">Second prediction. Feature flags stop being</a:t>
+            </a:r>
+            <a:endParaRPr lang="en-US" sz="1500"/>
+          </a:p>
+          <a:p>
+            <a:pPr marL="0" indent="0">
+              <a:lnSpc>
+                <a:spcPts val="1950"/>
+              </a:lnSpc>
+              <a:spcAft>
+                <a:spcPts val="0"/>
+              </a:spcAft>
+              <a:buNone/>
+            </a:pPr>
+            <a:r>
+              <a:rPr lang="en-US" sz="1500" b="0">
+                <a:solidFill>
+                  <a:srgbClr val="202B33"/>
+                </a:solidFill>
+                <a:latin typeface="Arial"/>
+                <a:ea typeface="Arial"/>
+                <a:cs typeface="Arial"/>
+              </a:rPr>
+              <a:t xml:space="preserve">your deployment tool and become the user's</a:t>
+            </a:r>
+            <a:endParaRPr lang="en-US" sz="1500"/>
+          </a:p>
+          <a:p>
+            <a:pPr marL="0" indent="0">
+              <a:lnSpc>
+                <a:spcPts val="1950"/>
+              </a:lnSpc>
+              <a:spcAft>
+                <a:spcPts val="0"/>
+              </a:spcAft>
+              <a:buNone/>
+            </a:pPr>
+            <a:r>
+              <a:rPr lang="en-US" sz="1500" b="0">
+                <a:solidFill>
+                  <a:srgbClr val="202B33"/>
+                </a:solidFill>
+                <a:latin typeface="Arial"/>
+                <a:ea typeface="Arial"/>
+                <a:cs typeface="Arial"/>
+              </a:rPr>
+              <a:t xml:space="preserve">preference surface. Not a wall of switches:</a:t>
+            </a:r>
+            <a:endParaRPr lang="en-US" sz="1500"/>
+          </a:p>
+          <a:p>
+            <a:pPr marL="0" indent="0">
+              <a:lnSpc>
+                <a:spcPts val="1950"/>
+              </a:lnSpc>
+              <a:spcAft>
+                <a:spcPts val="0"/>
+              </a:spcAft>
+              <a:buNone/>
+            </a:pPr>
+            <a:r>
+              <a:rPr lang="en-US" sz="1500" b="0">
+                <a:solidFill>
+                  <a:srgbClr val="202B33"/>
+                </a:solidFill>
+                <a:latin typeface="Arial"/>
+                <a:ea typeface="Arial"/>
+                <a:cs typeface="Arial"/>
+              </a:rPr>
+              <a:t xml:space="preserve">a profile. Turn on what people who use this</a:t>
+            </a:r>
+            <a:endParaRPr lang="en-US" sz="1500"/>
+          </a:p>
+          <a:p>
+            <a:pPr marL="0" indent="0">
+              <a:lnSpc>
+                <a:spcPts val="1950"/>
+              </a:lnSpc>
+              <a:spcAft>
+                <a:spcPts val="0"/>
+              </a:spcAft>
+              <a:buNone/>
+            </a:pPr>
+            <a:r>
+              <a:rPr lang="en-US" sz="1500" b="0">
+                <a:solidFill>
+                  <a:srgbClr val="202B33"/>
+                </a:solidFill>
+                <a:latin typeface="Arial"/>
+                <a:ea typeface="Arial"/>
+                <a:cs typeface="Arial"/>
+              </a:rPr>
+              <a:t xml:space="preserve">the way I do have turned on. Follow this</a:t>
             </a:r>
             <a:endParaRPr lang="en-US" sz="1500"/>
           </a:p>
@@ -9517,30 +9751,7 @@
                 <a:ea typeface="Arial"/>
                 <a:cs typeface="Arial"/>
               </a:rPr>
-              <a:t xml:space="preserve">person who accepts the one that got</a:t>
-            </a:r>
-            <a:endParaRPr lang="en-US" sz="1500"/>
-          </a:p>
-          <a:p>
-            <a:pPr marL="0" indent="0">
-              <a:lnSpc>
-                <a:spcPts val="1950"/>
-              </a:lnSpc>
-              <a:spcAft>
-                <a:spcPts val="0"/>
-              </a:spcAft>
-              <a:buNone/>
-            </a:pPr>
-            <a:r>
-              <a:rPr lang="en-US" sz="1500" b="0">
-                <a:solidFill>
-                  <a:srgbClr val="202B33"/>
-                </a:solidFill>
-                <a:latin typeface="Arial"/>
-                <a:ea typeface="Arial"/>
-                <a:cs typeface="Arial"/>
-              </a:rPr>
-              <a:t xml:space="preserve">through.</a:t>
+              <a:t xml:space="preserve">person's setup. Adopt my team's.</a:t>
             </a:r>
             <a:endParaRPr lang="en-US" sz="1500"/>
           </a:p>
@@ -9586,306 +9797,168 @@
                 <a:ea typeface="Arial"/>
                 <a:cs typeface="Arial"/>
               </a:rPr>
-              <a:t xml:space="preserve">Smaller variance means reducing surprises</a:t>
-            </a:r>
-            <a:endParaRPr lang="en-US" sz="1500"/>
-          </a:p>
-          <a:p>
-            <a:pPr marL="0" indent="0">
-              <a:lnSpc>
-                <a:spcPts val="1950"/>
-              </a:lnSpc>
-              <a:spcAft>
-                <a:spcPts val="0"/>
-              </a:spcAft>
-              <a:buNone/>
-            </a:pPr>
-            <a:r>
-              <a:rPr lang="en-US" sz="1500" b="0">
-                <a:solidFill>
-                  <a:srgbClr val="202B33"/>
-                </a:solidFill>
-                <a:latin typeface="Arial"/>
-                <a:ea typeface="Arial"/>
-                <a:cs typeface="Arial"/>
-              </a:rPr>
-              <a:t xml:space="preserve">at review. Keep one purpose per diff,</a:t>
-            </a:r>
-            <a:endParaRPr lang="en-US" sz="1500"/>
-          </a:p>
-          <a:p>
-            <a:pPr marL="0" indent="0">
-              <a:lnSpc>
-                <a:spcPts val="1950"/>
-              </a:lnSpc>
-              <a:spcAft>
-                <a:spcPts val="0"/>
-              </a:spcAft>
-              <a:buNone/>
-            </a:pPr>
-            <a:r>
-              <a:rPr lang="en-US" sz="1500" b="0">
-                <a:solidFill>
-                  <a:srgbClr val="202B33"/>
-                </a:solidFill>
-                <a:latin typeface="Arial"/>
-                <a:ea typeface="Arial"/>
-                <a:cs typeface="Arial"/>
-              </a:rPr>
-              <a:t xml:space="preserve">include the behavioral cases, and separate</a:t>
-            </a:r>
-            <a:endParaRPr lang="en-US" sz="1500"/>
-          </a:p>
-          <a:p>
-            <a:pPr marL="0" indent="0">
-              <a:lnSpc>
-                <a:spcPts val="1950"/>
-              </a:lnSpc>
-              <a:spcAft>
-                <a:spcPts val="0"/>
-              </a:spcAft>
-              <a:buNone/>
-            </a:pPr>
-            <a:r>
-              <a:rPr lang="en-US" sz="1500" b="0">
-                <a:solidFill>
-                  <a:srgbClr val="202B33"/>
-                </a:solidFill>
-                <a:latin typeface="Arial"/>
-                <a:ea typeface="Arial"/>
-                <a:cs typeface="Arial"/>
-              </a:rPr>
-              <a:t xml:space="preserve">mechanical changes from policy changes.</a:t>
-            </a:r>
-            <a:endParaRPr lang="en-US" sz="1500"/>
-          </a:p>
-          <a:p>
-            <a:pPr marL="0" indent="0">
-              <a:lnSpc>
-                <a:spcPts val="1950"/>
-              </a:lnSpc>
-              <a:spcAft>
-                <a:spcPts val="0"/>
-              </a:spcAft>
-              <a:buNone/>
-            </a:pPr>
-            <a:r>
-              <a:rPr lang="en-US" sz="1500" b="0">
-                <a:solidFill>
-                  <a:srgbClr val="202B33"/>
-                </a:solidFill>
-                <a:latin typeface="Arial"/>
-                <a:ea typeface="Arial"/>
-                <a:cs typeface="Arial"/>
-              </a:rPr>
-              <a:t xml:space="preserve">Small in line count is useful only when it</a:t>
-            </a:r>
-            <a:endParaRPr lang="en-US" sz="1500"/>
-          </a:p>
-          <a:p>
-            <a:pPr marL="0" indent="0">
-              <a:lnSpc>
-                <a:spcPts val="1950"/>
-              </a:lnSpc>
-              <a:spcAft>
-                <a:spcPts val="0"/>
-              </a:spcAft>
-              <a:buNone/>
-            </a:pPr>
-            <a:r>
-              <a:rPr lang="en-US" sz="1500" b="0">
-                <a:solidFill>
-                  <a:srgbClr val="202B33"/>
-                </a:solidFill>
-                <a:latin typeface="Arial"/>
-                <a:ea typeface="Arial"/>
-                <a:cs typeface="Arial"/>
-              </a:rPr>
-              <a:t xml:space="preserve">is also small in meaning.</a:t>
-            </a:r>
-            <a:endParaRPr lang="en-US" sz="1500"/>
-          </a:p>
-          <a:p>
-            <a:pPr marL="0" indent="0">
-              <a:lnSpc>
-                <a:spcPts val="1950"/>
-              </a:lnSpc>
-              <a:spcAft>
-                <a:spcPts val="0"/>
-              </a:spcAft>
-              <a:buNone/>
-            </a:pPr>
-            <a:r>
-              <a:rPr lang="en-US" sz="1500" b="0">
-                <a:solidFill>
-                  <a:srgbClr val="202B33"/>
-                </a:solidFill>
-                <a:latin typeface="Arial"/>
-                <a:ea typeface="Arial"/>
-                <a:cs typeface="Arial"/>
-              </a:rPr>
-              <a:t xml:space="preserve"/>
-            </a:r>
-            <a:endParaRPr lang="en-US" sz="1500"/>
-          </a:p>
-          <a:p>
-            <a:pPr marL="0" indent="0">
-              <a:lnSpc>
-                <a:spcPts val="1950"/>
-              </a:lnSpc>
-              <a:spcAft>
-                <a:spcPts val="0"/>
-              </a:spcAft>
-              <a:buNone/>
-            </a:pPr>
-            <a:r>
-              <a:rPr lang="en-US" sz="1500" b="0">
-                <a:solidFill>
-                  <a:srgbClr val="202B33"/>
-                </a:solidFill>
-                <a:latin typeface="Arial"/>
-                <a:ea typeface="Arial"/>
-                <a:cs typeface="Arial"/>
-              </a:rPr>
-              <a:t xml:space="preserve">Protect slack by reserving review time and</a:t>
-            </a:r>
-            <a:endParaRPr lang="en-US" sz="1500"/>
-          </a:p>
-          <a:p>
-            <a:pPr marL="0" indent="0">
-              <a:lnSpc>
-                <a:spcPts val="1950"/>
-              </a:lnSpc>
-              <a:spcAft>
-                <a:spcPts val="0"/>
-              </a:spcAft>
-              <a:buNone/>
-            </a:pPr>
-            <a:r>
-              <a:rPr lang="en-US" sz="1500" b="0">
-                <a:solidFill>
-                  <a:srgbClr val="202B33"/>
-                </a:solidFill>
-                <a:latin typeface="Arial"/>
-                <a:ea typeface="Arial"/>
-                <a:cs typeface="Arial"/>
-              </a:rPr>
-              <a:t xml:space="preserve">limiting work in progress. If the reviewer</a:t>
-            </a:r>
-            <a:endParaRPr lang="en-US" sz="1500"/>
-          </a:p>
-          <a:p>
-            <a:pPr marL="0" indent="0">
-              <a:lnSpc>
-                <a:spcPts val="1950"/>
-              </a:lnSpc>
-              <a:spcAft>
-                <a:spcPts val="0"/>
-              </a:spcAft>
-              <a:buNone/>
-            </a:pPr>
-            <a:r>
-              <a:rPr lang="en-US" sz="1500" b="0">
-                <a:solidFill>
-                  <a:srgbClr val="202B33"/>
-                </a:solidFill>
-                <a:latin typeface="Arial"/>
-                <a:ea typeface="Arial"/>
-                <a:cs typeface="Arial"/>
-              </a:rPr>
-              <a:t xml:space="preserve">is on call, their calendar is not eight</a:t>
-            </a:r>
-            <a:endParaRPr lang="en-US" sz="1500"/>
-          </a:p>
-          <a:p>
-            <a:pPr marL="0" indent="0">
-              <a:lnSpc>
-                <a:spcPts val="1950"/>
-              </a:lnSpc>
-              <a:spcAft>
-                <a:spcPts val="0"/>
-              </a:spcAft>
-              <a:buNone/>
-            </a:pPr>
-            <a:r>
-              <a:rPr lang="en-US" sz="1500" b="0">
-                <a:solidFill>
-                  <a:srgbClr val="202B33"/>
-                </a:solidFill>
-                <a:latin typeface="Arial"/>
-                <a:ea typeface="Arial"/>
-                <a:cs typeface="Arial"/>
-              </a:rPr>
-              <a:t xml:space="preserve">hours of service capacity. Measure</a:t>
-            </a:r>
-            <a:endParaRPr lang="en-US" sz="1500"/>
-          </a:p>
-          <a:p>
-            <a:pPr marL="0" indent="0">
-              <a:lnSpc>
-                <a:spcPts val="1950"/>
-              </a:lnSpc>
-              <a:spcAft>
-                <a:spcPts val="0"/>
-              </a:spcAft>
-              <a:buNone/>
-            </a:pPr>
-            <a:r>
-              <a:rPr lang="en-US" sz="1500" b="0">
-                <a:solidFill>
-                  <a:srgbClr val="202B33"/>
-                </a:solidFill>
-                <a:latin typeface="Arial"/>
-                <a:ea typeface="Arial"/>
-                <a:cs typeface="Arial"/>
-              </a:rPr>
-              <a:t xml:space="preserve">interruptions before declaring them</a:t>
-            </a:r>
-            <a:endParaRPr lang="en-US" sz="1500"/>
-          </a:p>
-          <a:p>
-            <a:pPr marL="0" indent="0">
-              <a:lnSpc>
-                <a:spcPts val="1950"/>
-              </a:lnSpc>
-              <a:spcAft>
-                <a:spcPts val="0"/>
-              </a:spcAft>
-              <a:buNone/>
-            </a:pPr>
-            <a:r>
-              <a:rPr lang="en-US" sz="1500" b="0">
-                <a:solidFill>
-                  <a:srgbClr val="202B33"/>
-                </a:solidFill>
-                <a:latin typeface="Arial"/>
-                <a:ea typeface="Arial"/>
-                <a:cs typeface="Arial"/>
-              </a:rPr>
-              <a:t xml:space="preserve">underutilized. Pilot these changes on one</a:t>
-            </a:r>
-            <a:endParaRPr lang="en-US" sz="1500"/>
-          </a:p>
-          <a:p>
-            <a:pPr marL="0" indent="0">
-              <a:lnSpc>
-                <a:spcPts val="1950"/>
-              </a:lnSpc>
-              <a:spcAft>
-                <a:spcPts val="0"/>
-              </a:spcAft>
-              <a:buNone/>
-            </a:pPr>
-            <a:r>
-              <a:rPr lang="en-US" sz="1500" b="0">
-                <a:solidFill>
-                  <a:srgbClr val="202B33"/>
-                </a:solidFill>
-                <a:latin typeface="Arial"/>
-                <a:ea typeface="Arial"/>
-                <a:cs typeface="Arial"/>
-              </a:rPr>
-              <a:t xml:space="preserve">recurring workflow and keep the baseline.</a:t>
+              <a:t xml:space="preserve">This is not new, it is unevenly</a:t>
+            </a:r>
+            <a:endParaRPr lang="en-US" sz="1500"/>
+          </a:p>
+          <a:p>
+            <a:pPr marL="0" indent="0">
+              <a:lnSpc>
+                <a:spcPts val="1950"/>
+              </a:lnSpc>
+              <a:spcAft>
+                <a:spcPts val="0"/>
+              </a:spcAft>
+              <a:buNone/>
+            </a:pPr>
+            <a:r>
+              <a:rPr lang="en-US" sz="1500" b="0">
+                <a:solidFill>
+                  <a:srgbClr val="202B33"/>
+                </a:solidFill>
+                <a:latin typeface="Arial"/>
+                <a:ea typeface="Arial"/>
+                <a:cs typeface="Arial"/>
+              </a:rPr>
+              <a:t xml:space="preserve">distributed. Dotfiles. VS Code extension</a:t>
+            </a:r>
+            <a:endParaRPr lang="en-US" sz="1500"/>
+          </a:p>
+          <a:p>
+            <a:pPr marL="0" indent="0">
+              <a:lnSpc>
+                <a:spcPts val="1950"/>
+              </a:lnSpc>
+              <a:spcAft>
+                <a:spcPts val="0"/>
+              </a:spcAft>
+              <a:buNone/>
+            </a:pPr>
+            <a:r>
+              <a:rPr lang="en-US" sz="1500" b="0">
+                <a:solidFill>
+                  <a:srgbClr val="202B33"/>
+                </a:solidFill>
+                <a:latin typeface="Arial"/>
+                <a:ea typeface="Arial"/>
+                <a:cs typeface="Arial"/>
+              </a:rPr>
+              <a:t xml:space="preserve">packs. Home Assistant blueprints. Excel</a:t>
+            </a:r>
+            <a:endParaRPr lang="en-US" sz="1500"/>
+          </a:p>
+          <a:p>
+            <a:pPr marL="0" indent="0">
+              <a:lnSpc>
+                <a:spcPts val="1950"/>
+              </a:lnSpc>
+              <a:spcAft>
+                <a:spcPts val="0"/>
+              </a:spcAft>
+              <a:buNone/>
+            </a:pPr>
+            <a:r>
+              <a:rPr lang="en-US" sz="1500" b="0">
+                <a:solidFill>
+                  <a:srgbClr val="202B33"/>
+                </a:solidFill>
+                <a:latin typeface="Arial"/>
+                <a:ea typeface="Arial"/>
+                <a:cs typeface="Arial"/>
+              </a:rPr>
+              <a:t xml:space="preserve">templates. Figma community files. Mod</a:t>
+            </a:r>
+            <a:endParaRPr lang="en-US" sz="1500"/>
+          </a:p>
+          <a:p>
+            <a:pPr marL="0" indent="0">
+              <a:lnSpc>
+                <a:spcPts val="1950"/>
+              </a:lnSpc>
+              <a:spcAft>
+                <a:spcPts val="0"/>
+              </a:spcAft>
+              <a:buNone/>
+            </a:pPr>
+            <a:r>
+              <a:rPr lang="en-US" sz="1500" b="0">
+                <a:solidFill>
+                  <a:srgbClr val="202B33"/>
+                </a:solidFill>
+                <a:latin typeface="Arial"/>
+                <a:ea typeface="Arial"/>
+                <a:cs typeface="Arial"/>
+              </a:rPr>
+              <a:t xml:space="preserve">lists. Developers have been shipping</a:t>
+            </a:r>
+            <a:endParaRPr lang="en-US" sz="1500"/>
+          </a:p>
+          <a:p>
+            <a:pPr marL="0" indent="0">
+              <a:lnSpc>
+                <a:spcPts val="1950"/>
+              </a:lnSpc>
+              <a:spcAft>
+                <a:spcPts val="0"/>
+              </a:spcAft>
+              <a:buNone/>
+            </a:pPr>
+            <a:r>
+              <a:rPr lang="en-US" sz="1500" b="0">
+                <a:solidFill>
+                  <a:srgbClr val="202B33"/>
+                </a:solidFill>
+                <a:latin typeface="Arial"/>
+                <a:ea typeface="Arial"/>
+                <a:cs typeface="Arial"/>
+              </a:rPr>
+              <a:t xml:space="preserve">configuration to each other as a social</a:t>
+            </a:r>
+            <a:endParaRPr lang="en-US" sz="1500"/>
+          </a:p>
+          <a:p>
+            <a:pPr marL="0" indent="0">
+              <a:lnSpc>
+                <a:spcPts val="1950"/>
+              </a:lnSpc>
+              <a:spcAft>
+                <a:spcPts val="0"/>
+              </a:spcAft>
+              <a:buNone/>
+            </a:pPr>
+            <a:r>
+              <a:rPr lang="en-US" sz="1500" b="0">
+                <a:solidFill>
+                  <a:srgbClr val="202B33"/>
+                </a:solidFill>
+                <a:latin typeface="Arial"/>
+                <a:ea typeface="Arial"/>
+                <a:cs typeface="Arial"/>
+              </a:rPr>
+              <a:t xml:space="preserve">object for thirty years and we never</a:t>
+            </a:r>
+            <a:endParaRPr lang="en-US" sz="1500"/>
+          </a:p>
+          <a:p>
+            <a:pPr marL="0" indent="0">
+              <a:lnSpc>
+                <a:spcPts val="1950"/>
+              </a:lnSpc>
+              <a:spcAft>
+                <a:spcPts val="0"/>
+              </a:spcAft>
+              <a:buNone/>
+            </a:pPr>
+            <a:r>
+              <a:rPr lang="en-US" sz="1500" b="0">
+                <a:solidFill>
+                  <a:srgbClr val="202B33"/>
+                </a:solidFill>
+                <a:latin typeface="Arial"/>
+                <a:ea typeface="Arial"/>
+                <a:cs typeface="Arial"/>
+              </a:rPr>
+              <a:t xml:space="preserve">offered it to anybody else.</a:t>
             </a:r>
             <a:endParaRPr lang="en-US" sz="1500"/>
           </a:p>
@@ -9934,7 +10007,7 @@
                 <a:ea typeface="Arial"/>
                 <a:cs typeface="Arial"/>
               </a:rPr>
-              <a:t xml:space="preserve">Code Is Cheap. Judgment Is Expensive.</a:t>
+              <a:t xml:space="preserve">Turn Your Thinkin' Tokens Up to 11</a:t>
             </a:r>
             <a:endParaRPr lang="en-US" sz="975"/>
           </a:p>
@@ -10114,7 +10187,7 @@
                 <a:ea typeface="Arial"/>
                 <a:cs typeface="Arial"/>
               </a:rPr>
-              <a:t xml:space="preserve">Knowing when to stop</a:t>
+              <a:t xml:space="preserve">Knowing what not to ship</a:t>
             </a:r>
             <a:endParaRPr lang="en-US" sz="2550"/>
           </a:p>
@@ -10122,69 +10195,14 @@
       </p:sp>
       <p:sp>
         <p:nvSpPr>
-          <p:cNvPr id="4" name="Image background"/>
-          <p:cNvSpPr/>
-          <p:nvPr/>
-        </p:nvSpPr>
-        <p:spPr>
-          <a:xfrm>
-            <a:off x="1554480" y="1781175"/>
-            <a:ext cx="6949440" cy="2714625"/>
-          </a:xfrm>
-          <a:prstGeom prst="rect">
-            <a:avLst/>
-          </a:prstGeom>
-          <a:solidFill>
-            <a:srgbClr val="161D26"/>
-          </a:solidFill>
-          <a:ln>
-            <a:noFill/>
-          </a:ln>
-        </p:spPr>
-      </p:sp>
-      <p:pic>
-        <p:nvPicPr>
-          <p:cNvPr id="5" name="8de9aa7b0e58010a491d155d2a0aaafbe5d48c9d4da5759fad5af686b3fce993" descr="Kingman: queue wait vs reviewer utilization, variability factor one"/>
-          <p:cNvPicPr>
-            <a:picLocks noChangeAspect="1"/>
-          </p:cNvPicPr>
-          <p:nvPr/>
-        </p:nvPicPr>
-        <p:blipFill>
-          <a:blip r:embed="rIdImage1">
-            <a:extLst>
-              <a:ext uri="{96DAC541-7B7A-43D3-8B79-37D633B846F1}">
-                <asvg:svgBlip xmlns:asvg="http://schemas.microsoft.com/office/drawing/2016/SVG/main" r:embed="rIdSvg1"/>
-              </a:ext>
-            </a:extLst>
-          </a:blip>
-          <a:stretch>
-            <a:fillRect/>
-          </a:stretch>
-        </p:blipFill>
-        <p:spPr>
-          <a:xfrm>
-            <a:off x="1554480" y="1781175"/>
-            <a:ext cx="6949440" cy="2714625"/>
-          </a:xfrm>
-          <a:prstGeom prst="rect">
-            <a:avLst/>
-          </a:prstGeom>
-          <a:ln>
-            <a:noFill/>
-          </a:ln>
-        </p:spPr>
-      </p:pic>
-      <p:sp>
-        <p:nvSpPr>
-          <p:cNvPr id="6" name="Text 6"/>
+          <p:cNvPr id="4" name="Text 4"/>
           <p:cNvSpPr txBox="1"/>
           <p:nvPr/>
         </p:nvSpPr>
         <p:spPr>
           <a:xfrm>
-            <a:off x="457200" y="4648200"/>
-            <a:ext cx="4352925" cy="2647950"/>
+            <a:off x="457200" y="1971675"/>
+            <a:ext cx="4352925" cy="5314950"/>
           </a:xfrm>
           <a:prstGeom prst="rect">
             <a:avLst/>
@@ -10202,38 +10220,38 @@
           <a:p>
             <a:pPr marL="0" indent="0">
               <a:lnSpc>
-                <a:spcPts val="1575"/>
-              </a:lnSpc>
-              <a:spcAft>
-                <a:spcPts val="0"/>
-              </a:spcAft>
-              <a:buNone/>
-            </a:pPr>
-            <a:r>
-              <a:rPr lang="en-US" sz="1200" b="0">
-                <a:solidFill>
-                  <a:srgbClr val="202B33"/>
-                </a:solidFill>
-                <a:latin typeface="Arial"/>
-                <a:ea typeface="Arial"/>
-                <a:cs typeface="Arial"/>
-              </a:rPr>
-              <a:t xml:space="preserve">What should exist? Does it work?</a:t>
-            </a:r>
-            <a:endParaRPr lang="en-US" sz="1200"/>
-          </a:p>
-          <a:p>
-            <a:pPr marL="0" indent="0">
-              <a:lnSpc>
-                <a:spcPts val="1575"/>
-              </a:lnSpc>
-              <a:spcAft>
-                <a:spcPts val="0"/>
-              </a:spcAft>
-              <a:buNone/>
-            </a:pPr>
-            <a:r>
-              <a:rPr lang="en-US" sz="1200" b="0">
+                <a:spcPts val="1950"/>
+              </a:lnSpc>
+              <a:spcAft>
+                <a:spcPts val="0"/>
+              </a:spcAft>
+              <a:buNone/>
+            </a:pPr>
+            <a:r>
+              <a:rPr lang="en-US" sz="1500" b="0">
+                <a:solidFill>
+                  <a:srgbClr val="202B33"/>
+                </a:solidFill>
+                <a:latin typeface="Arial"/>
+                <a:ea typeface="Arial"/>
+                <a:cs typeface="Arial"/>
+              </a:rPr>
+              <a:t xml:space="preserve">Don't count what it cost you to build.</a:t>
+            </a:r>
+            <a:endParaRPr lang="en-US" sz="1500"/>
+          </a:p>
+          <a:p>
+            <a:pPr marL="0" indent="0">
+              <a:lnSpc>
+                <a:spcPts val="1950"/>
+              </a:lnSpc>
+              <a:spcAft>
+                <a:spcPts val="0"/>
+              </a:spcAft>
+              <a:buNone/>
+            </a:pPr>
+            <a:r>
+              <a:rPr lang="en-US" sz="1500" b="0">
                 <a:solidFill>
                   <a:srgbClr val="202B33"/>
                 </a:solidFill>
@@ -10243,43 +10261,43 @@
               </a:rPr>
               <a:t xml:space="preserve"/>
             </a:r>
-            <a:endParaRPr lang="en-US" sz="1200"/>
-          </a:p>
-          <a:p>
-            <a:pPr marL="0" indent="0">
-              <a:lnSpc>
-                <a:spcPts val="1575"/>
-              </a:lnSpc>
-              <a:spcAft>
-                <a:spcPts val="0"/>
-              </a:spcAft>
-              <a:buNone/>
-            </a:pPr>
-            <a:r>
-              <a:rPr lang="en-US" sz="1200" b="0">
-                <a:solidFill>
-                  <a:srgbClr val="202B33"/>
-                </a:solidFill>
-                <a:latin typeface="Arial"/>
-                <a:ea typeface="Arial"/>
-                <a:cs typeface="Arial"/>
-              </a:rPr>
-              <a:t xml:space="preserve">Is it worth maintaining?</a:t>
-            </a:r>
-            <a:endParaRPr lang="en-US" sz="1200"/>
-          </a:p>
-          <a:p>
-            <a:pPr marL="0" indent="0">
-              <a:lnSpc>
-                <a:spcPts val="1575"/>
-              </a:lnSpc>
-              <a:spcAft>
-                <a:spcPts val="0"/>
-              </a:spcAft>
-              <a:buNone/>
-            </a:pPr>
-            <a:r>
-              <a:rPr lang="en-US" sz="1200" b="0">
+            <a:endParaRPr lang="en-US" sz="1500"/>
+          </a:p>
+          <a:p>
+            <a:pPr marL="0" indent="0">
+              <a:lnSpc>
+                <a:spcPts val="1950"/>
+              </a:lnSpc>
+              <a:spcAft>
+                <a:spcPts val="0"/>
+              </a:spcAft>
+              <a:buNone/>
+            </a:pPr>
+            <a:r>
+              <a:rPr lang="en-US" sz="1500" b="0">
+                <a:solidFill>
+                  <a:srgbClr val="202B33"/>
+                </a:solidFill>
+                <a:latin typeface="Arial"/>
+                <a:ea typeface="Arial"/>
+                <a:cs typeface="Arial"/>
+              </a:rPr>
+              <a:t xml:space="preserve">Count what it costs them to relearn.</a:t>
+            </a:r>
+            <a:endParaRPr lang="en-US" sz="1500"/>
+          </a:p>
+          <a:p>
+            <a:pPr marL="0" indent="0">
+              <a:lnSpc>
+                <a:spcPts val="1950"/>
+              </a:lnSpc>
+              <a:spcAft>
+                <a:spcPts val="0"/>
+              </a:spcAft>
+              <a:buNone/>
+            </a:pPr>
+            <a:r>
+              <a:rPr lang="en-US" sz="1500" b="0">
                 <a:solidFill>
                   <a:srgbClr val="202B33"/>
                 </a:solidFill>
@@ -10289,66 +10307,135 @@
               </a:rPr>
               <a:t xml:space="preserve"/>
             </a:r>
-            <a:endParaRPr lang="en-US" sz="1200"/>
-          </a:p>
-          <a:p>
-            <a:pPr marL="0" indent="0">
-              <a:lnSpc>
-                <a:spcPts val="1575"/>
-              </a:lnSpc>
-              <a:spcAft>
-                <a:spcPts val="0"/>
-              </a:spcAft>
-              <a:buNone/>
-            </a:pPr>
-            <a:r>
-              <a:rPr lang="en-US" sz="1200" b="0">
-                <a:solidFill>
-                  <a:srgbClr val="202B33"/>
-                </a:solidFill>
-                <a:latin typeface="Arial"/>
-                <a:ea typeface="Arial"/>
-                <a:cs typeface="Arial"/>
-              </a:rPr>
-              <a:t xml:space="preserve">Back to the curve. The reviewer did not get slower.</a:t>
-            </a:r>
-            <a:endParaRPr lang="en-US" sz="1200"/>
-          </a:p>
-          <a:p>
-            <a:pPr marL="0" indent="0">
-              <a:lnSpc>
-                <a:spcPts val="1575"/>
-              </a:lnSpc>
-              <a:spcAft>
-                <a:spcPts val="0"/>
-              </a:spcAft>
-              <a:buNone/>
-            </a:pPr>
-            <a:r>
-              <a:rPr lang="en-US" sz="1200" b="0">
-                <a:solidFill>
-                  <a:srgbClr val="202B33"/>
-                </a:solidFill>
-                <a:latin typeface="Arial"/>
-                <a:ea typeface="Arial"/>
-                <a:cs typeface="Arial"/>
-              </a:rPr>
-              <a:t xml:space="preserve">We filled the space that let them absorb uneven work.</a:t>
-            </a:r>
-            <a:endParaRPr lang="en-US" sz="1200"/>
-          </a:p>
-          <a:p>
-            <a:pPr marL="0" indent="0">
-              <a:lnSpc>
-                <a:spcPts val="1575"/>
-              </a:lnSpc>
-              <a:spcAft>
-                <a:spcPts val="0"/>
-              </a:spcAft>
-              <a:buNone/>
-            </a:pPr>
-            <a:r>
-              <a:rPr lang="en-US" sz="1200" b="0">
+            <a:endParaRPr lang="en-US" sz="1500"/>
+          </a:p>
+          <a:p>
+            <a:pPr marL="0" indent="0">
+              <a:lnSpc>
+                <a:spcPts val="1950"/>
+              </a:lnSpc>
+              <a:spcAft>
+                <a:spcPts val="0"/>
+              </a:spcAft>
+              <a:buNone/>
+            </a:pPr>
+            <a:r>
+              <a:rPr lang="en-US" sz="1500" b="0">
+                <a:solidFill>
+                  <a:srgbClr val="202B33"/>
+                </a:solidFill>
+                <a:latin typeface="Arial"/>
+                <a:ea typeface="Arial"/>
+                <a:cs typeface="Arial"/>
+              </a:rPr>
+              <a:t xml:space="preserve">Back to the two tracks. Forty-six releases,</a:t>
+            </a:r>
+            <a:endParaRPr lang="en-US" sz="1500"/>
+          </a:p>
+          <a:p>
+            <a:pPr marL="0" indent="0">
+              <a:lnSpc>
+                <a:spcPts val="1950"/>
+              </a:lnSpc>
+              <a:spcAft>
+                <a:spcPts val="0"/>
+              </a:spcAft>
+              <a:buNone/>
+            </a:pPr>
+            <a:r>
+              <a:rPr lang="en-US" sz="1500" b="0">
+                <a:solidFill>
+                  <a:srgbClr val="202B33"/>
+                </a:solidFill>
+                <a:latin typeface="Arial"/>
+                <a:ea typeface="Arial"/>
+                <a:cs typeface="Arial"/>
+              </a:rPr>
+              <a:t xml:space="preserve">four sessions. You did not get slower and</a:t>
+            </a:r>
+            <a:endParaRPr lang="en-US" sz="1500"/>
+          </a:p>
+          <a:p>
+            <a:pPr marL="0" indent="0">
+              <a:lnSpc>
+                <a:spcPts val="1950"/>
+              </a:lnSpc>
+              <a:spcAft>
+                <a:spcPts val="0"/>
+              </a:spcAft>
+              <a:buNone/>
+            </a:pPr>
+            <a:r>
+              <a:rPr lang="en-US" sz="1500" b="0">
+                <a:solidFill>
+                  <a:srgbClr val="202B33"/>
+                </a:solidFill>
+                <a:latin typeface="Arial"/>
+                <a:ea typeface="Arial"/>
+                <a:cs typeface="Arial"/>
+              </a:rPr>
+              <a:t xml:space="preserve">she did not get dumber. You filled the</a:t>
+            </a:r>
+            <a:endParaRPr lang="en-US" sz="1500"/>
+          </a:p>
+          <a:p>
+            <a:pPr marL="0" indent="0">
+              <a:lnSpc>
+                <a:spcPts val="1950"/>
+              </a:lnSpc>
+              <a:spcAft>
+                <a:spcPts val="0"/>
+              </a:spcAft>
+              <a:buNone/>
+            </a:pPr>
+            <a:r>
+              <a:rPr lang="en-US" sz="1500" b="0">
+                <a:solidFill>
+                  <a:srgbClr val="202B33"/>
+                </a:solidFill>
+                <a:latin typeface="Arial"/>
+                <a:ea typeface="Arial"/>
+                <a:cs typeface="Arial"/>
+              </a:rPr>
+              <a:t xml:space="preserve">space between her visits with work she has</a:t>
+            </a:r>
+            <a:endParaRPr lang="en-US" sz="1500"/>
+          </a:p>
+          <a:p>
+            <a:pPr marL="0" indent="0">
+              <a:lnSpc>
+                <a:spcPts val="1950"/>
+              </a:lnSpc>
+              <a:spcAft>
+                <a:spcPts val="0"/>
+              </a:spcAft>
+              <a:buNone/>
+            </a:pPr>
+            <a:r>
+              <a:rPr lang="en-US" sz="1500" b="0">
+                <a:solidFill>
+                  <a:srgbClr val="202B33"/>
+                </a:solidFill>
+                <a:latin typeface="Arial"/>
+                <a:ea typeface="Arial"/>
+                <a:cs typeface="Arial"/>
+              </a:rPr>
+              <a:t xml:space="preserve">to do.</a:t>
+            </a:r>
+            <a:endParaRPr lang="en-US" sz="1500"/>
+          </a:p>
+          <a:p>
+            <a:pPr marL="0" indent="0">
+              <a:lnSpc>
+                <a:spcPts val="1950"/>
+              </a:lnSpc>
+              <a:spcAft>
+                <a:spcPts val="0"/>
+              </a:spcAft>
+              <a:buNone/>
+            </a:pPr>
+            <a:r>
+              <a:rPr lang="en-US" sz="1500" b="0">
                 <a:solidFill>
                   <a:srgbClr val="202B33"/>
                 </a:solidFill>
@@ -10358,43 +10445,43 @@
               </a:rPr>
               <a:t xml:space="preserve"/>
             </a:r>
-            <a:endParaRPr lang="en-US" sz="1200"/>
-          </a:p>
-          <a:p>
-            <a:pPr marL="0" indent="0">
-              <a:lnSpc>
-                <a:spcPts val="1575"/>
-              </a:lnSpc>
-              <a:spcAft>
-                <a:spcPts val="0"/>
-              </a:spcAft>
-              <a:buNone/>
-            </a:pPr>
-            <a:r>
-              <a:rPr lang="en-US" sz="1200" b="0">
-                <a:solidFill>
-                  <a:srgbClr val="202B33"/>
-                </a:solidFill>
-                <a:latin typeface="Arial"/>
-                <a:ea typeface="Arial"/>
-                <a:cs typeface="Arial"/>
-              </a:rPr>
-              <a:t xml:space="preserve">Ninety-five percent utilization is not efficiency. It</a:t>
-            </a:r>
-            <a:endParaRPr lang="en-US" sz="1200"/>
+            <a:endParaRPr lang="en-US" sz="1500"/>
+          </a:p>
+          <a:p>
+            <a:pPr marL="0" indent="0">
+              <a:lnSpc>
+                <a:spcPts val="1950"/>
+              </a:lnSpc>
+              <a:spcAft>
+                <a:spcPts val="0"/>
+              </a:spcAft>
+              <a:buNone/>
+            </a:pPr>
+            <a:r>
+              <a:rPr lang="en-US" sz="1500" b="0">
+                <a:solidFill>
+                  <a:srgbClr val="202B33"/>
+                </a:solidFill>
+                <a:latin typeface="Arial"/>
+                <a:ea typeface="Arial"/>
+                <a:cs typeface="Arial"/>
+              </a:rPr>
+              <a:t xml:space="preserve">Turn the reasoning up as far as it goes. It</a:t>
+            </a:r>
+            <a:endParaRPr lang="en-US" sz="1500"/>
           </a:p>
         </p:txBody>
       </p:sp>
       <p:sp>
         <p:nvSpPr>
-          <p:cNvPr id="7" name="Text 7"/>
+          <p:cNvPr id="5" name="Text 5"/>
           <p:cNvSpPr txBox="1"/>
           <p:nvPr/>
         </p:nvSpPr>
         <p:spPr>
           <a:xfrm>
-            <a:off x="5238750" y="4648200"/>
-            <a:ext cx="4362450" cy="2647950"/>
+            <a:off x="5238750" y="1971675"/>
+            <a:ext cx="4362450" cy="5314950"/>
           </a:xfrm>
           <a:prstGeom prst="rect">
             <a:avLst/>
@@ -10412,107 +10499,153 @@
           <a:p>
             <a:pPr marL="0" indent="0">
               <a:lnSpc>
-                <a:spcPts val="1575"/>
-              </a:lnSpc>
-              <a:spcAft>
-                <a:spcPts val="0"/>
-              </a:spcAft>
-              <a:buNone/>
-            </a:pPr>
-            <a:r>
-              <a:rPr lang="en-US" sz="1200" b="0">
-                <a:solidFill>
-                  <a:srgbClr val="202B33"/>
-                </a:solidFill>
-                <a:latin typeface="Arial"/>
-                <a:ea typeface="Arial"/>
-                <a:cs typeface="Arial"/>
-              </a:rPr>
-              <a:t xml:space="preserve">is a nineteen-times wait with good posture. Argue</a:t>
-            </a:r>
-            <a:endParaRPr lang="en-US" sz="1200"/>
-          </a:p>
-          <a:p>
-            <a:pPr marL="0" indent="0">
-              <a:lnSpc>
-                <a:spcPts val="1575"/>
-              </a:lnSpc>
-              <a:spcAft>
-                <a:spcPts val="0"/>
-              </a:spcAft>
-              <a:buNone/>
-            </a:pPr>
-            <a:r>
-              <a:rPr lang="en-US" sz="1200" b="0">
-                <a:solidFill>
-                  <a:srgbClr val="202B33"/>
-                </a:solidFill>
-                <a:latin typeface="Arial"/>
-                <a:ea typeface="Arial"/>
-                <a:cs typeface="Arial"/>
-              </a:rPr>
-              <a:t xml:space="preserve">with the model by measuring arrivals, service time,</a:t>
-            </a:r>
-            <a:endParaRPr lang="en-US" sz="1200"/>
-          </a:p>
-          <a:p>
-            <a:pPr marL="0" indent="0">
-              <a:lnSpc>
-                <a:spcPts val="1575"/>
-              </a:lnSpc>
-              <a:spcAft>
-                <a:spcPts val="0"/>
-              </a:spcAft>
-              <a:buNone/>
-            </a:pPr>
-            <a:r>
-              <a:rPr lang="en-US" sz="1200" b="0">
-                <a:solidFill>
-                  <a:srgbClr val="202B33"/>
-                </a:solidFill>
-                <a:latin typeface="Arial"/>
-                <a:ea typeface="Arial"/>
-                <a:cs typeface="Arial"/>
-              </a:rPr>
-              <a:t xml:space="preserve">and variability. You cannot argue the queue away by</a:t>
-            </a:r>
-            <a:endParaRPr lang="en-US" sz="1200"/>
-          </a:p>
-          <a:p>
-            <a:pPr marL="0" indent="0">
-              <a:lnSpc>
-                <a:spcPts val="1575"/>
-              </a:lnSpc>
-              <a:spcAft>
-                <a:spcPts val="0"/>
-              </a:spcAft>
-              <a:buNone/>
-            </a:pPr>
-            <a:r>
-              <a:rPr lang="en-US" sz="1200" b="0">
-                <a:solidFill>
-                  <a:srgbClr val="202B33"/>
-                </a:solidFill>
-                <a:latin typeface="Arial"/>
-                <a:ea typeface="Arial"/>
-                <a:cs typeface="Arial"/>
-              </a:rPr>
-              <a:t xml:space="preserve">pointing at how quickly the code appeared.</a:t>
-            </a:r>
-            <a:endParaRPr lang="en-US" sz="1200"/>
-          </a:p>
-          <a:p>
-            <a:pPr marL="0" indent="0">
-              <a:lnSpc>
-                <a:spcPts val="1575"/>
-              </a:lnSpc>
-              <a:spcAft>
-                <a:spcPts val="0"/>
-              </a:spcAft>
-              <a:buNone/>
-            </a:pPr>
-            <a:r>
-              <a:rPr lang="en-US" sz="1200" b="0">
+                <a:spcPts val="1950"/>
+              </a:lnSpc>
+              <a:spcAft>
+                <a:spcPts val="0"/>
+              </a:spcAft>
+              <a:buNone/>
+            </a:pPr>
+            <a:r>
+              <a:rPr lang="en-US" sz="1500" b="0">
+                <a:solidFill>
+                  <a:srgbClr val="202B33"/>
+                </a:solidFill>
+                <a:latin typeface="Arial"/>
+                <a:ea typeface="Arial"/>
+                <a:cs typeface="Arial"/>
+              </a:rPr>
+              <a:t xml:space="preserve">will hand you a better-argued plan for a</a:t>
+            </a:r>
+            <a:endParaRPr lang="en-US" sz="1500"/>
+          </a:p>
+          <a:p>
+            <a:pPr marL="0" indent="0">
+              <a:lnSpc>
+                <a:spcPts val="1950"/>
+              </a:lnSpc>
+              <a:spcAft>
+                <a:spcPts val="0"/>
+              </a:spcAft>
+              <a:buNone/>
+            </a:pPr>
+            <a:r>
+              <a:rPr lang="en-US" sz="1500" b="0">
+                <a:solidFill>
+                  <a:srgbClr val="202B33"/>
+                </a:solidFill>
+                <a:latin typeface="Arial"/>
+                <a:ea typeface="Arial"/>
+                <a:cs typeface="Arial"/>
+              </a:rPr>
+              <a:t xml:space="preserve">market it has never seen. The part it</a:t>
+            </a:r>
+            <a:endParaRPr lang="en-US" sz="1500"/>
+          </a:p>
+          <a:p>
+            <a:pPr marL="0" indent="0">
+              <a:lnSpc>
+                <a:spcPts val="1950"/>
+              </a:lnSpc>
+              <a:spcAft>
+                <a:spcPts val="0"/>
+              </a:spcAft>
+              <a:buNone/>
+            </a:pPr>
+            <a:r>
+              <a:rPr lang="en-US" sz="1500" b="0">
+                <a:solidFill>
+                  <a:srgbClr val="202B33"/>
+                </a:solidFill>
+                <a:latin typeface="Arial"/>
+                <a:ea typeface="Arial"/>
+                <a:cs typeface="Arial"/>
+              </a:rPr>
+              <a:t xml:space="preserve">cannot do is the part you were hired for:</a:t>
+            </a:r>
+            <a:endParaRPr lang="en-US" sz="1500"/>
+          </a:p>
+          <a:p>
+            <a:pPr marL="0" indent="0">
+              <a:lnSpc>
+                <a:spcPts val="1950"/>
+              </a:lnSpc>
+              <a:spcAft>
+                <a:spcPts val="0"/>
+              </a:spcAft>
+              <a:buNone/>
+            </a:pPr>
+            <a:r>
+              <a:rPr lang="en-US" sz="1500" b="0">
+                <a:solidFill>
+                  <a:srgbClr val="202B33"/>
+                </a:solidFill>
+                <a:latin typeface="Arial"/>
+                <a:ea typeface="Arial"/>
+                <a:cs typeface="Arial"/>
+              </a:rPr>
+              <a:t xml:space="preserve">knowing which of these your people will</a:t>
+            </a:r>
+            <a:endParaRPr lang="en-US" sz="1500"/>
+          </a:p>
+          <a:p>
+            <a:pPr marL="0" indent="0">
+              <a:lnSpc>
+                <a:spcPts val="1950"/>
+              </a:lnSpc>
+              <a:spcAft>
+                <a:spcPts val="0"/>
+              </a:spcAft>
+              <a:buNone/>
+            </a:pPr>
+            <a:r>
+              <a:rPr lang="en-US" sz="1500" b="0">
+                <a:solidFill>
+                  <a:srgbClr val="202B33"/>
+                </a:solidFill>
+                <a:latin typeface="Arial"/>
+                <a:ea typeface="Arial"/>
+                <a:cs typeface="Arial"/>
+              </a:rPr>
+              <a:t xml:space="preserve">love, and knowing when they can stand to</a:t>
+            </a:r>
+            <a:endParaRPr lang="en-US" sz="1500"/>
+          </a:p>
+          <a:p>
+            <a:pPr marL="0" indent="0">
+              <a:lnSpc>
+                <a:spcPts val="1950"/>
+              </a:lnSpc>
+              <a:spcAft>
+                <a:spcPts val="0"/>
+              </a:spcAft>
+              <a:buNone/>
+            </a:pPr>
+            <a:r>
+              <a:rPr lang="en-US" sz="1500" b="0">
+                <a:solidFill>
+                  <a:srgbClr val="202B33"/>
+                </a:solidFill>
+                <a:latin typeface="Arial"/>
+                <a:ea typeface="Arial"/>
+                <a:cs typeface="Arial"/>
+              </a:rPr>
+              <a:t xml:space="preserve">receive it.</a:t>
+            </a:r>
+            <a:endParaRPr lang="en-US" sz="1500"/>
+          </a:p>
+          <a:p>
+            <a:pPr marL="0" indent="0">
+              <a:lnSpc>
+                <a:spcPts val="1950"/>
+              </a:lnSpc>
+              <a:spcAft>
+                <a:spcPts val="0"/>
+              </a:spcAft>
+              <a:buNone/>
+            </a:pPr>
+            <a:r>
+              <a:rPr lang="en-US" sz="1500" b="0">
                 <a:solidFill>
                   <a:srgbClr val="202B33"/>
                 </a:solidFill>
@@ -10522,82 +10655,82 @@
               </a:rPr>
               <a:t xml:space="preserve"/>
             </a:r>
-            <a:endParaRPr lang="en-US" sz="1200"/>
-          </a:p>
-          <a:p>
-            <a:pPr marL="0" indent="0">
-              <a:lnSpc>
-                <a:spcPts val="1575"/>
-              </a:lnSpc>
-              <a:spcAft>
-                <a:spcPts val="0"/>
-              </a:spcAft>
-              <a:buNone/>
-            </a:pPr>
-            <a:r>
-              <a:rPr lang="en-US" sz="1200" b="0">
-                <a:solidFill>
-                  <a:srgbClr val="202B33"/>
-                </a:solidFill>
-                <a:latin typeface="Arial"/>
-                <a:ea typeface="Arial"/>
-                <a:cs typeface="Arial"/>
-              </a:rPr>
-              <a:t xml:space="preserve">Sometimes the right result is a smaller change.</a:t>
-            </a:r>
-            <a:endParaRPr lang="en-US" sz="1200"/>
-          </a:p>
-          <a:p>
-            <a:pPr marL="0" indent="0">
-              <a:lnSpc>
-                <a:spcPts val="1575"/>
-              </a:lnSpc>
-              <a:spcAft>
-                <a:spcPts val="0"/>
-              </a:spcAft>
-              <a:buNone/>
-            </a:pPr>
-            <a:r>
-              <a:rPr lang="en-US" sz="1200" b="0">
-                <a:solidFill>
-                  <a:srgbClr val="202B33"/>
-                </a:solidFill>
-                <a:latin typeface="Arial"/>
-                <a:ea typeface="Arial"/>
-                <a:cs typeface="Arial"/>
-              </a:rPr>
-              <a:t xml:space="preserve">Sometimes it is no change. Cheap code makes both</a:t>
-            </a:r>
-            <a:endParaRPr lang="en-US" sz="1200"/>
-          </a:p>
-          <a:p>
-            <a:pPr marL="0" indent="0">
-              <a:lnSpc>
-                <a:spcPts val="1575"/>
-              </a:lnSpc>
-              <a:spcAft>
-                <a:spcPts val="0"/>
-              </a:spcAft>
-              <a:buNone/>
-            </a:pPr>
-            <a:r>
-              <a:rPr lang="en-US" sz="1200" b="0">
-                <a:solidFill>
-                  <a:srgbClr val="202B33"/>
-                </a:solidFill>
-                <a:latin typeface="Arial"/>
-                <a:ea typeface="Arial"/>
-                <a:cs typeface="Arial"/>
-              </a:rPr>
-              <a:t xml:space="preserve">decisions more valuable.</a:t>
-            </a:r>
-            <a:endParaRPr lang="en-US" sz="1200"/>
+            <a:endParaRPr lang="en-US" sz="1500"/>
+          </a:p>
+          <a:p>
+            <a:pPr marL="0" indent="0">
+              <a:lnSpc>
+                <a:spcPts val="1950"/>
+              </a:lnSpc>
+              <a:spcAft>
+                <a:spcPts val="0"/>
+              </a:spcAft>
+              <a:buNone/>
+            </a:pPr>
+            <a:r>
+              <a:rPr lang="en-US" sz="1500" b="0">
+                <a:solidFill>
+                  <a:srgbClr val="202B33"/>
+                </a:solidFill>
+                <a:latin typeface="Arial"/>
+                <a:ea typeface="Arial"/>
+                <a:cs typeface="Arial"/>
+              </a:rPr>
+              <a:t xml:space="preserve">Sometimes the right release is a smaller</a:t>
+            </a:r>
+            <a:endParaRPr lang="en-US" sz="1500"/>
+          </a:p>
+          <a:p>
+            <a:pPr marL="0" indent="0">
+              <a:lnSpc>
+                <a:spcPts val="1950"/>
+              </a:lnSpc>
+              <a:spcAft>
+                <a:spcPts val="0"/>
+              </a:spcAft>
+              <a:buNone/>
+            </a:pPr>
+            <a:r>
+              <a:rPr lang="en-US" sz="1500" b="0">
+                <a:solidFill>
+                  <a:srgbClr val="202B33"/>
+                </a:solidFill>
+                <a:latin typeface="Arial"/>
+                <a:ea typeface="Arial"/>
+                <a:cs typeface="Arial"/>
+              </a:rPr>
+              <a:t xml:space="preserve">one. Sometimes it is the same app they</a:t>
+            </a:r>
+            <a:endParaRPr lang="en-US" sz="1500"/>
+          </a:p>
+          <a:p>
+            <a:pPr marL="0" indent="0">
+              <a:lnSpc>
+                <a:spcPts val="1950"/>
+              </a:lnSpc>
+              <a:spcAft>
+                <a:spcPts val="0"/>
+              </a:spcAft>
+              <a:buNone/>
+            </a:pPr>
+            <a:r>
+              <a:rPr lang="en-US" sz="1500" b="0">
+                <a:solidFill>
+                  <a:srgbClr val="202B33"/>
+                </a:solidFill>
+                <a:latin typeface="Arial"/>
+                <a:ea typeface="Arial"/>
+                <a:cs typeface="Arial"/>
+              </a:rPr>
+              <a:t xml:space="preserve">left.</a:t>
+            </a:r>
+            <a:endParaRPr lang="en-US" sz="1500"/>
           </a:p>
         </p:txBody>
       </p:sp>
       <p:sp>
         <p:nvSpPr>
-          <p:cNvPr id="8" name="Text 8"/>
+          <p:cNvPr id="6" name="Text 6"/>
           <p:cNvSpPr txBox="1"/>
           <p:nvPr/>
         </p:nvSpPr>
@@ -10638,7 +10771,7 @@
                 <a:ea typeface="Arial"/>
                 <a:cs typeface="Arial"/>
               </a:rPr>
-              <a:t xml:space="preserve">Code Is Cheap. Judgment Is Expensive.</a:t>
+              <a:t xml:space="preserve">Turn Your Thinkin' Tokens Up to 11</a:t>
             </a:r>
             <a:endParaRPr lang="en-US" sz="975"/>
           </a:p>
@@ -10646,7 +10779,7 @@
       </p:sp>
       <p:sp>
         <p:nvSpPr>
-          <p:cNvPr id="9" name="Text 9"/>
+          <p:cNvPr id="7" name="Text 7"/>
           <p:cNvSpPr txBox="1"/>
           <p:nvPr/>
         </p:nvSpPr>
@@ -10867,145 +11000,237 @@
                 <a:ea typeface="Arial"/>
                 <a:cs typeface="Arial"/>
               </a:rPr>
-              <a:t xml:space="preserve">J. F. C. Kingman (1961), The single server</a:t>
-            </a:r>
-            <a:endParaRPr lang="en-US" sz="1500"/>
-          </a:p>
-          <a:p>
-            <a:pPr marL="0" indent="0">
-              <a:lnSpc>
-                <a:spcPts val="1950"/>
-              </a:lnSpc>
-              <a:spcAft>
-                <a:spcPts val="0"/>
-              </a:spcAft>
-              <a:buNone/>
-            </a:pPr>
-            <a:r>
-              <a:rPr lang="en-US" sz="1500" b="0">
-                <a:solidFill>
-                  <a:srgbClr val="202B33"/>
-                </a:solidFill>
-                <a:latin typeface="Arial"/>
-                <a:ea typeface="Arial"/>
-                <a:cs typeface="Arial"/>
-              </a:rPr>
-              <a:t xml:space="preserve">queue in heavy traffic —</a:t>
-            </a:r>
-            <a:endParaRPr lang="en-US" sz="1500"/>
-          </a:p>
-          <a:p>
-            <a:pPr marL="0" indent="0">
-              <a:lnSpc>
-                <a:spcPts val="1950"/>
-              </a:lnSpc>
-              <a:spcAft>
-                <a:spcPts val="0"/>
-              </a:spcAft>
-              <a:buNone/>
-            </a:pPr>
-            <a:r>
-              <a:rPr lang="en-US" sz="1500" b="0">
-                <a:solidFill>
-                  <a:srgbClr val="202B33"/>
-                </a:solidFill>
-                <a:latin typeface="Arial"/>
-                <a:ea typeface="Arial"/>
-                <a:cs typeface="Arial"/>
-              </a:rPr>
-              <a:t xml:space="preserve">https://www.cambridge.org/core/journals/mathematical-proceedings-of-the-cambridge-philosophical-society/article/abs/single-server-queue-in-heavy-traffic/81C55BC00A68FE6D5385638AA0B0AF37),</a:t>
-            </a:r>
-            <a:endParaRPr lang="en-US" sz="1500"/>
-          </a:p>
-          <a:p>
-            <a:pPr marL="0" indent="0">
-              <a:lnSpc>
-                <a:spcPts val="1950"/>
-              </a:lnSpc>
-              <a:spcAft>
-                <a:spcPts val="0"/>
-              </a:spcAft>
-              <a:buNone/>
-            </a:pPr>
-            <a:r>
-              <a:rPr lang="en-US" sz="1500" b="0">
-                <a:solidFill>
-                  <a:srgbClr val="202B33"/>
-                </a:solidFill>
-                <a:latin typeface="Arial"/>
-                <a:ea typeface="Arial"/>
-                <a:cs typeface="Arial"/>
-              </a:rPr>
-              <a:t xml:space="preserve">57(4), 902–904. John D. C. Little (1961),</a:t>
-            </a:r>
-            <a:endParaRPr lang="en-US" sz="1500"/>
-          </a:p>
-          <a:p>
-            <a:pPr marL="0" indent="0">
-              <a:lnSpc>
-                <a:spcPts val="1950"/>
-              </a:lnSpc>
-              <a:spcAft>
-                <a:spcPts val="0"/>
-              </a:spcAft>
-              <a:buNone/>
-            </a:pPr>
-            <a:r>
-              <a:rPr lang="en-US" sz="1500" b="0">
-                <a:solidFill>
-                  <a:srgbClr val="202B33"/>
-                </a:solidFill>
-                <a:latin typeface="Arial"/>
-                <a:ea typeface="Arial"/>
-                <a:cs typeface="Arial"/>
-              </a:rPr>
-              <a:t xml:space="preserve">[A Proof for the Queuing Formula: L =</a:t>
-            </a:r>
-            <a:endParaRPr lang="en-US" sz="1500"/>
-          </a:p>
-          <a:p>
-            <a:pPr marL="0" indent="0">
-              <a:lnSpc>
-                <a:spcPts val="1950"/>
-              </a:lnSpc>
-              <a:spcAft>
-                <a:spcPts val="0"/>
-              </a:spcAft>
-              <a:buNone/>
-            </a:pPr>
-            <a:r>
-              <a:rPr lang="en-US" sz="1500" b="0">
-                <a:solidFill>
-                  <a:srgbClr val="202B33"/>
-                </a:solidFill>
-                <a:latin typeface="Arial"/>
-                <a:ea typeface="Arial"/>
-                <a:cs typeface="Arial"/>
-              </a:rPr>
-              <a:t xml:space="preserve">λW](https://pubsonline.informs.org/doi/abs/10.1287/opre.9.3.383),</a:t>
-            </a:r>
-            <a:endParaRPr lang="en-US" sz="1500"/>
-          </a:p>
-          <a:p>
-            <a:pPr marL="0" indent="0">
-              <a:lnSpc>
-                <a:spcPts val="1950"/>
-              </a:lnSpc>
-              <a:spcAft>
-                <a:spcPts val="0"/>
-              </a:spcAft>
-              <a:buNone/>
-            </a:pPr>
-            <a:r>
-              <a:rPr lang="en-US" sz="1500" b="0">
-                <a:solidFill>
-                  <a:srgbClr val="202B33"/>
-                </a:solidFill>
-                <a:latin typeface="Arial"/>
-                <a:ea typeface="Arial"/>
-                <a:cs typeface="Arial"/>
-              </a:rPr>
-              <a:t xml:space="preserve">Operations Research 9(3, 383–387.</a:t>
+              <a:t xml:space="preserve">Debora Viana Thompson, Rebecca W. Hamilton</a:t>
+            </a:r>
+            <a:endParaRPr lang="en-US" sz="1500"/>
+          </a:p>
+          <a:p>
+            <a:pPr marL="0" indent="0">
+              <a:lnSpc>
+                <a:spcPts val="1950"/>
+              </a:lnSpc>
+              <a:spcAft>
+                <a:spcPts val="0"/>
+              </a:spcAft>
+              <a:buNone/>
+            </a:pPr>
+            <a:r>
+              <a:rPr lang="en-US" sz="1500" b="0">
+                <a:solidFill>
+                  <a:srgbClr val="202B33"/>
+                </a:solidFill>
+                <a:latin typeface="Arial"/>
+                <a:ea typeface="Arial"/>
+                <a:cs typeface="Arial"/>
+              </a:rPr>
+              <a:t xml:space="preserve">and Roland T. Rust (2005), Feature Fatigue:</a:t>
+            </a:r>
+            <a:endParaRPr lang="en-US" sz="1500"/>
+          </a:p>
+          <a:p>
+            <a:pPr marL="0" indent="0">
+              <a:lnSpc>
+                <a:spcPts val="1950"/>
+              </a:lnSpc>
+              <a:spcAft>
+                <a:spcPts val="0"/>
+              </a:spcAft>
+              <a:buNone/>
+            </a:pPr>
+            <a:r>
+              <a:rPr lang="en-US" sz="1500" b="0">
+                <a:solidFill>
+                  <a:srgbClr val="202B33"/>
+                </a:solidFill>
+                <a:latin typeface="Arial"/>
+                <a:ea typeface="Arial"/>
+                <a:cs typeface="Arial"/>
+              </a:rPr>
+              <a:t xml:space="preserve">When Product Capabilities Become Too Much</a:t>
+            </a:r>
+            <a:endParaRPr lang="en-US" sz="1500"/>
+          </a:p>
+          <a:p>
+            <a:pPr marL="0" indent="0">
+              <a:lnSpc>
+                <a:spcPts val="1950"/>
+              </a:lnSpc>
+              <a:spcAft>
+                <a:spcPts val="0"/>
+              </a:spcAft>
+              <a:buNone/>
+            </a:pPr>
+            <a:r>
+              <a:rPr lang="en-US" sz="1500" b="0">
+                <a:solidFill>
+                  <a:srgbClr val="202B33"/>
+                </a:solidFill>
+                <a:latin typeface="Arial"/>
+                <a:ea typeface="Arial"/>
+                <a:cs typeface="Arial"/>
+              </a:rPr>
+              <a:t xml:space="preserve">of a Good Thing —</a:t>
+            </a:r>
+            <a:endParaRPr lang="en-US" sz="1500"/>
+          </a:p>
+          <a:p>
+            <a:pPr marL="0" indent="0">
+              <a:lnSpc>
+                <a:spcPts val="1950"/>
+              </a:lnSpc>
+              <a:spcAft>
+                <a:spcPts val="0"/>
+              </a:spcAft>
+              <a:buNone/>
+            </a:pPr>
+            <a:r>
+              <a:rPr lang="en-US" sz="1500" b="0">
+                <a:solidFill>
+                  <a:srgbClr val="202B33"/>
+                </a:solidFill>
+                <a:latin typeface="Arial"/>
+                <a:ea typeface="Arial"/>
+                <a:cs typeface="Arial"/>
+              </a:rPr>
+              <a:t xml:space="preserve">https://doi.org/10.1509/jmkr.2005.42.4.431),</a:t>
+            </a:r>
+            <a:endParaRPr lang="en-US" sz="1500"/>
+          </a:p>
+          <a:p>
+            <a:pPr marL="0" indent="0">
+              <a:lnSpc>
+                <a:spcPts val="1950"/>
+              </a:lnSpc>
+              <a:spcAft>
+                <a:spcPts val="0"/>
+              </a:spcAft>
+              <a:buNone/>
+            </a:pPr>
+            <a:r>
+              <a:rPr lang="en-US" sz="1500" b="0">
+                <a:solidFill>
+                  <a:srgbClr val="202B33"/>
+                </a:solidFill>
+                <a:latin typeface="Arial"/>
+                <a:ea typeface="Arial"/>
+                <a:cs typeface="Arial"/>
+              </a:rPr>
+              <a:t xml:space="preserve">Journal of Marketing Research 42(4),</a:t>
+            </a:r>
+            <a:endParaRPr lang="en-US" sz="1500"/>
+          </a:p>
+          <a:p>
+            <a:pPr marL="0" indent="0">
+              <a:lnSpc>
+                <a:spcPts val="1950"/>
+              </a:lnSpc>
+              <a:spcAft>
+                <a:spcPts val="0"/>
+              </a:spcAft>
+              <a:buNone/>
+            </a:pPr>
+            <a:r>
+              <a:rPr lang="en-US" sz="1500" b="0">
+                <a:solidFill>
+                  <a:srgbClr val="202B33"/>
+                </a:solidFill>
+                <a:latin typeface="Arial"/>
+                <a:ea typeface="Arial"/>
+                <a:cs typeface="Arial"/>
+              </a:rPr>
+              <a:t xml:space="preserve">431–442. Noriaki Kano, Nobuhiko Seraku,</a:t>
+            </a:r>
+            <a:endParaRPr lang="en-US" sz="1500"/>
+          </a:p>
+          <a:p>
+            <a:pPr marL="0" indent="0">
+              <a:lnSpc>
+                <a:spcPts val="1950"/>
+              </a:lnSpc>
+              <a:spcAft>
+                <a:spcPts val="0"/>
+              </a:spcAft>
+              <a:buNone/>
+            </a:pPr>
+            <a:r>
+              <a:rPr lang="en-US" sz="1500" b="0">
+                <a:solidFill>
+                  <a:srgbClr val="202B33"/>
+                </a:solidFill>
+                <a:latin typeface="Arial"/>
+                <a:ea typeface="Arial"/>
+                <a:cs typeface="Arial"/>
+              </a:rPr>
+              <a:t xml:space="preserve">Fumio Takahashi and Shinichi Tsuji (1984),</a:t>
+            </a:r>
+            <a:endParaRPr lang="en-US" sz="1500"/>
+          </a:p>
+          <a:p>
+            <a:pPr marL="0" indent="0">
+              <a:lnSpc>
+                <a:spcPts val="1950"/>
+              </a:lnSpc>
+              <a:spcAft>
+                <a:spcPts val="0"/>
+              </a:spcAft>
+              <a:buNone/>
+            </a:pPr>
+            <a:r>
+              <a:rPr lang="en-US" sz="1500" b="0">
+                <a:solidFill>
+                  <a:srgbClr val="202B33"/>
+                </a:solidFill>
+                <a:latin typeface="Arial"/>
+                <a:ea typeface="Arial"/>
+                <a:cs typeface="Arial"/>
+              </a:rPr>
+              <a:t xml:space="preserve">Attractive Quality and Must-Be Quality,</a:t>
+            </a:r>
+            <a:endParaRPr lang="en-US" sz="1500"/>
+          </a:p>
+          <a:p>
+            <a:pPr marL="0" indent="0">
+              <a:lnSpc>
+                <a:spcPts val="1950"/>
+              </a:lnSpc>
+              <a:spcAft>
+                <a:spcPts val="0"/>
+              </a:spcAft>
+              <a:buNone/>
+            </a:pPr>
+            <a:r>
+              <a:rPr lang="en-US" sz="1500" b="0">
+                <a:solidFill>
+                  <a:srgbClr val="202B33"/>
+                </a:solidFill>
+                <a:latin typeface="Arial"/>
+                <a:ea typeface="Arial"/>
+                <a:cs typeface="Arial"/>
+              </a:rPr>
+              <a:t xml:space="preserve">Journal of the Japanese Society for Quality</a:t>
+            </a:r>
+            <a:endParaRPr lang="en-US" sz="1500"/>
+          </a:p>
+          <a:p>
+            <a:pPr marL="0" indent="0">
+              <a:lnSpc>
+                <a:spcPts val="1950"/>
+              </a:lnSpc>
+              <a:spcAft>
+                <a:spcPts val="0"/>
+              </a:spcAft>
+              <a:buNone/>
+            </a:pPr>
+            <a:r>
+              <a:rPr lang="en-US" sz="1500" b="0">
+                <a:solidFill>
+                  <a:srgbClr val="202B33"/>
+                </a:solidFill>
+                <a:latin typeface="Arial"/>
+                <a:ea typeface="Arial"/>
+                <a:cs typeface="Arial"/>
+              </a:rPr>
+              <a:t xml:space="preserve">Control 14(2, 39–48.</a:t>
             </a:r>
             <a:endParaRPr lang="en-US" sz="1500"/>
           </a:p>
@@ -11051,30 +11276,122 @@
                 <a:ea typeface="Arial"/>
                 <a:cs typeface="Arial"/>
               </a:rPr>
-              <a:t xml:space="preserve">Lisanne Bainbridge (1983), Ironies of</a:t>
-            </a:r>
-            <a:endParaRPr lang="en-US" sz="1500"/>
-          </a:p>
-          <a:p>
-            <a:pPr marL="0" indent="0">
-              <a:lnSpc>
-                <a:spcPts val="1950"/>
-              </a:lnSpc>
-              <a:spcAft>
-                <a:spcPts val="0"/>
-              </a:spcAft>
-              <a:buNone/>
-            </a:pPr>
-            <a:r>
-              <a:rPr lang="en-US" sz="1500" b="0">
-                <a:solidFill>
-                  <a:srgbClr val="202B33"/>
-                </a:solidFill>
-                <a:latin typeface="Arial"/>
-                <a:ea typeface="Arial"/>
-                <a:cs typeface="Arial"/>
-              </a:rPr>
-              <a:t xml:space="preserve">automation —</a:t>
+              <a:t xml:space="preserve">William Samuelson and Richard Zeckhauser</a:t>
+            </a:r>
+            <a:endParaRPr lang="en-US" sz="1500"/>
+          </a:p>
+          <a:p>
+            <a:pPr marL="0" indent="0">
+              <a:lnSpc>
+                <a:spcPts val="1950"/>
+              </a:lnSpc>
+              <a:spcAft>
+                <a:spcPts val="0"/>
+              </a:spcAft>
+              <a:buNone/>
+            </a:pPr>
+            <a:r>
+              <a:rPr lang="en-US" sz="1500" b="0">
+                <a:solidFill>
+                  <a:srgbClr val="202B33"/>
+                </a:solidFill>
+                <a:latin typeface="Arial"/>
+                <a:ea typeface="Arial"/>
+                <a:cs typeface="Arial"/>
+              </a:rPr>
+              <a:t xml:space="preserve">(1988), Status Quo Bias in Decision Making</a:t>
+            </a:r>
+            <a:endParaRPr lang="en-US" sz="1500"/>
+          </a:p>
+          <a:p>
+            <a:pPr marL="0" indent="0">
+              <a:lnSpc>
+                <a:spcPts val="1950"/>
+              </a:lnSpc>
+              <a:spcAft>
+                <a:spcPts val="0"/>
+              </a:spcAft>
+              <a:buNone/>
+            </a:pPr>
+            <a:r>
+              <a:rPr lang="en-US" sz="1500" b="0">
+                <a:solidFill>
+                  <a:srgbClr val="202B33"/>
+                </a:solidFill>
+                <a:latin typeface="Arial"/>
+                <a:ea typeface="Arial"/>
+                <a:cs typeface="Arial"/>
+              </a:rPr>
+              <a:t xml:space="preserve">— https://doi.org/10.1007/BF00055564),</a:t>
+            </a:r>
+            <a:endParaRPr lang="en-US" sz="1500"/>
+          </a:p>
+          <a:p>
+            <a:pPr marL="0" indent="0">
+              <a:lnSpc>
+                <a:spcPts val="1950"/>
+              </a:lnSpc>
+              <a:spcAft>
+                <a:spcPts val="0"/>
+              </a:spcAft>
+              <a:buNone/>
+            </a:pPr>
+            <a:r>
+              <a:rPr lang="en-US" sz="1500" b="0">
+                <a:solidFill>
+                  <a:srgbClr val="202B33"/>
+                </a:solidFill>
+                <a:latin typeface="Arial"/>
+                <a:ea typeface="Arial"/>
+                <a:cs typeface="Arial"/>
+              </a:rPr>
+              <a:t xml:space="preserve">Journal of Risk and Uncertainty 1(1), 7–59.</a:t>
+            </a:r>
+            <a:endParaRPr lang="en-US" sz="1500"/>
+          </a:p>
+          <a:p>
+            <a:pPr marL="0" indent="0">
+              <a:lnSpc>
+                <a:spcPts val="1950"/>
+              </a:lnSpc>
+              <a:spcAft>
+                <a:spcPts val="0"/>
+              </a:spcAft>
+              <a:buNone/>
+            </a:pPr>
+            <a:r>
+              <a:rPr lang="en-US" sz="1500" b="0">
+                <a:solidFill>
+                  <a:srgbClr val="202B33"/>
+                </a:solidFill>
+                <a:latin typeface="Arial"/>
+                <a:ea typeface="Arial"/>
+                <a:cs typeface="Arial"/>
+              </a:rPr>
+              <a:t xml:space="preserve">Daniel Kahneman, Jack L. Knetsch and</a:t>
+            </a:r>
+            <a:endParaRPr lang="en-US" sz="1500"/>
+          </a:p>
+          <a:p>
+            <a:pPr marL="0" indent="0">
+              <a:lnSpc>
+                <a:spcPts val="1950"/>
+              </a:lnSpc>
+              <a:spcAft>
+                <a:spcPts val="0"/>
+              </a:spcAft>
+              <a:buNone/>
+            </a:pPr>
+            <a:r>
+              <a:rPr lang="en-US" sz="1500" b="0">
+                <a:solidFill>
+                  <a:srgbClr val="202B33"/>
+                </a:solidFill>
+                <a:latin typeface="Arial"/>
+                <a:ea typeface="Arial"/>
+                <a:cs typeface="Arial"/>
+              </a:rPr>
+              <a:t xml:space="preserve">Richard H. Thaler (1990), [Experimental</a:t>
             </a:r>
             <a:endParaRPr lang="en-US" sz="1500"/>
           </a:p>
@@ -11123,191 +11440,398 @@
                 <a:ea typeface="Arial"/>
                 <a:cs typeface="Arial"/>
               </a:rPr>
-              <a:t xml:space="preserve">https://www.sciencedirect.com/science/article/pii/0005109883900468),</a:t>
-            </a:r>
-            <a:endParaRPr lang="en-US" sz="1500"/>
-          </a:p>
-          <a:p>
-            <a:pPr marL="0" indent="0">
-              <a:lnSpc>
-                <a:spcPts val="1950"/>
-              </a:lnSpc>
-              <a:spcAft>
-                <a:spcPts val="0"/>
-              </a:spcAft>
-              <a:buNone/>
-            </a:pPr>
-            <a:r>
-              <a:rPr lang="en-US" sz="1500" b="0">
-                <a:solidFill>
-                  <a:srgbClr val="202B33"/>
-                </a:solidFill>
-                <a:latin typeface="Arial"/>
-                <a:ea typeface="Arial"/>
-                <a:cs typeface="Arial"/>
-              </a:rPr>
-              <a:t xml:space="preserve">Automatica 19(6), 775–779. Linda J. Skitka,</a:t>
-            </a:r>
-            <a:endParaRPr lang="en-US" sz="1500"/>
-          </a:p>
-          <a:p>
-            <a:pPr marL="0" indent="0">
-              <a:lnSpc>
-                <a:spcPts val="1950"/>
-              </a:lnSpc>
-              <a:spcAft>
-                <a:spcPts val="0"/>
-              </a:spcAft>
-              <a:buNone/>
-            </a:pPr>
-            <a:r>
-              <a:rPr lang="en-US" sz="1500" b="0">
-                <a:solidFill>
-                  <a:srgbClr val="202B33"/>
-                </a:solidFill>
-                <a:latin typeface="Arial"/>
-                <a:ea typeface="Arial"/>
-                <a:cs typeface="Arial"/>
-              </a:rPr>
-              <a:t xml:space="preserve">Kathleen L. Mosier and Mark Burdick (1999),</a:t>
-            </a:r>
-            <a:endParaRPr lang="en-US" sz="1500"/>
-          </a:p>
-          <a:p>
-            <a:pPr marL="0" indent="0">
-              <a:lnSpc>
-                <a:spcPts val="1950"/>
-              </a:lnSpc>
-              <a:spcAft>
-                <a:spcPts val="0"/>
-              </a:spcAft>
-              <a:buNone/>
-            </a:pPr>
-            <a:r>
-              <a:rPr lang="en-US" sz="1500" b="0">
-                <a:solidFill>
-                  <a:srgbClr val="202B33"/>
-                </a:solidFill>
-                <a:latin typeface="Arial"/>
-                <a:ea typeface="Arial"/>
-                <a:cs typeface="Arial"/>
-              </a:rPr>
-              <a:t xml:space="preserve">[Does automation bias</a:t>
-            </a:r>
-            <a:endParaRPr lang="en-US" sz="1500"/>
-          </a:p>
-          <a:p>
-            <a:pPr marL="0" indent="0">
-              <a:lnSpc>
-                <a:spcPts val="1950"/>
-              </a:lnSpc>
-              <a:spcAft>
-                <a:spcPts val="0"/>
-              </a:spcAft>
-              <a:buNone/>
-            </a:pPr>
-            <a:r>
-              <a:rPr lang="en-US" sz="1500" b="0">
-                <a:solidFill>
-                  <a:srgbClr val="202B33"/>
-                </a:solidFill>
-                <a:latin typeface="Arial"/>
-                <a:ea typeface="Arial"/>
-                <a:cs typeface="Arial"/>
-              </a:rPr>
-              <a:t xml:space="preserve">decision-making?](https://doi.org/10.1006/ijhc.1999.0252),</a:t>
-            </a:r>
-            <a:endParaRPr lang="en-US" sz="1500"/>
-          </a:p>
-          <a:p>
-            <a:pPr marL="0" indent="0">
-              <a:lnSpc>
-                <a:spcPts val="1950"/>
-              </a:lnSpc>
-              <a:spcAft>
-                <a:spcPts val="0"/>
-              </a:spcAft>
-              <a:buNone/>
-            </a:pPr>
-            <a:r>
-              <a:rPr lang="en-US" sz="1500" b="0">
-                <a:solidFill>
-                  <a:srgbClr val="202B33"/>
-                </a:solidFill>
-                <a:latin typeface="Arial"/>
-                <a:ea typeface="Arial"/>
-                <a:cs typeface="Arial"/>
-              </a:rPr>
-              <a:t xml:space="preserve">International Journal of Human-Computer</a:t>
-            </a:r>
-            <a:endParaRPr lang="en-US" sz="1500"/>
-          </a:p>
-          <a:p>
-            <a:pPr marL="0" indent="0">
-              <a:lnSpc>
-                <a:spcPts val="1950"/>
-              </a:lnSpc>
-              <a:spcAft>
-                <a:spcPts val="0"/>
-              </a:spcAft>
-              <a:buNone/>
-            </a:pPr>
-            <a:r>
-              <a:rPr lang="en-US" sz="1500" b="0">
-                <a:solidFill>
-                  <a:srgbClr val="202B33"/>
-                </a:solidFill>
-                <a:latin typeface="Arial"/>
-                <a:ea typeface="Arial"/>
-                <a:cs typeface="Arial"/>
-              </a:rPr>
-              <a:t xml:space="preserve">Studies 51(5, 991–1006. A flight-simulation</a:t>
-            </a:r>
-            <a:endParaRPr lang="en-US" sz="1500"/>
-          </a:p>
-          <a:p>
-            <a:pPr marL="0" indent="0">
-              <a:lnSpc>
-                <a:spcPts val="1950"/>
-              </a:lnSpc>
-              <a:spcAft>
-                <a:spcPts val="0"/>
-              </a:spcAft>
-              <a:buNone/>
-            </a:pPr>
-            <a:r>
-              <a:rPr lang="en-US" sz="1500" b="0">
-                <a:solidFill>
-                  <a:srgbClr val="202B33"/>
-                </a:solidFill>
-                <a:latin typeface="Arial"/>
-                <a:ea typeface="Arial"/>
-                <a:cs typeface="Arial"/>
-              </a:rPr>
-              <a:t xml:space="preserve">task with a monitoring aid, not a</a:t>
-            </a:r>
-            <a:endParaRPr lang="en-US" sz="1500"/>
-          </a:p>
-          <a:p>
-            <a:pPr marL="0" indent="0">
-              <a:lnSpc>
-                <a:spcPts val="1950"/>
-              </a:lnSpc>
-              <a:spcAft>
-                <a:spcPts val="0"/>
-              </a:spcAft>
-              <a:buNone/>
-            </a:pPr>
-            <a:r>
-              <a:rPr lang="en-US" sz="1500" b="0">
-                <a:solidFill>
-                  <a:srgbClr val="202B33"/>
-                </a:solidFill>
-                <a:latin typeface="Arial"/>
-                <a:ea typeface="Arial"/>
-                <a:cs typeface="Arial"/>
-              </a:rPr>
-              <a:t xml:space="preserve">code-review trial.</a:t>
+              <a:t xml:space="preserve">Tests of the Endowment Effect and the Coase</a:t>
+            </a:r>
+            <a:endParaRPr lang="en-US" sz="1500"/>
+          </a:p>
+          <a:p>
+            <a:pPr marL="0" indent="0">
+              <a:lnSpc>
+                <a:spcPts val="1950"/>
+              </a:lnSpc>
+              <a:spcAft>
+                <a:spcPts val="0"/>
+              </a:spcAft>
+              <a:buNone/>
+            </a:pPr>
+            <a:r>
+              <a:rPr lang="en-US" sz="1500" b="0">
+                <a:solidFill>
+                  <a:srgbClr val="202B33"/>
+                </a:solidFill>
+                <a:latin typeface="Arial"/>
+                <a:ea typeface="Arial"/>
+                <a:cs typeface="Arial"/>
+              </a:rPr>
+              <a:t xml:space="preserve">Theorem](https://doi.org/10.1086/261737),</a:t>
+            </a:r>
+            <a:endParaRPr lang="en-US" sz="1500"/>
+          </a:p>
+          <a:p>
+            <a:pPr marL="0" indent="0">
+              <a:lnSpc>
+                <a:spcPts val="1950"/>
+              </a:lnSpc>
+              <a:spcAft>
+                <a:spcPts val="0"/>
+              </a:spcAft>
+              <a:buNone/>
+            </a:pPr>
+            <a:r>
+              <a:rPr lang="en-US" sz="1500" b="0">
+                <a:solidFill>
+                  <a:srgbClr val="202B33"/>
+                </a:solidFill>
+                <a:latin typeface="Arial"/>
+                <a:ea typeface="Arial"/>
+                <a:cs typeface="Arial"/>
+              </a:rPr>
+              <a:t xml:space="preserve">Journal of Political Economy 98(6),</a:t>
+            </a:r>
+            <a:endParaRPr lang="en-US" sz="1500"/>
+          </a:p>
+          <a:p>
+            <a:pPr marL="0" indent="0">
+              <a:lnSpc>
+                <a:spcPts val="1950"/>
+              </a:lnSpc>
+              <a:spcAft>
+                <a:spcPts val="0"/>
+              </a:spcAft>
+              <a:buNone/>
+            </a:pPr>
+            <a:r>
+              <a:rPr lang="en-US" sz="1500" b="0">
+                <a:solidFill>
+                  <a:srgbClr val="202B33"/>
+                </a:solidFill>
+                <a:latin typeface="Arial"/>
+                <a:ea typeface="Arial"/>
+                <a:cs typeface="Arial"/>
+              </a:rPr>
+              <a:t xml:space="preserve">1325–1348. Jakob Nielsen (1994), [Ten</a:t>
+            </a:r>
+            <a:endParaRPr lang="en-US" sz="1500"/>
+          </a:p>
+          <a:p>
+            <a:pPr marL="0" indent="0">
+              <a:lnSpc>
+                <a:spcPts val="1950"/>
+              </a:lnSpc>
+              <a:spcAft>
+                <a:spcPts val="0"/>
+              </a:spcAft>
+              <a:buNone/>
+            </a:pPr>
+            <a:r>
+              <a:rPr lang="en-US" sz="1500" b="0">
+                <a:solidFill>
+                  <a:srgbClr val="202B33"/>
+                </a:solidFill>
+                <a:latin typeface="Arial"/>
+                <a:ea typeface="Arial"/>
+                <a:cs typeface="Arial"/>
+              </a:rPr>
+              <a:t xml:space="preserve">Usability Heuristics for User Interface</a:t>
+            </a:r>
+            <a:endParaRPr lang="en-US" sz="1500"/>
+          </a:p>
+          <a:p>
+            <a:pPr marL="0" indent="0">
+              <a:lnSpc>
+                <a:spcPts val="1950"/>
+              </a:lnSpc>
+              <a:spcAft>
+                <a:spcPts val="0"/>
+              </a:spcAft>
+              <a:buNone/>
+            </a:pPr>
+            <a:r>
+              <a:rPr lang="en-US" sz="1500" b="0">
+                <a:solidFill>
+                  <a:srgbClr val="202B33"/>
+                </a:solidFill>
+                <a:latin typeface="Arial"/>
+                <a:ea typeface="Arial"/>
+                <a:cs typeface="Arial"/>
+              </a:rPr>
+              <a:t xml:space="preserve">Design](https://www.nngroup.com/articles/ten-usability-heuristics/.</a:t>
+            </a:r>
+            <a:endParaRPr lang="en-US" sz="1500"/>
+          </a:p>
+          <a:p>
+            <a:pPr marL="0" indent="0">
+              <a:lnSpc>
+                <a:spcPts val="1950"/>
+              </a:lnSpc>
+              <a:spcAft>
+                <a:spcPts val="0"/>
+              </a:spcAft>
+              <a:buNone/>
+            </a:pPr>
+            <a:r>
+              <a:rPr lang="en-US" sz="1500" b="0">
+                <a:solidFill>
+                  <a:srgbClr val="202B33"/>
+                </a:solidFill>
+                <a:latin typeface="Arial"/>
+                <a:ea typeface="Arial"/>
+                <a:cs typeface="Arial"/>
+              </a:rPr>
+              <a:t xml:space="preserve"/>
+            </a:r>
+            <a:endParaRPr lang="en-US" sz="1500"/>
+          </a:p>
+          <a:p>
+            <a:pPr marL="0" indent="0">
+              <a:lnSpc>
+                <a:spcPts val="1950"/>
+              </a:lnSpc>
+              <a:spcAft>
+                <a:spcPts val="0"/>
+              </a:spcAft>
+              <a:buNone/>
+            </a:pPr>
+            <a:r>
+              <a:rPr lang="en-US" sz="1500" b="0">
+                <a:solidFill>
+                  <a:srgbClr val="202B33"/>
+                </a:solidFill>
+                <a:latin typeface="Arial"/>
+                <a:ea typeface="Arial"/>
+                <a:cs typeface="Arial"/>
+              </a:rPr>
+              <a:t xml:space="preserve">François Chollet (2019), On the Measure of</a:t>
+            </a:r>
+            <a:endParaRPr lang="en-US" sz="1500"/>
+          </a:p>
+          <a:p>
+            <a:pPr marL="0" indent="0">
+              <a:lnSpc>
+                <a:spcPts val="1950"/>
+              </a:lnSpc>
+              <a:spcAft>
+                <a:spcPts val="0"/>
+              </a:spcAft>
+              <a:buNone/>
+            </a:pPr>
+            <a:r>
+              <a:rPr lang="en-US" sz="1500" b="0">
+                <a:solidFill>
+                  <a:srgbClr val="202B33"/>
+                </a:solidFill>
+                <a:latin typeface="Arial"/>
+                <a:ea typeface="Arial"/>
+                <a:cs typeface="Arial"/>
+              </a:rPr>
+              <a:t xml:space="preserve">Intelligence —</a:t>
+            </a:r>
+            <a:endParaRPr lang="en-US" sz="1500"/>
+          </a:p>
+          <a:p>
+            <a:pPr marL="0" indent="0">
+              <a:lnSpc>
+                <a:spcPts val="1950"/>
+              </a:lnSpc>
+              <a:spcAft>
+                <a:spcPts val="0"/>
+              </a:spcAft>
+              <a:buNone/>
+            </a:pPr>
+            <a:r>
+              <a:rPr lang="en-US" sz="1500" b="0">
+                <a:solidFill>
+                  <a:srgbClr val="202B33"/>
+                </a:solidFill>
+                <a:latin typeface="Arial"/>
+                <a:ea typeface="Arial"/>
+                <a:cs typeface="Arial"/>
+              </a:rPr>
+              <a:t xml:space="preserve">https://arxiv.org/abs/1911.01547),</a:t>
+            </a:r>
+            <a:endParaRPr lang="en-US" sz="1500"/>
+          </a:p>
+          <a:p>
+            <a:pPr marL="0" indent="0">
+              <a:lnSpc>
+                <a:spcPts val="1950"/>
+              </a:lnSpc>
+              <a:spcAft>
+                <a:spcPts val="0"/>
+              </a:spcAft>
+              <a:buNone/>
+            </a:pPr>
+            <a:r>
+              <a:rPr lang="en-US" sz="1500" b="0">
+                <a:solidFill>
+                  <a:srgbClr val="202B33"/>
+                </a:solidFill>
+                <a:latin typeface="Arial"/>
+                <a:ea typeface="Arial"/>
+                <a:cs typeface="Arial"/>
+              </a:rPr>
+              <a:t xml:space="preserve">arXiv:1911.01547. Parshin Shojaee and</a:t>
+            </a:r>
+            <a:endParaRPr lang="en-US" sz="1500"/>
+          </a:p>
+          <a:p>
+            <a:pPr marL="0" indent="0">
+              <a:lnSpc>
+                <a:spcPts val="1950"/>
+              </a:lnSpc>
+              <a:spcAft>
+                <a:spcPts val="0"/>
+              </a:spcAft>
+              <a:buNone/>
+            </a:pPr>
+            <a:r>
+              <a:rPr lang="en-US" sz="1500" b="0">
+                <a:solidFill>
+                  <a:srgbClr val="202B33"/>
+                </a:solidFill>
+                <a:latin typeface="Arial"/>
+                <a:ea typeface="Arial"/>
+                <a:cs typeface="Arial"/>
+              </a:rPr>
+              <a:t xml:space="preserve">colleagues (2025), [The Illusion of</a:t>
+            </a:r>
+            <a:endParaRPr lang="en-US" sz="1500"/>
+          </a:p>
+          <a:p>
+            <a:pPr marL="0" indent="0">
+              <a:lnSpc>
+                <a:spcPts val="1950"/>
+              </a:lnSpc>
+              <a:spcAft>
+                <a:spcPts val="0"/>
+              </a:spcAft>
+              <a:buNone/>
+            </a:pPr>
+            <a:r>
+              <a:rPr lang="en-US" sz="1500" b="0">
+                <a:solidFill>
+                  <a:srgbClr val="202B33"/>
+                </a:solidFill>
+                <a:latin typeface="Arial"/>
+                <a:ea typeface="Arial"/>
+                <a:cs typeface="Arial"/>
+              </a:rPr>
+              <a:t xml:space="preserve">Thinking](https://machinelearning.apple.com/research/illusion-of-thinking),</a:t>
+            </a:r>
+            <a:endParaRPr lang="en-US" sz="1500"/>
+          </a:p>
+          <a:p>
+            <a:pPr marL="0" indent="0">
+              <a:lnSpc>
+                <a:spcPts val="1950"/>
+              </a:lnSpc>
+              <a:spcAft>
+                <a:spcPts val="0"/>
+              </a:spcAft>
+              <a:buNone/>
+            </a:pPr>
+            <a:r>
+              <a:rPr lang="en-US" sz="1500" b="0">
+                <a:solidFill>
+                  <a:srgbClr val="202B33"/>
+                </a:solidFill>
+                <a:latin typeface="Arial"/>
+                <a:ea typeface="Arial"/>
+                <a:cs typeface="Arial"/>
+              </a:rPr>
+              <a:t xml:space="preserve">Apple Machine Learning Research; and the</a:t>
+            </a:r>
+            <a:endParaRPr lang="en-US" sz="1500"/>
+          </a:p>
+          <a:p>
+            <a:pPr marL="0" indent="0">
+              <a:lnSpc>
+                <a:spcPts val="1950"/>
+              </a:lnSpc>
+              <a:spcAft>
+                <a:spcPts val="0"/>
+              </a:spcAft>
+              <a:buNone/>
+            </a:pPr>
+            <a:r>
+              <a:rPr lang="en-US" sz="1500" b="0">
+                <a:solidFill>
+                  <a:srgbClr val="202B33"/>
+                </a:solidFill>
+                <a:latin typeface="Arial"/>
+                <a:ea typeface="Arial"/>
+                <a:cs typeface="Arial"/>
+              </a:rPr>
+              <a:t xml:space="preserve">rebuttal, [The Illusion of the Illusion of</a:t>
+            </a:r>
+            <a:endParaRPr lang="en-US" sz="1500"/>
+          </a:p>
+          <a:p>
+            <a:pPr marL="0" indent="0">
+              <a:lnSpc>
+                <a:spcPts val="1950"/>
+              </a:lnSpc>
+              <a:spcAft>
+                <a:spcPts val="0"/>
+              </a:spcAft>
+              <a:buNone/>
+            </a:pPr>
+            <a:r>
+              <a:rPr lang="en-US" sz="1500" b="0">
+                <a:solidFill>
+                  <a:srgbClr val="202B33"/>
+                </a:solidFill>
+                <a:latin typeface="Arial"/>
+                <a:ea typeface="Arial"/>
+                <a:cs typeface="Arial"/>
+              </a:rPr>
+              <a:t xml:space="preserve">Thinking](https://arxiv.org/abs/2506.09250,</a:t>
+            </a:r>
+            <a:endParaRPr lang="en-US" sz="1500"/>
+          </a:p>
+          <a:p>
+            <a:pPr marL="0" indent="0">
+              <a:lnSpc>
+                <a:spcPts val="1950"/>
+              </a:lnSpc>
+              <a:spcAft>
+                <a:spcPts val="0"/>
+              </a:spcAft>
+              <a:buNone/>
+            </a:pPr>
+            <a:r>
+              <a:rPr lang="en-US" sz="1500" b="0">
+                <a:solidFill>
+                  <a:srgbClr val="202B33"/>
+                </a:solidFill>
+                <a:latin typeface="Arial"/>
+                <a:ea typeface="Arial"/>
+                <a:cs typeface="Arial"/>
+              </a:rPr>
+              <a:t xml:space="preserve">arXiv:2506.09250. Present as a contested</a:t>
+            </a:r>
+            <a:endParaRPr lang="en-US" sz="1500"/>
+          </a:p>
+          <a:p>
+            <a:pPr marL="0" indent="0">
+              <a:lnSpc>
+                <a:spcPts val="1950"/>
+              </a:lnSpc>
+              <a:spcAft>
+                <a:spcPts val="0"/>
+              </a:spcAft>
+              <a:buNone/>
+            </a:pPr>
+            <a:r>
+              <a:rPr lang="en-US" sz="1500" b="0">
+                <a:solidFill>
+                  <a:srgbClr val="202B33"/>
+                </a:solidFill>
+                <a:latin typeface="Arial"/>
+                <a:ea typeface="Arial"/>
+                <a:cs typeface="Arial"/>
+              </a:rPr>
+              <a:t xml:space="preserve">exchange, not a settled result.</a:t>
             </a:r>
             <a:endParaRPr lang="en-US" sz="1500"/>
           </a:p>
@@ -11356,7 +11880,7 @@
                 <a:ea typeface="Arial"/>
                 <a:cs typeface="Arial"/>
               </a:rPr>
-              <a:t xml:space="preserve">Code Is Cheap. Judgment Is Expensive.</a:t>
+              <a:t xml:space="preserve">Turn Your Thinkin' Tokens Up to 11</a:t>
             </a:r>
             <a:endParaRPr lang="en-US" sz="975"/>
           </a:p>
